--- a/sunum/mcp-server-stratejisi.pptx
+++ b/sunum/mcp-server-stratejisi.pptx
@@ -10,6 +10,7 @@
     <p:sldId id="258" r:id="rId9"/>
     <p:sldId id="259" r:id="rId10"/>
     <p:sldId id="260" r:id="rId11"/>
+    <p:sldId id="261" r:id="rId12"/>
   </p:sldIdLst>
   <p:sldSz cx="9144000" cy="6858000" type="screen4x3"/>
   <p:notesSz cx="6858000" cy="9144000"/>
@@ -506,55 +507,66 @@
           <a:lstStyle/>
           <a:p>
             <a:r>
-              <a:t>[KAPAK — ~1 dk]</a:t>
+              <a:t>[KAPAK — ~1,5 dk]  Sunumun tamamı tek bir hikâye; bu slayt hikâyenin sorusunu ortaya koyar.</a:t>
             </a:r>
           </a:p>
           <a:p/>
           <a:p>
             <a:r>
-              <a:t>AÇILIŞ</a:t>
-            </a:r>
-          </a:p>
-          <a:p>
-            <a:r>
-              <a:t>"Bugün yeni bir yapay zekâ ürünü önermeye gelmedim. Elimizdeki parçaların birbirine nasıl</a:t>
-            </a:r>
-          </a:p>
-          <a:p>
-            <a:r>
-              <a:t>bağlanacağını konuşacağız. Dört slayt, on beş dakika."</a:t>
+              <a:t>AÇILIŞ (ezberleyin, slayttan okumayın):</a:t>
+            </a:r>
+          </a:p>
+          <a:p>
+            <a:r>
+              <a:t>"Bugün size bir kütüphane sürümü seçimini anlatacağım. Ama oradan başlarsam kimse neden</a:t>
+            </a:r>
+          </a:p>
+          <a:p>
+            <a:r>
+              <a:t>önemsesin bilemez. O yüzden hikâyenin başından başlayacağım: chat uygulamasını devreye</a:t>
+            </a:r>
+          </a:p>
+          <a:p>
+            <a:r>
+              <a:t>aldıktan sonra kullanıcıdan gelen ilk ciddi soruyla."</a:t>
             </a:r>
           </a:p>
           <a:p/>
           <a:p>
             <a:r>
-              <a:t>ÇERÇEVE — üç cümlede konum:</a:t>
-            </a:r>
-          </a:p>
-          <a:p>
-            <a:r>
-              <a:t>• Model erişimi var (kurum içi gateway çalışıyor).</a:t>
-            </a:r>
-          </a:p>
-          <a:p>
-            <a:r>
-              <a:t>• Chat uygulaması var ve MCP client tarafını konuşuyor.</a:t>
-            </a:r>
-          </a:p>
-          <a:p>
-            <a:r>
-              <a:t>• Eksik olan: iş uygulamalarının kendi yeteneklerini asistana açtığı taraf — MCP server.</a:t>
+              <a:t>YOL HARİTASINI GÖSTERİN (alttaki dört kutuyu tek tek işaret edin):</a:t>
+            </a:r>
+          </a:p>
+          <a:p>
+            <a:r>
+              <a:t>"Dört adım: sorun nereden çıktı, çözüm olarak ortaya çıkan ortak dil, bunu kimin ve hangi</a:t>
+            </a:r>
+          </a:p>
+          <a:p>
+            <a:r>
+              <a:t>dilde yazacağı, ve en sonunda hangi altyapının üstüne kuracağımız."</a:t>
             </a:r>
           </a:p>
           <a:p/>
           <a:p>
             <a:r>
-              <a:t>TON: Bu bir "yatırım talebi" sunumu değil, "mimari yön" sunumu. Talep slaytı bilinçli olarak yok.</a:t>
-            </a:r>
-          </a:p>
-          <a:p>
-            <a:r>
-              <a:t>Dinleyici yazılım/altyapı kökenli — kavramları basitleştirip geçmeyin, teknik soruya hazır olun.</a:t>
+              <a:t>NEDEN BU SIRA (kendinize not): Dinleyici MCP'yi bilmiyor. 1.x/2.x farkını en başta anlatsak</a:t>
+            </a:r>
+          </a:p>
+          <a:p>
+            <a:r>
+              <a:t>soyut kalırdı. Farkı anlamlı kılan şey, ondan önce verdiğimiz iki sözdür — bu yüzden karar</a:t>
+            </a:r>
+          </a:p>
+          <a:p>
+            <a:r>
+              <a:t>slaydı sona bırakıldı. Sırayı bozmayın.</a:t>
+            </a:r>
+          </a:p>
+          <a:p/>
+          <a:p>
+            <a:r>
+              <a:t>SÜRE: kapak 1,5 dk · ① 3 dk · ② 3,5 dk · ③ 3,5 dk · ④ 3 dk · kapanış 1,5 dk ≈ 16 dk.</a:t>
             </a:r>
           </a:p>
         </p:txBody>
@@ -624,127 +636,97 @@
           <a:lstStyle/>
           <a:p>
             <a:r>
-              <a:t>[MCP CLIENT / SERVER — ~4 dk. Sunumun kavram slaydı; buradan kopan sonrasını takip edemez.]</a:t>
+              <a:t>[① SORUN — ~3 dk]  Amaç: MCP'yi henüz telaffuz etmeden, ona olan İHTİYACI kurmak.</a:t>
             </a:r>
           </a:p>
           <a:p/>
           <a:p>
             <a:r>
-              <a:t>ANLATIM SIRASI</a:t>
-            </a:r>
-          </a:p>
-          <a:p>
-            <a:r>
-              <a:t>1) Soldan başla: "Chat uygulamamız MCP client. Bu yeni bir şey değil, bugün çalışıyor."</a:t>
-            </a:r>
-          </a:p>
-          <a:p>
-            <a:r>
-              <a:t>2) Ortaya geç: "Protokolün diğer ucu boş. Kredi, mevduat, operasyon uygulamalarımız asistana</a:t>
-            </a:r>
-          </a:p>
-          <a:p>
-            <a:r>
-              <a:t>   'ben şunu yapabilirim' diyemiyor."</a:t>
-            </a:r>
-          </a:p>
-          <a:p>
-            <a:r>
-              <a:t>3) Sağı hızlı geç: "Arkadaki sistemler değişmiyor — bu önemli, birazdan yetki kısmında döneceğiz."</a:t>
+              <a:t>ANLATIM — üç kartı sırayla, hikâye anlatır gibi:</a:t>
+            </a:r>
+          </a:p>
+          <a:p>
+            <a:r>
+              <a:t>1) "Chat uygulamasını açtık, iyi de gitti. Metin yazıyor, özetliyor."</a:t>
+            </a:r>
+          </a:p>
+          <a:p>
+            <a:r>
+              <a:t>2) "Sonra şu soru geldi — ve bu soru bu sunumun sebebi:</a:t>
+            </a:r>
+          </a:p>
+          <a:p>
+            <a:r>
+              <a:t>    'Bu asistan benim müşterimin kredi başvurusu ne durumda söyleyemiyor mu?'</a:t>
+            </a:r>
+          </a:p>
+          <a:p>
+            <a:r>
+              <a:t>    Cevap: hayır. Çünkü model dünyayı biliyor ama BİZİ bilmiyor."</a:t>
+            </a:r>
+          </a:p>
+          <a:p>
+            <a:r>
+              <a:t>3) "İlk refleksimiz doğaldı: o zaman bağlayalım. Her uygulama için özel bir bağlantı yazalım."</a:t>
             </a:r>
           </a:p>
           <a:p/>
           <a:p>
             <a:r>
-              <a:t>TEKNİK ZEMİN (soru gelirse; sormazlarsa girmeyin)</a:t>
-            </a:r>
-          </a:p>
-          <a:p>
-            <a:r>
-              <a:t>• MCP, JSON-RPC 2.0 üzerine kurulu bir protokol. Taşıma: stdio (yerel süreç) veya HTTP.</a:t>
-            </a:r>
-          </a:p>
-          <a:p>
-            <a:r>
-              <a:t>  Spring AI 2.0'da streamable HTTP varsayılan; eski SSE taşıması artık önerilmiyor.</a:t>
-            </a:r>
-          </a:p>
-          <a:p>
-            <a:r>
-              <a:t>• Keşif protokolün parçası: client sunucuya "hangi yeteneklerin var" diye sorar (tools/list),</a:t>
-            </a:r>
-          </a:p>
-          <a:p>
-            <a:r>
-              <a:t>  sunucu yetenekleri JSON Schema ile tarif eder, model buna bakarak çağrıyı kurar.</a:t>
-            </a:r>
-          </a:p>
-          <a:p>
-            <a:r>
-              <a:t>  SONUÇ: yeni yetenek eklendiğinde CLIENT TARAFINDA KOD DEĞİŞMEZ. Slaydın asıl mesajı bu.</a:t>
-            </a:r>
-          </a:p>
-          <a:p>
-            <a:r>
-              <a:t>• Üç birincil yapı: tool (çağrılabilir işlem — yan etkisi olabilir), resource (salt okunur içerik),</a:t>
-            </a:r>
-          </a:p>
-          <a:p>
-            <a:r>
-              <a:t>  prompt (hazır şablon). Biz önce tool ile başlayacağız; resource, doküman senaryosunda gelir.</a:t>
+              <a:t>BURADA DURUN — asıl mesaj tıkanma kutusunda:</a:t>
+            </a:r>
+          </a:p>
+          <a:p>
+            <a:r>
+              <a:t>"Her yeni yetenek ayrı bir proje oldu. Daha kötüsü: yetki mantığını her entegrasyonda yeniden</a:t>
+            </a:r>
+          </a:p>
+          <a:p>
+            <a:r>
+              <a:t>yazıyorduk. Ve ikinci bir asistan arayüzü eklendiğinde her şey baştan tekrarlanacaktı."</a:t>
+            </a:r>
+          </a:p>
+          <a:p>
+            <a:r>
+              <a:t>Elde/tahtada sayıya dökün: "4 uygulama, 2 asistan → 8 ayrı entegrasyon. 8 uygulama olsa 16."</a:t>
             </a:r>
           </a:p>
           <a:p/>
           <a:p>
             <a:r>
-              <a:t>BEKLENEN SORU — "Bunun REST'ten farkı ne?"</a:t>
-            </a:r>
-          </a:p>
-          <a:p>
-            <a:r>
-              <a:t>CEVAP: "REST'te istemcinin adresi, sözleşmeyi ve alan adlarını önceden bilmesi gerekir; entegrasyon</a:t>
-            </a:r>
-          </a:p>
-          <a:p>
-            <a:r>
-              <a:t>derleme zamanında kurulur. MCP'de sözleşme çalışma zamanında sunucudan gelir. Yani REST'in yerine</a:t>
-            </a:r>
-          </a:p>
-          <a:p>
-            <a:r>
-              <a:t>geçmiyor — REST servisimizin önüne, modelin okuyabileceği standart bir tanıtım katmanı koyuyor.</a:t>
-            </a:r>
-          </a:p>
-          <a:p>
-            <a:r>
-              <a:t>Altta yine bizim servisimiz çalışıyor."</a:t>
+              <a:t>TARİHSEL DAYANAK (dinleyiciye 'bu bize özgü bir çıkmaz değil' hissini verir):</a:t>
+            </a:r>
+          </a:p>
+          <a:p>
+            <a:r>
+              <a:t>"2024'te sektörün tamamı bu duvara çarptı. Varılan sonuç şuydu: sorun modelde değil, model ile</a:t>
+            </a:r>
+          </a:p>
+          <a:p>
+            <a:r>
+              <a:t>sistemler arasında ortak bir dil olmamasında. Ortak dil çıkınca herkesin ayrı ayrı yazdığı</a:t>
+            </a:r>
+          </a:p>
+          <a:p>
+            <a:r>
+              <a:t>bağlantılar gereksizleşir — tıpkı her cihaza ayrı şarj aleti taşımaktan kurtulmamız gibi."</a:t>
             </a:r>
           </a:p>
           <a:p/>
           <a:p>
             <a:r>
-              <a:t>BEKLENEN SORU — "Standart mı, yoksa tek firmanın işi mi?"</a:t>
-            </a:r>
-          </a:p>
-          <a:p>
-            <a:r>
-              <a:t>CEVAP: "Açık spesifikasyon; Spring AI 2.0 bunu resmî Java SDK 2.0 ile ve 2025-11-25 tarihli</a:t>
-            </a:r>
-          </a:p>
-          <a:p>
-            <a:r>
-              <a:t>spesifikasyon sürümüyle uyguluyor. Yani biz protokolü değil, protokolün Spring uygulamasını kullanıyoruz."</a:t>
+              <a:t>GEÇİŞ CÜMLESİ (bir sonraki slayda köprü — mutlaka söyleyin):</a:t>
+            </a:r>
+          </a:p>
+          <a:p>
+            <a:r>
+              <a:t>"İşte MCP bu tıkanmanın cevabı olarak çıktı. Şimdi ne olduğuna bakalım."</a:t>
             </a:r>
           </a:p>
           <a:p/>
           <a:p>
             <a:r>
-              <a:t>TUZAK: "USB" benzetmesini bir kez kullanın, ikinci kez tekrarlamayın — teknik dinleyicide</a:t>
-            </a:r>
-          </a:p>
-          <a:p>
-            <a:r>
-              <a:t>benzetmeyi fazla eşelemek ciddiyet kaybettirir.</a:t>
+              <a:t>TUZAK: Bu slaytta MCP'nin teknik ayrıntısına GİRMEYİN. Burada sadece acıyı kurun.</a:t>
             </a:r>
           </a:p>
         </p:txBody>
@@ -814,128 +796,133 @@
           <a:lstStyle/>
           <a:p>
             <a:r>
-              <a:t>[KURMAZSAK / KURARSAK — ~4 dk. Karar slaydı.]</a:t>
+              <a:t>[② ORTAK DİL — ~3,5 dk]  Kavram slaydı. Buradan kopan sonrasını takip edemez; acele etmeyin.</a:t>
             </a:r>
           </a:p>
           <a:p/>
           <a:p>
             <a:r>
-              <a:t>ANLATIM</a:t>
-            </a:r>
-          </a:p>
-          <a:p>
-            <a:r>
-              <a:t>Sol paneli hızlı, sağ paneli yavaş okuyun. Sol panelde en güçlü madde SONUNCUSU:</a:t>
-            </a:r>
-          </a:p>
-          <a:p>
-            <a:r>
-              <a:t>"İhtiyaç yok olmaz — kullanıcı kurum dışı araçlara yönelir." Burada bir saniye durun.</a:t>
-            </a:r>
-          </a:p>
-          <a:p>
-            <a:r>
-              <a:t>Bu, riski "yapmama riski" olarak çerçeveler; asıl ikna edici olan budur.</a:t>
+              <a:t>AÇILIŞ:</a:t>
+            </a:r>
+          </a:p>
+          <a:p>
+            <a:r>
+              <a:t>"O ortak dilin adı MCP — Model Context Protocol. İsmi önemli değil, ne yaptığı önemli:</a:t>
+            </a:r>
+          </a:p>
+          <a:p>
+            <a:r>
+              <a:t>asistan ile sistemler arasında standart bir konuşma biçimi."</a:t>
             </a:r>
           </a:p>
           <a:p/>
           <a:p>
             <a:r>
-              <a:t>SAYIYA DÖKÜN (tahtada/elde): "N uygulama × M asistan yerine N + M."</a:t>
-            </a:r>
-          </a:p>
-          <a:p>
-            <a:r>
-              <a:t>Örnek: 6 uygulama, 2 asistan arayüzü → 12 ayrı entegrasyon yerine 8 bildirim.</a:t>
+              <a:t>PRİZ BENZETMESİ — bir kez kullanın, eşelemeyin:</a:t>
+            </a:r>
+          </a:p>
+          <a:p>
+            <a:r>
+              <a:t>"Prizin iki ucu var. Bir uç asistan tarafı: soruyu alan, hangi yeteneklerin var olduğunu soran.</a:t>
+            </a:r>
+          </a:p>
+          <a:p>
+            <a:r>
+              <a:t>Buna client deniyor — ve bizim chat uygulamamız bunu ZATEN konuşuyor, bugün çalışıyor.</a:t>
+            </a:r>
+          </a:p>
+          <a:p>
+            <a:r>
+              <a:t>Diğer uç yeteneği sunan taraf: server. Bizim iş uygulamalarımızın olması gereken yer. Ve boş."</a:t>
             </a:r>
           </a:p>
           <a:p/>
           <a:p>
             <a:r>
-              <a:t>BEKLENEN SORU — "Bunu bugün tool calling ile zaten yapamıyor muyuz?"</a:t>
-            </a:r>
-          </a:p>
-          <a:p>
-            <a:r>
-              <a:t>CEVAP (kritik, hazırlıklı olun): "Yapıyoruz — zeus-ai ile aynı uygulamanın içinde tool çağırıyoruz</a:t>
-            </a:r>
-          </a:p>
-          <a:p>
-            <a:r>
-              <a:t>ve bu çalışıyor. Fark şu: o tool'lar çağıran uygulamanın içinde tanımlı. Kredi uygulamasının</a:t>
-            </a:r>
-          </a:p>
-          <a:p>
-            <a:r>
-              <a:t>yeteneğini chat uygulamasına açmak için bugün CHAT uygulamasına kod yazmak gerekiyor.</a:t>
-            </a:r>
-          </a:p>
-          <a:p>
-            <a:r>
-              <a:t>MCP bunu tersine çeviriyor: yeteneğin sahibi olan uygulama bildiriyor, asistan keşfediyor.</a:t>
-            </a:r>
-          </a:p>
-          <a:p>
-            <a:r>
-              <a:t>Yani tool calling 'uygulama içi', MCP 'uygulamalar arası'."</a:t>
+              <a:t>ÜÇ KUTUNUN SIRASI: sol (var) → orta (yok) → sağ (değişmiyor).</a:t>
+            </a:r>
+          </a:p>
+          <a:p>
+            <a:r>
+              <a:t>Sağ kutuyu vurgulayın: "Kredi servisimiz, Oracle'ımız, WildFly'ımız değişmiyor. Tek satırı bile."</a:t>
+            </a:r>
+          </a:p>
+          <a:p>
+            <a:r>
+              <a:t>Bu cümle, odadaki 'yine büyük dönüşüm mü geliyor' endişesini erkenden söndürür.</a:t>
             </a:r>
           </a:p>
           <a:p/>
           <a:p>
             <a:r>
-              <a:t>BEKLENEN SORU — "Performans ne olacak?"</a:t>
-            </a:r>
-          </a:p>
-          <a:p>
-            <a:r>
-              <a:t>CEVAP: "Bir tool çağrısı en az iki model turu demek: model aracı seçer, araç çalışır, sonuç modele</a:t>
-            </a:r>
-          </a:p>
-          <a:p>
-            <a:r>
-              <a:t>geri döner. Kendi ölçümlerimizde uçtan uca 2,4 saniyeden 35 saniyeye kadar değişti — model ve tur</a:t>
-            </a:r>
-          </a:p>
-          <a:p>
-            <a:r>
-              <a:t>sayısına göre. Bu, senkron kullanıcı akışları için gerçek bir tasarım kısıtı: zaman aşımı ve</a:t>
-            </a:r>
-          </a:p>
-          <a:p>
-            <a:r>
-              <a:t>kullanıcı beklentisi buna göre kurgulanmalı. Ölçüm noktalarını baştan koyuyoruz."</a:t>
+              <a:t>ÜÇ YAPI: tool = çağrılabilir işlem, resource = okunabilir içerik, prompt = hazır şablon.</a:t>
+            </a:r>
+          </a:p>
+          <a:p>
+            <a:r>
+              <a:t>Biz tool ile başlayacağız; resource doküman senaryosunda devreye girer.</a:t>
             </a:r>
           </a:p>
           <a:p/>
           <a:p>
             <a:r>
-              <a:t>BEKLENEN SORU — "Maliyet?"</a:t>
-            </a:r>
-          </a:p>
-          <a:p>
-            <a:r>
-              <a:t>CEVAP: "Platform katmanı bir kez kuruluyor. İkinci ve üçüncü uygulamanın marjinal maliyeti</a:t>
-            </a:r>
-          </a:p>
-          <a:p>
-            <a:r>
-              <a:t>birkaç anotasyon. Ölçütümüz: yetenek başına geliştirme günü."</a:t>
+              <a:t>TEKNİK ZEMİN (yalnız soru gelirse):</a:t>
+            </a:r>
+          </a:p>
+          <a:p>
+            <a:r>
+              <a:t>• MCP, JSON-RPC 2.0 üzerine kurulu; taşıma olarak yerel süreçte stdio, ağ üzerinde HTTP.</a:t>
+            </a:r>
+          </a:p>
+          <a:p>
+            <a:r>
+              <a:t>  Spring AI 2.0'da streamable HTTP varsayılan, eski SSE taşıması önerilmiyor.</a:t>
+            </a:r>
+          </a:p>
+          <a:p>
+            <a:r>
+              <a:t>• Keşif protokolün parçası: client "hangi yeteneklerin var" diye sorar (tools/list), sunucu</a:t>
+            </a:r>
+          </a:p>
+          <a:p>
+            <a:r>
+              <a:t>  yetenekleri JSON Schema ile tarif eder. SONUÇ: yeni yetenek eklenince CLIENT'ta kod değişmez.</a:t>
+            </a:r>
+          </a:p>
+          <a:p>
+            <a:r>
+              <a:t>• "REST'ten farkı ne?" → "REST'te istemcinin sözleşmeyi önceden bilmesi gerekir; entegrasyon</a:t>
+            </a:r>
+          </a:p>
+          <a:p>
+            <a:r>
+              <a:t>  derleme zamanında kurulur. MCP'de sözleşme çalışma zamanında sunucudan gelir. REST'in yerine</a:t>
+            </a:r>
+          </a:p>
+          <a:p>
+            <a:r>
+              <a:t>  geçmiyor; REST servisimizin önüne, modelin okuyabileceği bir tanıtım katmanı koyuyor."</a:t>
+            </a:r>
+          </a:p>
+          <a:p>
+            <a:r>
+              <a:t>• "Standart mı?" → Açık spesifikasyon; Spring AI 2.0 resmî Java SDK ile 2025-11-25 sürümünü uyguluyor.</a:t>
             </a:r>
           </a:p>
           <a:p/>
           <a:p>
             <a:r>
-              <a:t>RİSK — kendiniz açın, sormalarını beklemeyin:</a:t>
-            </a:r>
-          </a:p>
-          <a:p>
-            <a:r>
-              <a:t>"Prompt injection gerçek bir risk. Bu yüzden veri DEĞİŞTİREN tool'larda yetki kontrolü tool'un</a:t>
-            </a:r>
-          </a:p>
-          <a:p>
-            <a:r>
-              <a:t>içinde olacak, modelin kararına bırakılmayacak. İlk fazda yalnızca salt-okunur yetenekler açılacak."</a:t>
+              <a:t>GEÇİŞ CÜMLESİ:</a:t>
+            </a:r>
+          </a:p>
+          <a:p>
+            <a:r>
+              <a:t>"Yeni bir asistan almıyoruz — var olanı kendi sistemlerimize takıyoruz. Peki bu boştaki ucu</a:t>
+            </a:r>
+          </a:p>
+          <a:p>
+            <a:r>
+              <a:t>kim yazacak, hangi dille?"</a:t>
             </a:r>
           </a:p>
         </p:txBody>
@@ -1005,127 +992,112 @@
           <a:lstStyle/>
           <a:p>
             <a:r>
-              <a:t>[TEKNİK YÖN / NEDEN JAVA — ~4 dk. Bu odadaki en teknik slayt; en çok soru buradan gelir.]</a:t>
+              <a:t>[③ KİM YAZACAK — ~3,5 dk]  Odadaki en teknik slayt; en çok soru buradan gelir.</a:t>
             </a:r>
           </a:p>
           <a:p/>
           <a:p>
             <a:r>
-              <a:t>SOL PANEL</a:t>
-            </a:r>
-          </a:p>
-          <a:p>
-            <a:r>
-              <a:t>"Uygulama ekibi MCP spesifikasyonu okumayacak. Bağımlılığı ekleyecek, zaten var olan servis</a:t>
-            </a:r>
-          </a:p>
-          <a:p>
-            <a:r>
-              <a:t>metodunun üstüne bir anotasyon koyacak, deploy edecek."</a:t>
-            </a:r>
-          </a:p>
-          <a:p>
-            <a:r>
-              <a:t>Spring AI 2.0 tarafında karşılığı: spring-ai-starter-mcp-server-webmvc ve @McpTool / @McpResource /</a:t>
-            </a:r>
-          </a:p>
-          <a:p>
-            <a:r>
-              <a:t>@McpPrompt anotasyonları. Bunları zeus-ai'nin arkasına alacağız.</a:t>
+              <a:t>ÇERÇEVEYİ BAŞTA KURUN (slaydın başlığı bu):</a:t>
+            </a:r>
+          </a:p>
+          <a:p>
+            <a:r>
+              <a:t>"Finans kurumunda bu sorunun cevabı 'hangi dili seviyoruz' değil. Tek bir ölçüt var:</a:t>
+            </a:r>
+          </a:p>
+          <a:p>
+            <a:r>
+              <a:t>yetki nerede duruyor? Kod da orada yazılır."</a:t>
             </a:r>
           </a:p>
           <a:p/>
           <a:p>
             <a:r>
-              <a:t>SAĞ PANEL — argümanın kurgusuna dikkat:</a:t>
-            </a:r>
-          </a:p>
-          <a:p>
-            <a:r>
-              <a:t>Karşı seçeneği ÖNCE kabul edin: "Protokol dil bağımsız; Python veya Node ile de yazılabilirdi."</a:t>
-            </a:r>
-          </a:p>
-          <a:p>
-            <a:r>
-              <a:t>Sonra maliyetini gösterin. Bu sırayı bozmayın — "Java daha iyi dil" demeye kalkarsanız bu odada</a:t>
-            </a:r>
-          </a:p>
-          <a:p>
-            <a:r>
-              <a:t>haklı olarak itiraz alırsınız.</a:t>
+              <a:t>SOL PANEL — karşı seçeneği ÖNCE kabul edin, sonra maliyetini gösterin:</a:t>
+            </a:r>
+          </a:p>
+          <a:p>
+            <a:r>
+              <a:t>"Protokol dil bağımsız; Python ya da Node ile de yazılabilirdi. Ama MCP sunucusu uygulamanın</a:t>
+            </a:r>
+          </a:p>
+          <a:p>
+            <a:r>
+              <a:t>İÇİNDE çalıştığında istek zaten bizim filtre zincirimizden geçiyor: JWT doğrulaması, rol kontrolü,</a:t>
+            </a:r>
+          </a:p>
+          <a:p>
+            <a:r>
+              <a:t>oturum bağlamı — bugünkü haliyle. Kullanıcının bugün göremediği veriyi asistan da göremiyor.</a:t>
+            </a:r>
+          </a:p>
+          <a:p>
+            <a:r>
+              <a:t>Ayrı dilde ayrı bir servis yazsaydık JWT doğrulamasını ve rol eşlemesini ikinci kez yazacaktık;</a:t>
+            </a:r>
+          </a:p>
+          <a:p>
+            <a:r>
+              <a:t>üstelik iş kuralına ulaşmak için yine bizim servisimize çağrı yapacaktı — iki atlama, iki bakım yeri."</a:t>
+            </a:r>
+          </a:p>
+          <a:p>
+            <a:r>
+              <a:t>NOT: "Java daha iyi dildir" demeye kalkmayın; bu odada haklı olarak itiraz alırsınız.</a:t>
             </a:r>
           </a:p>
           <a:p/>
           <a:p>
             <a:r>
-              <a:t>EN GÜÇLÜ MADDE — YETKİ (buraya en çok zamanı ayırın):</a:t>
-            </a:r>
-          </a:p>
-          <a:p>
-            <a:r>
-              <a:t>"WebMVC taşıması, MCP sunucusunu uygulamanın kendi servlet yığınının içinde çalıştırıyor.</a:t>
-            </a:r>
-          </a:p>
-          <a:p>
-            <a:r>
-              <a:t>Yani istek WildFly'daki WAR'ın içine, mevcut filtre zincirinden geçerek giriyor: JWT doğrulaması,</a:t>
-            </a:r>
-          </a:p>
-          <a:p>
-            <a:r>
-              <a:t>rol kontrolü, oturum bağlamı — hepsi bugünkü haliyle. Kullanıcının bugün göremediği veriyi</a:t>
-            </a:r>
-          </a:p>
-          <a:p>
-            <a:r>
-              <a:t>asistan da göremiyor. Ayrı bir dilde ayrı bir servis yazsaydık JWT doğrulamasını, imza/JWKS</a:t>
-            </a:r>
-          </a:p>
-          <a:p>
-            <a:r>
-              <a:t>yönetimini ve rol eşlemesini İKİNCİ KEZ yazacaktık; üstelik iş kuralına ulaşmak için yine bizim</a:t>
-            </a:r>
-          </a:p>
-          <a:p>
-            <a:r>
-              <a:t>servisimize çağrı yapacaktı — iki atlama, iki hata noktası, iki bakım yeri."</a:t>
+              <a:t>DÜRÜSTLÜK NOTU (kendinize): zeus-fw'da bugün JWT/Security modülü YOK; bu kurulacak yapının</a:t>
+            </a:r>
+          </a:p>
+          <a:p>
+            <a:r>
+              <a:t>tasarım ilkesi. "Sunucu uygulamanın içinde çalışacağı için uygulamanın kendi güvenlik zinciri</a:t>
+            </a:r>
+          </a:p>
+          <a:p>
+            <a:r>
+              <a:t>geçerli olacak" deyin — "hazır ve çalışıyor" demeyin.</a:t>
             </a:r>
           </a:p>
           <a:p/>
           <a:p>
             <a:r>
-              <a:t>DÜRÜSTLÜK NOTU (kendinize): zeus-fw'da bugün JWT/Spring Security modülü YOK; bu, kurulacak yapının</a:t>
-            </a:r>
-          </a:p>
-          <a:p>
-            <a:r>
-              <a:t>tasarım ilkesi. Soru gelirse: "MCP sunucusu uygulamanın içinde çalışacağı için uygulamanın kendi</a:t>
-            </a:r>
-          </a:p>
-          <a:p>
-            <a:r>
-              <a:t>güvenlik zinciri geçerli olacak" deyin — "hazır ve çalışıyor" demeyin.</a:t>
+              <a:t>SAĞ PANEL — asıl yönetsel argüman:</a:t>
+            </a:r>
+          </a:p>
+          <a:p>
+            <a:r>
+              <a:t>"Sekiz uygulama bunu kendi başına yazarsa sekiz farklı yetki yorumu ve sekiz ayrı güvenlik yüzeyi</a:t>
+            </a:r>
+          </a:p>
+          <a:p>
+            <a:r>
+              <a:t>oluşur. Bir tanesi yanlış yaparsa haber kurumun adına çıkar. Platform katmanı bunu bir kez,</a:t>
+            </a:r>
+          </a:p>
+          <a:p>
+            <a:r>
+              <a:t>doğru şekilde yapar; uygulama ekibinin işi üç adıma iner."</a:t>
             </a:r>
           </a:p>
           <a:p/>
           <a:p>
             <a:r>
-              <a:t>BEKLENEN SORU — "Neden her uygulama kendi sunucusu? Merkezî tek MCP sunucusu kurmayalım mı?"</a:t>
-            </a:r>
-          </a:p>
-          <a:p>
-            <a:r>
-              <a:t>CEVAP: "Kurabiliriz ama o zaman yetki ve iş kuralı merkeze taşınır; tam kaçındığımız şey bu.</a:t>
-            </a:r>
-          </a:p>
-          <a:p>
-            <a:r>
-              <a:t>Uygulama sayısı arttığında merkezî bir MCP ağ geçidi (keşif, kota, kayıt) ayrıca konuşulabilir —</a:t>
-            </a:r>
-          </a:p>
-          <a:p>
-            <a:r>
-              <a:t>ama yeteneğin kendisi, sahibinin yanında kalmalı."</a:t>
+              <a:t>BEKLENEN SORU — "Merkezî tek bir MCP sunucusu kursak olmaz mı?"</a:t>
+            </a:r>
+          </a:p>
+          <a:p>
+            <a:r>
+              <a:t>CEVAP: "Olur ama o zaman yetki ve iş kuralı merkeze taşınır; tam kaçındığımız şey bu. İleride</a:t>
+            </a:r>
+          </a:p>
+          <a:p>
+            <a:r>
+              <a:t>keşif ve kota için bir MCP ağ geçidi konuşulabilir — ama yeteneğin kendisi sahibinin yanında kalmalı."</a:t>
             </a:r>
           </a:p>
           <a:p/>
@@ -1136,27 +1108,38 @@
           </a:p>
           <a:p>
             <a:r>
-              <a:t>CEVAP: "Bugünkü paketleme değişmiyor: zeus jar'ları ince WAR'ın içinde, üçüncü parti kütüphaneler</a:t>
-            </a:r>
-          </a:p>
-          <a:p>
-            <a:r>
-              <a:t>paylaşımlı com.zeus module'ünde — Spring AI eklendiğinde module 157 jar'a çıktı, WAR 66 KB kaldı.</a:t>
-            </a:r>
-          </a:p>
-          <a:p>
-            <a:r>
-              <a:t>Somut bir örnek: module'e spring-webflux girdiğinde WildFly'ın anotasyon taraması jakarta.websocket</a:t>
-            </a:r>
-          </a:p>
-          <a:p>
-            <a:r>
-              <a:t>API'sini göremediği için deploy düştü; module tanımına ekleyip çözdük. Yani bu yolu gerçekten</a:t>
-            </a:r>
-          </a:p>
-          <a:p>
-            <a:r>
-              <a:t>yürüdük, slaytta teorik konuşmuyoruz."</a:t>
+              <a:t>CEVAP: "Paketleme değişmiyor: zeus jar'ları ince WAR'da, üçüncü parti kütüphaneler paylaşımlı</a:t>
+            </a:r>
+          </a:p>
+          <a:p>
+            <a:r>
+              <a:t>com.zeus module'ünde. Spring AI eklendiğinde module 157 jar'a çıktı, WAR 66 KB kaldı. Somut örnek:</a:t>
+            </a:r>
+          </a:p>
+          <a:p>
+            <a:r>
+              <a:t>module'e spring-webflux girince WildFly'ın anotasyon taraması jakarta.websocket API'sini göremeyip</a:t>
+            </a:r>
+          </a:p>
+          <a:p>
+            <a:r>
+              <a:t>deploy'u düşürdü; module tanımına ekleyip çözdük. Bu yolu gerçekten yürüdük."</a:t>
+            </a:r>
+          </a:p>
+          <a:p/>
+          <a:p>
+            <a:r>
+              <a:t>GEÇİŞ CÜMLESİ (kritik — bir sonraki slaydın kurgusu buna dayanıyor):</a:t>
+            </a:r>
+          </a:p>
+          <a:p>
+            <a:r>
+              <a:t>"Dikkat edin, bu slaytta iki söz verdik: yetki bizim elimizde kalacak, protokol standart olacak.</a:t>
+            </a:r>
+          </a:p>
+          <a:p>
+            <a:r>
+              <a:t>Şimdi bu sözleri tutabileceğimiz altyapıya bakalım."</a:t>
             </a:r>
           </a:p>
         </p:txBody>
@@ -1226,81 +1209,102 @@
           <a:lstStyle/>
           <a:p>
             <a:r>
-              <a:t>[SÜRÜM KARARI — ~3 dk. Kapanış slaydı; kararın çoktan verilmiş olduğunu hissettirin.]</a:t>
+              <a:t>[④ NEYİN ÜSTÜNE — ~3 dk]  Sunumun vurucu noktası. Kurgu: karşılaştırma değil, SINAV.</a:t>
             </a:r>
           </a:p>
           <a:p/>
           <a:p>
             <a:r>
-              <a:t>ANA MESAJ</a:t>
-            </a:r>
-          </a:p>
-          <a:p>
-            <a:r>
-              <a:t>"Bu bir tercih değil, zorunluluktu — ve iyi ki geçen çeyrekte Boot 4'e geçmiştik."</a:t>
-            </a:r>
-          </a:p>
-          <a:p>
-            <a:r>
-              <a:t>1.x'in temeli Spring Boot 3.5; Boot 4 ortamımızda hiç yüklenmiyor. Üstelik 3.5 ile birlikte</a:t>
-            </a:r>
-          </a:p>
-          <a:p>
-            <a:r>
-              <a:t>Haziran 2026'da destek dışı kaldı: yeni güvenlik yaması gelmiyor.</a:t>
+              <a:t>AÇILIŞ — üstteki lacivert şeridi okuyun:</a:t>
+            </a:r>
+          </a:p>
+          <a:p>
+            <a:r>
+              <a:t>"Az önce iki söz verdik. Spring AI'ın iki hattını bu iki sözle sınadık — 'yeni olan iyidir'</a:t>
+            </a:r>
+          </a:p>
+          <a:p>
+            <a:r>
+              <a:t>diye değil."</a:t>
             </a:r>
           </a:p>
           <a:p/>
           <a:p>
             <a:r>
-              <a:t>MCP AÇISINDAN FARK (bu sunumun konusu olduğu için öne çıkarın):</a:t>
-            </a:r>
-          </a:p>
-          <a:p>
-            <a:r>
-              <a:t>1.x'te MCP topluluk tarafındaydı ve eski spesifikasyonda kaldı. 2.0'da protokol kütüphanenin</a:t>
-            </a:r>
-          </a:p>
-          <a:p>
-            <a:r>
-              <a:t>çekirdeğine alındı: anotasyonlar, WebMVC/WebFlux taşımaları, güncel spesifikasyon, ölçüm metrikleri</a:t>
-            </a:r>
-          </a:p>
-          <a:p>
-            <a:r>
-              <a:t>ve OAuth 2.0 desteği kutunun içinde geliyor.</a:t>
+              <a:t>SOL PANEL — 1.x neden düştü, sözlerle eşleştirerek:</a:t>
+            </a:r>
+          </a:p>
+          <a:p>
+            <a:r>
+              <a:t>"Birinci söz: yetki ve kayıt bizim elimizde kalacaktı. 1.x'te modelin araç çağırma döngüsü</a:t>
+            </a:r>
+          </a:p>
+          <a:p>
+            <a:r>
+              <a:t>kütüphanenin kendi sınıfının içinde kapalıydı; araya kendi yetki kontrolümüzü, kaydımızı veya</a:t>
+            </a:r>
+          </a:p>
+          <a:p>
+            <a:r>
+              <a:t>yeniden deneme politikamızı koyamıyorduk — ancak kütüphaneyi çatallayarak müdahale edilebilirdi.</a:t>
+            </a:r>
+          </a:p>
+          <a:p>
+            <a:r>
+              <a:t>Yani birinci sözü tutamıyorduk.</a:t>
+            </a:r>
+          </a:p>
+          <a:p>
+            <a:r>
+              <a:t>İkinci söz: güncel protokol. 1.x'te MCP topluluk tarafındaydı ve eski spesifikasyonda kaldı.</a:t>
+            </a:r>
+          </a:p>
+          <a:p>
+            <a:r>
+              <a:t>İkinci sözü de tutamıyorduk.</a:t>
+            </a:r>
+          </a:p>
+          <a:p>
+            <a:r>
+              <a:t>Bunların üstüne: temeli Spring Boot 3.5, bizim Boot 4 platformumuzda hiç yüklenmiyor; ve</a:t>
+            </a:r>
+          </a:p>
+          <a:p>
+            <a:r>
+              <a:t>Haziran 2026'da destek dışı kaldı."</a:t>
             </a:r>
           </a:p>
           <a:p/>
           <a:p>
             <a:r>
-              <a:t>MİMARİ AÇIDAN ASIL KAZANÇ (teknik dinleyici bunu takdir eder):</a:t>
-            </a:r>
-          </a:p>
-          <a:p>
-            <a:r>
-              <a:t>"1.x'te modelin araç çağırma döngüsü kütüphanenin model sınıfının içinde kapalıydı — araya girip</a:t>
-            </a:r>
-          </a:p>
-          <a:p>
-            <a:r>
-              <a:t>kendi yetki kontrolümüzü, kaydımızı veya yeniden deneme politikamızı koyamıyorduk; ancak kütüphaneyi</a:t>
-            </a:r>
-          </a:p>
-          <a:p>
-            <a:r>
-              <a:t>çatallayarak müdahale edilebilirdi. 2.0 bu döngüyü dışarı çıkardı. 'Yetki ve kayıt tek yerde'</a:t>
-            </a:r>
-          </a:p>
-          <a:p>
-            <a:r>
-              <a:t>diyebilmemizin teknik dayanağı bu."</a:t>
+              <a:t>SAĞ PANEL — 2.x aynı iki maddeyle:</a:t>
+            </a:r>
+          </a:p>
+          <a:p>
+            <a:r>
+              <a:t>"2.0 bu döngüyü dışarı çıkardı: yetki, kayıt ve sınır kontrolü araya girebiliyor. MCP çekirdeğe</a:t>
+            </a:r>
+          </a:p>
+          <a:p>
+            <a:r>
+              <a:t>alındı: güncel spesifikasyon, resmî Java SDK. Temeli Boot 4 ve Java 25 — Zeus 2.0.0 ile birebir aynı."</a:t>
             </a:r>
           </a:p>
           <a:p/>
           <a:p>
             <a:r>
-              <a:t>BEKLENEN SORU — "Sürüm çok yeni, stabil mi?"</a:t>
+              <a:t>EN ÖNEMLİ CÜMLE (alttaki şerit — yavaş söyleyin):</a:t>
+            </a:r>
+          </a:p>
+          <a:p>
+            <a:r>
+              <a:t>"1.x'i eski olduğu için elemedik. Bu sunumda verdiğimiz iki sözü teknik olarak tutamadığı için eledik."</a:t>
+            </a:r>
+          </a:p>
+          <a:p/>
+          <a:p>
+            <a:r>
+              <a:t>BEKLENEN SORU — "Sürüm çok yeni, riskli değil mi?"</a:t>
             </a:r>
           </a:p>
           <a:p>
@@ -1310,12 +1314,12 @@
           </a:p>
           <a:p>
             <a:r>
-              <a:t>bağlamıyoruz: araya zeus-ai'nin kendi arayüzü giriyor. Kütüphane arayüzü değişirse tek yerde</a:t>
-            </a:r>
-          </a:p>
-          <a:p>
-            <a:r>
-              <a:t>değişir, N uygulamada değil. Riski platform katmanında soğuruyoruz."</a:t>
+              <a:t>bağlamıyoruz; araya zeus-ai'nin kendi arayüzü giriyor. Kütüphane arayüzü değişirse tek yerde</a:t>
+            </a:r>
+          </a:p>
+          <a:p>
+            <a:r>
+              <a:t>değişir, sekiz uygulamada değil. Riski platform katmanında soğuruyoruz — bu zaten üçüncü adımın gerekçesiydi."</a:t>
             </a:r>
           </a:p>
           <a:p/>
@@ -1331,28 +1335,178 @@
           </a:p>
           <a:p>
             <a:r>
-              <a:t>zaten bildiği programlama modeli. Biz zaten Spring platformundayız; farklı bir yaşam döngüsünü</a:t>
-            </a:r>
-          </a:p>
-          <a:p>
-            <a:r>
-              <a:t>ikinci bir takvim olarak taşımak istemiyoruz."</a:t>
+              <a:t>zaten bildiği programlama modeli. İkinci bir yaşam döngüsünü ayrıca takip etmek istemiyoruz."</a:t>
             </a:r>
           </a:p>
           <a:p/>
           <a:p>
             <a:r>
-              <a:t>KAPANIŞ CÜMLESİ</a:t>
-            </a:r>
-          </a:p>
-          <a:p>
-            <a:r>
-              <a:t>"Model hazır, platform hazır. Aradaki katmanı kurduğumuzda yapay zekâ bir uygulamanın özelliği</a:t>
-            </a:r>
-          </a:p>
-          <a:p>
-            <a:r>
-              <a:t>olmaktan çıkıp platformun yeteneği olur. Bugün bir talebimiz yok; yönü paylaşıp görüşünüzü almaya geldik."</a:t>
+              <a:t>BEKLENEN SORU — "Performans?"</a:t>
+            </a:r>
+          </a:p>
+          <a:p>
+            <a:r>
+              <a:t>CEVAP: "Bir araç çağrısı en az iki model turu demek. Kendi ölçümlerimizde uçtan uca 2,4 ile 35 saniye</a:t>
+            </a:r>
+          </a:p>
+          <a:p>
+            <a:r>
+              <a:t>arasında değişti. Senkron kullanıcı akışlarında bu gerçek bir tasarım kısıtı; zaman aşımı ve beklenti</a:t>
+            </a:r>
+          </a:p>
+          <a:p>
+            <a:r>
+              <a:t>buna göre kurgulanacak."</a:t>
+            </a:r>
+          </a:p>
+        </p:txBody>
+      </p:sp>
+      <p:sp>
+        <p:nvSpPr>
+          <p:cNvPr id="4" name="Slide Number Placeholder 3"/>
+          <p:cNvSpPr>
+            <a:spLocks noGrp="1"/>
+          </p:cNvSpPr>
+          <p:nvPr>
+            <p:ph type="sldNum" idx="5" sz="quarter"/>
+          </p:nvPr>
+        </p:nvSpPr>
+        <p:spPr/>
+      </p:sp>
+    </p:spTree>
+  </p:cSld>
+  <p:clrMapOvr>
+    <a:masterClrMapping/>
+  </p:clrMapOvr>
+</p:notes>
+</file>
+
+<file path=ppt/notesSlides/notesSlide6.xml><?xml version="1.0" encoding="utf-8"?>
+<p:notes xmlns:a="http://schemas.openxmlformats.org/drawingml/2006/main" xmlns:p="http://schemas.openxmlformats.org/presentationml/2006/main" xmlns:r="http://schemas.openxmlformats.org/officeDocument/2006/relationships">
+  <p:cSld>
+    <p:spTree>
+      <p:nvGrpSpPr>
+        <p:cNvPr id="1" name=""/>
+        <p:cNvGrpSpPr/>
+        <p:nvPr/>
+      </p:nvGrpSpPr>
+      <p:grpSpPr>
+        <a:xfrm>
+          <a:off x="0" y="0"/>
+          <a:ext cx="0" cy="0"/>
+          <a:chOff x="0" y="0"/>
+          <a:chExt cx="0" cy="0"/>
+        </a:xfrm>
+      </p:grpSpPr>
+      <p:sp>
+        <p:nvSpPr>
+          <p:cNvPr id="2" name="Slide Image Placeholder 1"/>
+          <p:cNvSpPr>
+            <a:spLocks noGrp="1"/>
+          </p:cNvSpPr>
+          <p:nvPr>
+            <p:ph type="sldImg" idx="2"/>
+          </p:nvPr>
+        </p:nvSpPr>
+        <p:spPr/>
+      </p:sp>
+      <p:sp>
+        <p:nvSpPr>
+          <p:cNvPr id="3" name="Notes Placeholder 2"/>
+          <p:cNvSpPr>
+            <a:spLocks noGrp="1"/>
+          </p:cNvSpPr>
+          <p:nvPr>
+            <p:ph type="body" idx="3" sz="quarter"/>
+          </p:nvPr>
+        </p:nvSpPr>
+        <p:spPr/>
+        <p:txBody>
+          <a:bodyPr/>
+          <a:lstStyle/>
+          <a:p>
+            <a:r>
+              <a:t>[KAPANIŞ — ~1,5 dk]  Hikâyeyi geri sarıp işi tek cümleyle tanımlayın.</a:t>
+            </a:r>
+          </a:p>
+          <a:p/>
+          <a:p>
+            <a:r>
+              <a:t>DÖRT ADIMI HIZLI OKUYUN — her birinde bir saniye durun. Amaç, dinleyicinin zincirin tamamını</a:t>
+            </a:r>
+          </a:p>
+          <a:p>
+            <a:r>
+              <a:t>tek nefeste görmesi: soru → ortak dil → kim yazacak → neyin üstüne.</a:t>
+            </a:r>
+          </a:p>
+          <a:p/>
+          <a:p>
+            <a:r>
+              <a:t>SONRA LACİVERT KUTUYU OKUYUN — sunumun tek cümlelik tanımı budur:</a:t>
+            </a:r>
+          </a:p>
+          <a:p>
+            <a:r>
+              <a:t>"zeus-ai: kurumsal uygulamalarımızın yeteneklerini — yetkiyi kendi elimizde tutarak — asistana</a:t>
+            </a:r>
+          </a:p>
+          <a:p>
+            <a:r>
+              <a:t>açan platform katmanı."</a:t>
+            </a:r>
+          </a:p>
+          <a:p>
+            <a:r>
+              <a:t>Bu cümleyi yavaş söyleyin; toplantıdan sonra akılda kalacak tek cümle bu olacak.</a:t>
+            </a:r>
+          </a:p>
+          <a:p/>
+          <a:p>
+            <a:r>
+              <a:t>KAPANIŞ:</a:t>
+            </a:r>
+          </a:p>
+          <a:p>
+            <a:r>
+              <a:t>"Bu katman kurulduğunda yapay zekâ, bir uygulamanın özelliği olmaktan çıkıp platformun yeteneği olur.</a:t>
+            </a:r>
+          </a:p>
+          <a:p>
+            <a:r>
+              <a:t>Bugün bir talebimiz yok; yönü paylaşmaya ve görüşünüzü almaya geldik."</a:t>
+            </a:r>
+          </a:p>
+          <a:p/>
+          <a:p>
+            <a:r>
+              <a:t>SORU GELMEZSE kendiniz açın (sessizlik onay değildir):</a:t>
+            </a:r>
+          </a:p>
+          <a:p>
+            <a:r>
+              <a:t>"En çok tartışılmasını beklediğim nokta üçüncü adımdı: tek platform mu, her ekip kendi mi?</a:t>
+            </a:r>
+          </a:p>
+          <a:p>
+            <a:r>
+              <a:t>Bu konuda farklı düşünen varsa duymak isterim."</a:t>
+            </a:r>
+          </a:p>
+          <a:p/>
+          <a:p>
+            <a:r>
+              <a:t>EĞER "ne zaman?" DİYE SORARLARSA:</a:t>
+            </a:r>
+          </a:p>
+          <a:p>
+            <a:r>
+              <a:t>Takvim sözü VERMEYİN. "Önce bir uygulamada uçtan uca doğrulama, ölçüm noktalarıyla birlikte;</a:t>
+            </a:r>
+          </a:p>
+          <a:p>
+            <a:r>
+              <a:t>sonra ikinci uygulamanın maliyetini ölçüp konuşuruz" deyin. Bu sunum yön sunumu, plan sunumu değil.</a:t>
             </a:r>
           </a:p>
         </p:txBody>
@@ -4410,8 +4564,8 @@
         </p:nvSpPr>
         <p:spPr>
           <a:xfrm>
-            <a:off x="777240" y="2103120"/>
-            <a:ext cx="7589520" cy="2377440"/>
+            <a:off x="777240" y="1645920"/>
+            <a:ext cx="6949440" cy="2194560"/>
           </a:xfrm>
           <a:prstGeom prst="rect">
             <a:avLst/>
@@ -4432,7 +4586,7 @@
                 <a:spcPts val="0"/>
               </a:spcBef>
               <a:spcAft>
-                <a:spcPts val="1200"/>
+                <a:spcPts val="1400"/>
               </a:spcAft>
             </a:pPr>
             <a:r>
@@ -4442,51 +4596,51 @@
                 </a:solidFill>
                 <a:latin typeface="Calibri"/>
               </a:rPr>
-              <a:t>MCP SUNUMU  ·  ZEUS PLATFORMU</a:t>
+              <a:t>ZEUS PLATFORMU  ·  AĞUSTOS 2026</a:t>
             </a:r>
           </a:p>
           <a:p>
             <a:pPr algn="l">
               <a:lnSpc>
+                <a:spcPct val="98000"/>
+              </a:lnSpc>
+              <a:spcBef>
+                <a:spcPts val="0"/>
+              </a:spcBef>
+              <a:spcAft>
+                <a:spcPts val="1400"/>
+              </a:spcAft>
+            </a:pPr>
+            <a:r>
+              <a:rPr sz="3000" b="1" i="0">
+                <a:solidFill>
+                  <a:srgbClr val="FFFFFF"/>
+                </a:solidFill>
+                <a:latin typeface="Calibri"/>
+              </a:rPr>
+              <a:t>«Asistan Neden Müşterimin Kredi Durumunu Bilmiyor?»</a:t>
+            </a:r>
+          </a:p>
+          <a:p>
+            <a:pPr algn="l">
+              <a:lnSpc>
                 <a:spcPct val="100000"/>
               </a:lnSpc>
               <a:spcBef>
                 <a:spcPts val="0"/>
               </a:spcBef>
               <a:spcAft>
-                <a:spcPts val="1000"/>
-              </a:spcAft>
-            </a:pPr>
-            <a:r>
-              <a:rPr sz="3300" b="1" i="0">
-                <a:solidFill>
-                  <a:srgbClr val="FFFFFF"/>
-                </a:solidFill>
-                <a:latin typeface="Calibri"/>
-              </a:rPr>
-              <a:t>Uygulamalarımızı Asistana Bağlamak</a:t>
-            </a:r>
-          </a:p>
-          <a:p>
-            <a:pPr algn="l">
-              <a:lnSpc>
-                <a:spcPct val="115000"/>
-              </a:lnSpc>
-              <a:spcBef>
-                <a:spcPts val="0"/>
-              </a:spcBef>
-              <a:spcAft>
-                <a:spcPts val="0"/>
-              </a:spcAft>
-            </a:pPr>
-            <a:r>
-              <a:rPr sz="1300" b="0" i="0">
+                <a:spcPts val="0"/>
+              </a:spcAft>
+            </a:pPr>
+            <a:r>
+              <a:rPr sz="1400" b="0" i="0">
                 <a:solidFill>
                   <a:srgbClr val="CFDDEE"/>
                 </a:solidFill>
                 <a:latin typeface="Calibri"/>
               </a:rPr>
-              <a:t>Chat uygulamamız asistan tarafını (MCP client) zaten konuşuyor. Eksik olan, kurumsal uygulamaların kendi yeteneklerini asistana açtığı taraf: MCP server.</a:t>
+              <a:t>Bir kullanıcı sorusundan başlayıp bir mimari karara varan hikâye.</a:t>
             </a:r>
           </a:p>
         </p:txBody>
@@ -4499,7 +4653,7 @@
         </p:nvSpPr>
         <p:spPr>
           <a:xfrm>
-            <a:off x="777240" y="4846320"/>
+            <a:off x="777240" y="4160520"/>
             <a:ext cx="1280160" cy="45720"/>
           </a:xfrm>
           <a:prstGeom prst="rect">
@@ -4537,13 +4691,369 @@
       </p:sp>
       <p:sp>
         <p:nvSpPr>
-          <p:cNvPr id="5" name="TextBox 4"/>
+          <p:cNvPr id="5" name="Rounded Rectangle 4"/>
+          <p:cNvSpPr/>
+          <p:nvPr/>
+        </p:nvSpPr>
+        <p:spPr>
+          <a:xfrm>
+            <a:off x="777240" y="4526280"/>
+            <a:ext cx="1783080" cy="868680"/>
+          </a:xfrm>
+          <a:prstGeom prst="roundRect">
+            <a:avLst>
+              <a:gd name="adj" fmla="val 8000"/>
+            </a:avLst>
+          </a:prstGeom>
+          <a:solidFill>
+            <a:srgbClr val="2A4878"/>
+          </a:solidFill>
+          <a:ln w="9525">
+            <a:solidFill>
+              <a:srgbClr val="3C5F94"/>
+            </a:solidFill>
+          </a:ln>
+          <a:effectLst/>
+        </p:spPr>
+        <p:style>
+          <a:lnRef idx="1">
+            <a:schemeClr val="accent1"/>
+          </a:lnRef>
+          <a:fillRef idx="3">
+            <a:schemeClr val="accent1"/>
+          </a:fillRef>
+          <a:effectRef idx="2">
+            <a:schemeClr val="accent1"/>
+          </a:effectRef>
+          <a:fontRef idx="minor">
+            <a:schemeClr val="lt1"/>
+          </a:fontRef>
+        </p:style>
+        <p:txBody>
+          <a:bodyPr rtlCol="0" anchor="ctr" wrap="square" lIns="109728" rIns="109728" tIns="91440" bIns="91440"/>
+          <a:lstStyle/>
+          <a:p>
+            <a:pPr algn="l">
+              <a:lnSpc>
+                <a:spcPct val="100000"/>
+              </a:lnSpc>
+              <a:spcBef>
+                <a:spcPts val="0"/>
+              </a:spcBef>
+              <a:spcAft>
+                <a:spcPts val="200"/>
+              </a:spcAft>
+            </a:pPr>
+            <a:r>
+              <a:rPr sz="1050" b="1" i="0">
+                <a:solidFill>
+                  <a:srgbClr val="FFFFFF"/>
+                </a:solidFill>
+                <a:latin typeface="Calibri"/>
+              </a:rPr>
+              <a:t>①  SORUN</a:t>
+            </a:r>
+          </a:p>
+          <a:p>
+            <a:pPr algn="l">
+              <a:lnSpc>
+                <a:spcPct val="100000"/>
+              </a:lnSpc>
+              <a:spcBef>
+                <a:spcPts val="0"/>
+              </a:spcBef>
+              <a:spcAft>
+                <a:spcPts val="300"/>
+              </a:spcAft>
+            </a:pPr>
+            <a:r>
+              <a:rPr sz="950" b="0" i="0">
+                <a:solidFill>
+                  <a:srgbClr val="9DC3E6"/>
+                </a:solidFill>
+                <a:latin typeface="Calibri"/>
+              </a:rPr>
+              <a:t>soru nereden çıktı</a:t>
+            </a:r>
+          </a:p>
+        </p:txBody>
+      </p:sp>
+      <p:sp>
+        <p:nvSpPr>
+          <p:cNvPr id="6" name="Rounded Rectangle 5"/>
+          <p:cNvSpPr/>
+          <p:nvPr/>
+        </p:nvSpPr>
+        <p:spPr>
+          <a:xfrm>
+            <a:off x="2697480" y="4526280"/>
+            <a:ext cx="1783080" cy="868680"/>
+          </a:xfrm>
+          <a:prstGeom prst="roundRect">
+            <a:avLst>
+              <a:gd name="adj" fmla="val 8000"/>
+            </a:avLst>
+          </a:prstGeom>
+          <a:solidFill>
+            <a:srgbClr val="2A4878"/>
+          </a:solidFill>
+          <a:ln w="9525">
+            <a:solidFill>
+              <a:srgbClr val="3C5F94"/>
+            </a:solidFill>
+          </a:ln>
+          <a:effectLst/>
+        </p:spPr>
+        <p:style>
+          <a:lnRef idx="1">
+            <a:schemeClr val="accent1"/>
+          </a:lnRef>
+          <a:fillRef idx="3">
+            <a:schemeClr val="accent1"/>
+          </a:fillRef>
+          <a:effectRef idx="2">
+            <a:schemeClr val="accent1"/>
+          </a:effectRef>
+          <a:fontRef idx="minor">
+            <a:schemeClr val="lt1"/>
+          </a:fontRef>
+        </p:style>
+        <p:txBody>
+          <a:bodyPr rtlCol="0" anchor="ctr" wrap="square" lIns="109728" rIns="109728" tIns="91440" bIns="91440"/>
+          <a:lstStyle/>
+          <a:p>
+            <a:pPr algn="l">
+              <a:lnSpc>
+                <a:spcPct val="100000"/>
+              </a:lnSpc>
+              <a:spcBef>
+                <a:spcPts val="0"/>
+              </a:spcBef>
+              <a:spcAft>
+                <a:spcPts val="200"/>
+              </a:spcAft>
+            </a:pPr>
+            <a:r>
+              <a:rPr sz="1050" b="1" i="0">
+                <a:solidFill>
+                  <a:srgbClr val="FFFFFF"/>
+                </a:solidFill>
+                <a:latin typeface="Calibri"/>
+              </a:rPr>
+              <a:t>②  ORTAK DİL</a:t>
+            </a:r>
+          </a:p>
+          <a:p>
+            <a:pPr algn="l">
+              <a:lnSpc>
+                <a:spcPct val="100000"/>
+              </a:lnSpc>
+              <a:spcBef>
+                <a:spcPts val="0"/>
+              </a:spcBef>
+              <a:spcAft>
+                <a:spcPts val="300"/>
+              </a:spcAft>
+            </a:pPr>
+            <a:r>
+              <a:rPr sz="950" b="0" i="0">
+                <a:solidFill>
+                  <a:srgbClr val="9DC3E6"/>
+                </a:solidFill>
+                <a:latin typeface="Calibri"/>
+              </a:rPr>
+              <a:t>MCP nedir</a:t>
+            </a:r>
+          </a:p>
+        </p:txBody>
+      </p:sp>
+      <p:sp>
+        <p:nvSpPr>
+          <p:cNvPr id="7" name="Rounded Rectangle 6"/>
+          <p:cNvSpPr/>
+          <p:nvPr/>
+        </p:nvSpPr>
+        <p:spPr>
+          <a:xfrm>
+            <a:off x="4617720" y="4526280"/>
+            <a:ext cx="1783080" cy="868680"/>
+          </a:xfrm>
+          <a:prstGeom prst="roundRect">
+            <a:avLst>
+              <a:gd name="adj" fmla="val 8000"/>
+            </a:avLst>
+          </a:prstGeom>
+          <a:solidFill>
+            <a:srgbClr val="2A4878"/>
+          </a:solidFill>
+          <a:ln w="9525">
+            <a:solidFill>
+              <a:srgbClr val="3C5F94"/>
+            </a:solidFill>
+          </a:ln>
+          <a:effectLst/>
+        </p:spPr>
+        <p:style>
+          <a:lnRef idx="1">
+            <a:schemeClr val="accent1"/>
+          </a:lnRef>
+          <a:fillRef idx="3">
+            <a:schemeClr val="accent1"/>
+          </a:fillRef>
+          <a:effectRef idx="2">
+            <a:schemeClr val="accent1"/>
+          </a:effectRef>
+          <a:fontRef idx="minor">
+            <a:schemeClr val="lt1"/>
+          </a:fontRef>
+        </p:style>
+        <p:txBody>
+          <a:bodyPr rtlCol="0" anchor="ctr" wrap="square" lIns="109728" rIns="109728" tIns="91440" bIns="91440"/>
+          <a:lstStyle/>
+          <a:p>
+            <a:pPr algn="l">
+              <a:lnSpc>
+                <a:spcPct val="100000"/>
+              </a:lnSpc>
+              <a:spcBef>
+                <a:spcPts val="0"/>
+              </a:spcBef>
+              <a:spcAft>
+                <a:spcPts val="200"/>
+              </a:spcAft>
+            </a:pPr>
+            <a:r>
+              <a:rPr sz="1050" b="1" i="0">
+                <a:solidFill>
+                  <a:srgbClr val="FFFFFF"/>
+                </a:solidFill>
+                <a:latin typeface="Calibri"/>
+              </a:rPr>
+              <a:t>③  KİM YAZACAK</a:t>
+            </a:r>
+          </a:p>
+          <a:p>
+            <a:pPr algn="l">
+              <a:lnSpc>
+                <a:spcPct val="100000"/>
+              </a:lnSpc>
+              <a:spcBef>
+                <a:spcPts val="0"/>
+              </a:spcBef>
+              <a:spcAft>
+                <a:spcPts val="300"/>
+              </a:spcAft>
+            </a:pPr>
+            <a:r>
+              <a:rPr sz="950" b="0" i="0">
+                <a:solidFill>
+                  <a:srgbClr val="9DC3E6"/>
+                </a:solidFill>
+                <a:latin typeface="Calibri"/>
+              </a:rPr>
+              <a:t>Java ve platform</a:t>
+            </a:r>
+          </a:p>
+        </p:txBody>
+      </p:sp>
+      <p:sp>
+        <p:nvSpPr>
+          <p:cNvPr id="8" name="Rounded Rectangle 7"/>
+          <p:cNvSpPr/>
+          <p:nvPr/>
+        </p:nvSpPr>
+        <p:spPr>
+          <a:xfrm>
+            <a:off x="6537960" y="4526280"/>
+            <a:ext cx="1783080" cy="868680"/>
+          </a:xfrm>
+          <a:prstGeom prst="roundRect">
+            <a:avLst>
+              <a:gd name="adj" fmla="val 8000"/>
+            </a:avLst>
+          </a:prstGeom>
+          <a:solidFill>
+            <a:srgbClr val="2A4878"/>
+          </a:solidFill>
+          <a:ln w="9525">
+            <a:solidFill>
+              <a:srgbClr val="3C5F94"/>
+            </a:solidFill>
+          </a:ln>
+          <a:effectLst/>
+        </p:spPr>
+        <p:style>
+          <a:lnRef idx="1">
+            <a:schemeClr val="accent1"/>
+          </a:lnRef>
+          <a:fillRef idx="3">
+            <a:schemeClr val="accent1"/>
+          </a:fillRef>
+          <a:effectRef idx="2">
+            <a:schemeClr val="accent1"/>
+          </a:effectRef>
+          <a:fontRef idx="minor">
+            <a:schemeClr val="lt1"/>
+          </a:fontRef>
+        </p:style>
+        <p:txBody>
+          <a:bodyPr rtlCol="0" anchor="ctr" wrap="square" lIns="109728" rIns="109728" tIns="91440" bIns="91440"/>
+          <a:lstStyle/>
+          <a:p>
+            <a:pPr algn="l">
+              <a:lnSpc>
+                <a:spcPct val="100000"/>
+              </a:lnSpc>
+              <a:spcBef>
+                <a:spcPts val="0"/>
+              </a:spcBef>
+              <a:spcAft>
+                <a:spcPts val="200"/>
+              </a:spcAft>
+            </a:pPr>
+            <a:r>
+              <a:rPr sz="1050" b="1" i="0">
+                <a:solidFill>
+                  <a:srgbClr val="FFFFFF"/>
+                </a:solidFill>
+                <a:latin typeface="Calibri"/>
+              </a:rPr>
+              <a:t>④  NEYİN ÜSTÜNE</a:t>
+            </a:r>
+          </a:p>
+          <a:p>
+            <a:pPr algn="l">
+              <a:lnSpc>
+                <a:spcPct val="100000"/>
+              </a:lnSpc>
+              <a:spcBef>
+                <a:spcPts val="0"/>
+              </a:spcBef>
+              <a:spcAft>
+                <a:spcPts val="300"/>
+              </a:spcAft>
+            </a:pPr>
+            <a:r>
+              <a:rPr sz="950" b="0" i="0">
+                <a:solidFill>
+                  <a:srgbClr val="9DC3E6"/>
+                </a:solidFill>
+                <a:latin typeface="Calibri"/>
+              </a:rPr>
+              <a:t>Spring AI 2.x</a:t>
+            </a:r>
+          </a:p>
+        </p:txBody>
+      </p:sp>
+      <p:sp>
+        <p:nvSpPr>
+          <p:cNvPr id="9" name="TextBox 8"/>
           <p:cNvSpPr txBox="1"/>
           <p:nvPr/>
         </p:nvSpPr>
         <p:spPr>
           <a:xfrm>
-            <a:off x="777240" y="5138928"/>
+            <a:off x="777240" y="5760720"/>
             <a:ext cx="7589520" cy="365760"/>
           </a:xfrm>
           <a:prstGeom prst="rect">
@@ -4569,13 +5079,13 @@
               </a:spcAft>
             </a:pPr>
             <a:r>
-              <a:rPr sz="1200" b="0" i="0">
+              <a:rPr sz="1100" b="0" i="0">
                 <a:solidFill>
                   <a:srgbClr val="9DC3E6"/>
                 </a:solidFill>
                 <a:latin typeface="Calibri"/>
               </a:rPr>
-              <a:t>Zeus Framework Platform  ·  Ağustos 2026</a:t>
+              <a:t>Dört adım, on beş dakika. Sonunda bir altyapı kararını birlikte gerekçelendirmiş olacağız.</a:t>
             </a:r>
           </a:p>
         </p:txBody>
@@ -4651,7 +5161,7 @@
         <p:spPr>
           <a:xfrm>
             <a:off x="457200" y="274320"/>
-            <a:ext cx="8229600" cy="822960"/>
+            <a:ext cx="7132320" cy="822960"/>
           </a:xfrm>
           <a:prstGeom prst="rect">
             <a:avLst/>
@@ -4682,7 +5192,7 @@
                 </a:solidFill>
                 <a:latin typeface="Calibri"/>
               </a:rPr>
-              <a:t>TEMEL KAVRAM</a:t>
+              <a:t>①  SORUN — hikâye nereden başladı</a:t>
             </a:r>
           </a:p>
           <a:p>
@@ -4698,20 +5208,196 @@
               </a:spcAft>
             </a:pPr>
             <a:r>
-              <a:rPr sz="2300" b="1" i="0">
+              <a:rPr sz="2200" b="1" i="0">
                 <a:solidFill>
                   <a:srgbClr val="1F3864"/>
                 </a:solidFill>
                 <a:latin typeface="Calibri"/>
               </a:rPr>
-              <a:t>MCP Client, MCP Server: Prizin İki Ucu</a:t>
-            </a:r>
-          </a:p>
-        </p:txBody>
-      </p:sp>
-      <p:sp>
-        <p:nvSpPr>
-          <p:cNvPr id="4" name="TextBox 3"/>
+              <a:t>Her Şey Basit Bir Soruyla Başladı</a:t>
+            </a:r>
+          </a:p>
+        </p:txBody>
+      </p:sp>
+      <p:sp>
+        <p:nvSpPr>
+          <p:cNvPr id="4" name="Oval 3"/>
+          <p:cNvSpPr/>
+          <p:nvPr/>
+        </p:nvSpPr>
+        <p:spPr>
+          <a:xfrm>
+            <a:off x="8028431" y="384048"/>
+            <a:ext cx="109728" cy="109728"/>
+          </a:xfrm>
+          <a:prstGeom prst="ellipse">
+            <a:avLst/>
+          </a:prstGeom>
+          <a:solidFill>
+            <a:srgbClr val="1F3864"/>
+          </a:solidFill>
+          <a:ln>
+            <a:noFill/>
+          </a:ln>
+          <a:effectLst/>
+        </p:spPr>
+        <p:style>
+          <a:lnRef idx="1">
+            <a:schemeClr val="accent1"/>
+          </a:lnRef>
+          <a:fillRef idx="3">
+            <a:schemeClr val="accent1"/>
+          </a:fillRef>
+          <a:effectRef idx="2">
+            <a:schemeClr val="accent1"/>
+          </a:effectRef>
+          <a:fontRef idx="minor">
+            <a:schemeClr val="lt1"/>
+          </a:fontRef>
+        </p:style>
+        <p:txBody>
+          <a:bodyPr rtlCol="0" anchor="ctr"/>
+          <a:lstStyle/>
+          <a:p>
+            <a:pPr algn="ctr"/>
+          </a:p>
+        </p:txBody>
+      </p:sp>
+      <p:sp>
+        <p:nvSpPr>
+          <p:cNvPr id="5" name="Oval 4"/>
+          <p:cNvSpPr/>
+          <p:nvPr/>
+        </p:nvSpPr>
+        <p:spPr>
+          <a:xfrm>
+            <a:off x="8211311" y="384048"/>
+            <a:ext cx="109728" cy="109728"/>
+          </a:xfrm>
+          <a:prstGeom prst="ellipse">
+            <a:avLst/>
+          </a:prstGeom>
+          <a:solidFill>
+            <a:srgbClr val="D6DEE9"/>
+          </a:solidFill>
+          <a:ln>
+            <a:noFill/>
+          </a:ln>
+          <a:effectLst/>
+        </p:spPr>
+        <p:style>
+          <a:lnRef idx="1">
+            <a:schemeClr val="accent1"/>
+          </a:lnRef>
+          <a:fillRef idx="3">
+            <a:schemeClr val="accent1"/>
+          </a:fillRef>
+          <a:effectRef idx="2">
+            <a:schemeClr val="accent1"/>
+          </a:effectRef>
+          <a:fontRef idx="minor">
+            <a:schemeClr val="lt1"/>
+          </a:fontRef>
+        </p:style>
+        <p:txBody>
+          <a:bodyPr rtlCol="0" anchor="ctr"/>
+          <a:lstStyle/>
+          <a:p>
+            <a:pPr algn="ctr"/>
+          </a:p>
+        </p:txBody>
+      </p:sp>
+      <p:sp>
+        <p:nvSpPr>
+          <p:cNvPr id="6" name="Oval 5"/>
+          <p:cNvSpPr/>
+          <p:nvPr/>
+        </p:nvSpPr>
+        <p:spPr>
+          <a:xfrm>
+            <a:off x="8394192" y="384048"/>
+            <a:ext cx="109728" cy="109728"/>
+          </a:xfrm>
+          <a:prstGeom prst="ellipse">
+            <a:avLst/>
+          </a:prstGeom>
+          <a:solidFill>
+            <a:srgbClr val="D6DEE9"/>
+          </a:solidFill>
+          <a:ln>
+            <a:noFill/>
+          </a:ln>
+          <a:effectLst/>
+        </p:spPr>
+        <p:style>
+          <a:lnRef idx="1">
+            <a:schemeClr val="accent1"/>
+          </a:lnRef>
+          <a:fillRef idx="3">
+            <a:schemeClr val="accent1"/>
+          </a:fillRef>
+          <a:effectRef idx="2">
+            <a:schemeClr val="accent1"/>
+          </a:effectRef>
+          <a:fontRef idx="minor">
+            <a:schemeClr val="lt1"/>
+          </a:fontRef>
+        </p:style>
+        <p:txBody>
+          <a:bodyPr rtlCol="0" anchor="ctr"/>
+          <a:lstStyle/>
+          <a:p>
+            <a:pPr algn="ctr"/>
+          </a:p>
+        </p:txBody>
+      </p:sp>
+      <p:sp>
+        <p:nvSpPr>
+          <p:cNvPr id="7" name="Oval 6"/>
+          <p:cNvSpPr/>
+          <p:nvPr/>
+        </p:nvSpPr>
+        <p:spPr>
+          <a:xfrm>
+            <a:off x="8577072" y="384048"/>
+            <a:ext cx="109728" cy="109728"/>
+          </a:xfrm>
+          <a:prstGeom prst="ellipse">
+            <a:avLst/>
+          </a:prstGeom>
+          <a:solidFill>
+            <a:srgbClr val="D6DEE9"/>
+          </a:solidFill>
+          <a:ln>
+            <a:noFill/>
+          </a:ln>
+          <a:effectLst/>
+        </p:spPr>
+        <p:style>
+          <a:lnRef idx="1">
+            <a:schemeClr val="accent1"/>
+          </a:lnRef>
+          <a:fillRef idx="3">
+            <a:schemeClr val="accent1"/>
+          </a:fillRef>
+          <a:effectRef idx="2">
+            <a:schemeClr val="accent1"/>
+          </a:effectRef>
+          <a:fontRef idx="minor">
+            <a:schemeClr val="lt1"/>
+          </a:fontRef>
+        </p:style>
+        <p:txBody>
+          <a:bodyPr rtlCol="0" anchor="ctr"/>
+          <a:lstStyle/>
+          <a:p>
+            <a:pPr algn="ctr"/>
+          </a:p>
+        </p:txBody>
+      </p:sp>
+      <p:sp>
+        <p:nvSpPr>
+          <p:cNvPr id="8" name="TextBox 7"/>
           <p:cNvSpPr txBox="1"/>
           <p:nvPr/>
         </p:nvSpPr>
@@ -4756,14 +5442,691 @@
       </p:sp>
       <p:sp>
         <p:nvSpPr>
-          <p:cNvPr id="5" name="TextBox 4"/>
+          <p:cNvPr id="9" name="Rounded Rectangle 8"/>
+          <p:cNvSpPr/>
+          <p:nvPr/>
+        </p:nvSpPr>
+        <p:spPr>
+          <a:xfrm>
+            <a:off x="457200" y="1298448"/>
+            <a:ext cx="2651760" cy="1965960"/>
+          </a:xfrm>
+          <a:prstGeom prst="roundRect">
+            <a:avLst>
+              <a:gd name="adj" fmla="val 4000"/>
+            </a:avLst>
+          </a:prstGeom>
+          <a:solidFill>
+            <a:srgbClr val="EEF2F8"/>
+          </a:solidFill>
+          <a:ln>
+            <a:noFill/>
+          </a:ln>
+          <a:effectLst/>
+        </p:spPr>
+        <p:style>
+          <a:lnRef idx="1">
+            <a:schemeClr val="accent1"/>
+          </a:lnRef>
+          <a:fillRef idx="3">
+            <a:schemeClr val="accent1"/>
+          </a:fillRef>
+          <a:effectRef idx="2">
+            <a:schemeClr val="accent1"/>
+          </a:effectRef>
+          <a:fontRef idx="minor">
+            <a:schemeClr val="lt1"/>
+          </a:fontRef>
+        </p:style>
+        <p:txBody>
+          <a:bodyPr rtlCol="0" anchor="t" wrap="square" lIns="155448" rIns="155448" tIns="118872" bIns="118872"/>
+          <a:lstStyle/>
+          <a:p>
+            <a:pPr algn="l">
+              <a:lnSpc>
+                <a:spcPct val="100000"/>
+              </a:lnSpc>
+              <a:spcBef>
+                <a:spcPts val="0"/>
+              </a:spcBef>
+              <a:spcAft>
+                <a:spcPts val="500"/>
+              </a:spcAft>
+            </a:pPr>
+            <a:r>
+              <a:rPr sz="950" b="1" i="0">
+                <a:solidFill>
+                  <a:srgbClr val="2E75B6"/>
+                </a:solidFill>
+                <a:latin typeface="Calibri"/>
+              </a:rPr>
+              <a:t>1 · AÇTIK</a:t>
+            </a:r>
+          </a:p>
+          <a:p>
+            <a:pPr algn="l">
+              <a:lnSpc>
+                <a:spcPct val="105000"/>
+              </a:lnSpc>
+              <a:spcBef>
+                <a:spcPts val="0"/>
+              </a:spcBef>
+              <a:spcAft>
+                <a:spcPts val="500"/>
+              </a:spcAft>
+            </a:pPr>
+            <a:r>
+              <a:rPr sz="1300" b="1" i="0">
+                <a:solidFill>
+                  <a:srgbClr val="1F3864"/>
+                </a:solidFill>
+                <a:latin typeface="Calibri"/>
+              </a:rPr>
+              <a:t>Chat uygulamasını devreye aldık</a:t>
+            </a:r>
+          </a:p>
+          <a:p>
+            <a:pPr algn="l">
+              <a:lnSpc>
+                <a:spcPct val="105000"/>
+              </a:lnSpc>
+              <a:spcBef>
+                <a:spcPts val="0"/>
+              </a:spcBef>
+              <a:spcAft>
+                <a:spcPts val="300"/>
+              </a:spcAft>
+            </a:pPr>
+            <a:r>
+              <a:rPr sz="1000" b="0" i="0">
+                <a:solidFill>
+                  <a:srgbClr val="595959"/>
+                </a:solidFill>
+                <a:latin typeface="Calibri"/>
+              </a:rPr>
+              <a:t>Kullanıcı memnun: metin yazıyor, özetliyor, genel soruları cevaplıyor.</a:t>
+            </a:r>
+          </a:p>
+        </p:txBody>
+      </p:sp>
+      <p:sp>
+        <p:nvSpPr>
+          <p:cNvPr id="10" name="Rounded Rectangle 9"/>
+          <p:cNvSpPr/>
+          <p:nvPr/>
+        </p:nvSpPr>
+        <p:spPr>
+          <a:xfrm>
+            <a:off x="3246120" y="1298448"/>
+            <a:ext cx="2651760" cy="1965960"/>
+          </a:xfrm>
+          <a:prstGeom prst="roundRect">
+            <a:avLst>
+              <a:gd name="adj" fmla="val 4000"/>
+            </a:avLst>
+          </a:prstGeom>
+          <a:solidFill>
+            <a:srgbClr val="EEF2F8"/>
+          </a:solidFill>
+          <a:ln>
+            <a:noFill/>
+          </a:ln>
+          <a:effectLst/>
+        </p:spPr>
+        <p:style>
+          <a:lnRef idx="1">
+            <a:schemeClr val="accent1"/>
+          </a:lnRef>
+          <a:fillRef idx="3">
+            <a:schemeClr val="accent1"/>
+          </a:fillRef>
+          <a:effectRef idx="2">
+            <a:schemeClr val="accent1"/>
+          </a:effectRef>
+          <a:fontRef idx="minor">
+            <a:schemeClr val="lt1"/>
+          </a:fontRef>
+        </p:style>
+        <p:txBody>
+          <a:bodyPr rtlCol="0" anchor="t" wrap="square" lIns="155448" rIns="155448" tIns="118872" bIns="118872"/>
+          <a:lstStyle/>
+          <a:p>
+            <a:pPr algn="l">
+              <a:lnSpc>
+                <a:spcPct val="100000"/>
+              </a:lnSpc>
+              <a:spcBef>
+                <a:spcPts val="0"/>
+              </a:spcBef>
+              <a:spcAft>
+                <a:spcPts val="500"/>
+              </a:spcAft>
+            </a:pPr>
+            <a:r>
+              <a:rPr sz="950" b="1" i="0">
+                <a:solidFill>
+                  <a:srgbClr val="2E75B6"/>
+                </a:solidFill>
+                <a:latin typeface="Calibri"/>
+              </a:rPr>
+              <a:t>2 · İLK SORU</a:t>
+            </a:r>
+          </a:p>
+          <a:p>
+            <a:pPr algn="l">
+              <a:lnSpc>
+                <a:spcPct val="105000"/>
+              </a:lnSpc>
+              <a:spcBef>
+                <a:spcPts val="0"/>
+              </a:spcBef>
+              <a:spcAft>
+                <a:spcPts val="500"/>
+              </a:spcAft>
+            </a:pPr>
+            <a:r>
+              <a:rPr sz="1300" b="1" i="0">
+                <a:solidFill>
+                  <a:srgbClr val="1F3864"/>
+                </a:solidFill>
+                <a:latin typeface="Calibri"/>
+              </a:rPr>
+              <a:t>«Peki benim müşterim?»</a:t>
+            </a:r>
+          </a:p>
+          <a:p>
+            <a:pPr algn="l">
+              <a:lnSpc>
+                <a:spcPct val="105000"/>
+              </a:lnSpc>
+              <a:spcBef>
+                <a:spcPts val="0"/>
+              </a:spcBef>
+              <a:spcAft>
+                <a:spcPts val="300"/>
+              </a:spcAft>
+            </a:pPr>
+            <a:r>
+              <a:rPr sz="1000" b="0" i="0">
+                <a:solidFill>
+                  <a:srgbClr val="595959"/>
+                </a:solidFill>
+                <a:latin typeface="Calibri"/>
+              </a:rPr>
+              <a:t>«Bu asistan, müşterimin kredi başvurusu ne durumda söyleyemiyor mu?» Model dünyayı biliyor — bizi bilmiyor.</a:t>
+            </a:r>
+          </a:p>
+        </p:txBody>
+      </p:sp>
+      <p:sp>
+        <p:nvSpPr>
+          <p:cNvPr id="11" name="Rounded Rectangle 10"/>
+          <p:cNvSpPr/>
+          <p:nvPr/>
+        </p:nvSpPr>
+        <p:spPr>
+          <a:xfrm>
+            <a:off x="6035040" y="1298448"/>
+            <a:ext cx="2651760" cy="1965960"/>
+          </a:xfrm>
+          <a:prstGeom prst="roundRect">
+            <a:avLst>
+              <a:gd name="adj" fmla="val 4000"/>
+            </a:avLst>
+          </a:prstGeom>
+          <a:solidFill>
+            <a:srgbClr val="F9ECEA"/>
+          </a:solidFill>
+          <a:ln w="9525">
+            <a:solidFill>
+              <a:srgbClr val="E8C4BF"/>
+            </a:solidFill>
+          </a:ln>
+          <a:effectLst/>
+        </p:spPr>
+        <p:style>
+          <a:lnRef idx="1">
+            <a:schemeClr val="accent1"/>
+          </a:lnRef>
+          <a:fillRef idx="3">
+            <a:schemeClr val="accent1"/>
+          </a:fillRef>
+          <a:effectRef idx="2">
+            <a:schemeClr val="accent1"/>
+          </a:effectRef>
+          <a:fontRef idx="minor">
+            <a:schemeClr val="lt1"/>
+          </a:fontRef>
+        </p:style>
+        <p:txBody>
+          <a:bodyPr rtlCol="0" anchor="t" wrap="square" lIns="155448" rIns="155448" tIns="118872" bIns="118872"/>
+          <a:lstStyle/>
+          <a:p>
+            <a:pPr algn="l">
+              <a:lnSpc>
+                <a:spcPct val="100000"/>
+              </a:lnSpc>
+              <a:spcBef>
+                <a:spcPts val="0"/>
+              </a:spcBef>
+              <a:spcAft>
+                <a:spcPts val="500"/>
+              </a:spcAft>
+            </a:pPr>
+            <a:r>
+              <a:rPr sz="950" b="1" i="0">
+                <a:solidFill>
+                  <a:srgbClr val="A03A34"/>
+                </a:solidFill>
+                <a:latin typeface="Calibri"/>
+              </a:rPr>
+              <a:t>3 · İLK REFLEKS</a:t>
+            </a:r>
+          </a:p>
+          <a:p>
+            <a:pPr algn="l">
+              <a:lnSpc>
+                <a:spcPct val="105000"/>
+              </a:lnSpc>
+              <a:spcBef>
+                <a:spcPts val="0"/>
+              </a:spcBef>
+              <a:spcAft>
+                <a:spcPts val="500"/>
+              </a:spcAft>
+            </a:pPr>
+            <a:r>
+              <a:rPr sz="1300" b="1" i="0">
+                <a:solidFill>
+                  <a:srgbClr val="1F3864"/>
+                </a:solidFill>
+                <a:latin typeface="Calibri"/>
+              </a:rPr>
+              <a:t>Her soru için özel entegrasyon</a:t>
+            </a:r>
+          </a:p>
+          <a:p>
+            <a:pPr algn="l">
+              <a:lnSpc>
+                <a:spcPct val="105000"/>
+              </a:lnSpc>
+              <a:spcBef>
+                <a:spcPts val="0"/>
+              </a:spcBef>
+              <a:spcAft>
+                <a:spcPts val="300"/>
+              </a:spcAft>
+            </a:pPr>
+            <a:r>
+              <a:rPr sz="1000" b="0" i="0">
+                <a:solidFill>
+                  <a:srgbClr val="6B2E2A"/>
+                </a:solidFill>
+                <a:latin typeface="Calibri"/>
+              </a:rPr>
+              <a:t>Her uygulama için ayrı bağlantı, ayrı yetki kodu, ayrı bakım. 4 uygulama × 2 asistan = 8 ayrı iş.</a:t>
+            </a:r>
+          </a:p>
+        </p:txBody>
+      </p:sp>
+      <p:sp>
+        <p:nvSpPr>
+          <p:cNvPr id="12" name="Right Arrow 11"/>
+          <p:cNvSpPr/>
+          <p:nvPr/>
+        </p:nvSpPr>
+        <p:spPr>
+          <a:xfrm>
+            <a:off x="3127248" y="2180844"/>
+            <a:ext cx="100584" cy="201168"/>
+          </a:xfrm>
+          <a:prstGeom prst="rightArrow">
+            <a:avLst/>
+          </a:prstGeom>
+          <a:solidFill>
+            <a:srgbClr val="BFBFBF"/>
+          </a:solidFill>
+          <a:ln>
+            <a:noFill/>
+          </a:ln>
+          <a:effectLst/>
+        </p:spPr>
+        <p:style>
+          <a:lnRef idx="1">
+            <a:schemeClr val="accent1"/>
+          </a:lnRef>
+          <a:fillRef idx="3">
+            <a:schemeClr val="accent1"/>
+          </a:fillRef>
+          <a:effectRef idx="2">
+            <a:schemeClr val="accent1"/>
+          </a:effectRef>
+          <a:fontRef idx="minor">
+            <a:schemeClr val="lt1"/>
+          </a:fontRef>
+        </p:style>
+        <p:txBody>
+          <a:bodyPr rtlCol="0" anchor="ctr"/>
+          <a:lstStyle/>
+          <a:p>
+            <a:pPr algn="ctr"/>
+          </a:p>
+        </p:txBody>
+      </p:sp>
+      <p:sp>
+        <p:nvSpPr>
+          <p:cNvPr id="13" name="Right Arrow 12"/>
+          <p:cNvSpPr/>
+          <p:nvPr/>
+        </p:nvSpPr>
+        <p:spPr>
+          <a:xfrm>
+            <a:off x="5916167" y="2180844"/>
+            <a:ext cx="100584" cy="201168"/>
+          </a:xfrm>
+          <a:prstGeom prst="rightArrow">
+            <a:avLst/>
+          </a:prstGeom>
+          <a:solidFill>
+            <a:srgbClr val="BFBFBF"/>
+          </a:solidFill>
+          <a:ln>
+            <a:noFill/>
+          </a:ln>
+          <a:effectLst/>
+        </p:spPr>
+        <p:style>
+          <a:lnRef idx="1">
+            <a:schemeClr val="accent1"/>
+          </a:lnRef>
+          <a:fillRef idx="3">
+            <a:schemeClr val="accent1"/>
+          </a:fillRef>
+          <a:effectRef idx="2">
+            <a:schemeClr val="accent1"/>
+          </a:effectRef>
+          <a:fontRef idx="minor">
+            <a:schemeClr val="lt1"/>
+          </a:fontRef>
+        </p:style>
+        <p:txBody>
+          <a:bodyPr rtlCol="0" anchor="ctr"/>
+          <a:lstStyle/>
+          <a:p>
+            <a:pPr algn="ctr"/>
+          </a:p>
+        </p:txBody>
+      </p:sp>
+      <p:sp>
+        <p:nvSpPr>
+          <p:cNvPr id="14" name="Rounded Rectangle 13"/>
+          <p:cNvSpPr/>
+          <p:nvPr/>
+        </p:nvSpPr>
+        <p:spPr>
+          <a:xfrm>
+            <a:off x="457200" y="3520440"/>
+            <a:ext cx="8229600" cy="1234440"/>
+          </a:xfrm>
+          <a:prstGeom prst="roundRect">
+            <a:avLst>
+              <a:gd name="adj" fmla="val 4000"/>
+            </a:avLst>
+          </a:prstGeom>
+          <a:solidFill>
+            <a:srgbClr val="FFFFFF"/>
+          </a:solidFill>
+          <a:ln w="9525">
+            <a:solidFill>
+              <a:srgbClr val="D9D9D9"/>
+            </a:solidFill>
+          </a:ln>
+          <a:effectLst/>
+        </p:spPr>
+        <p:style>
+          <a:lnRef idx="1">
+            <a:schemeClr val="accent1"/>
+          </a:lnRef>
+          <a:fillRef idx="3">
+            <a:schemeClr val="accent1"/>
+          </a:fillRef>
+          <a:effectRef idx="2">
+            <a:schemeClr val="accent1"/>
+          </a:effectRef>
+          <a:fontRef idx="minor">
+            <a:schemeClr val="lt1"/>
+          </a:fontRef>
+        </p:style>
+        <p:txBody>
+          <a:bodyPr rtlCol="0" anchor="t" wrap="square" lIns="155448" rIns="155448" tIns="118872" bIns="118872"/>
+          <a:lstStyle/>
+          <a:p>
+            <a:pPr algn="l">
+              <a:lnSpc>
+                <a:spcPct val="100000"/>
+              </a:lnSpc>
+              <a:spcBef>
+                <a:spcPts val="0"/>
+              </a:spcBef>
+              <a:spcAft>
+                <a:spcPts val="600"/>
+              </a:spcAft>
+            </a:pPr>
+            <a:r>
+              <a:rPr sz="1000" b="1" i="0">
+                <a:solidFill>
+                  <a:srgbClr val="A03A34"/>
+                </a:solidFill>
+                <a:latin typeface="Calibri"/>
+              </a:rPr>
+              <a:t>TIKANDIĞIMIZ YER</a:t>
+            </a:r>
+          </a:p>
+          <a:p>
+            <a:pPr algn="l">
+              <a:lnSpc>
+                <a:spcPct val="106000"/>
+              </a:lnSpc>
+              <a:spcBef>
+                <a:spcPts val="0"/>
+              </a:spcBef>
+              <a:spcAft>
+                <a:spcPts val="500"/>
+              </a:spcAft>
+            </a:pPr>
+            <a:r>
+              <a:rPr sz="1100" b="0" i="0">
+                <a:solidFill>
+                  <a:srgbClr val="595959"/>
+                </a:solidFill>
+                <a:latin typeface="Calibri"/>
+              </a:rPr>
+              <a:t>Her yeni yetenek ayrı bir proje oldu. Yetki mantığı her entegrasyonda yeniden yazıldı. Bir asistan daha eklendiğinde tüm iş baştan tekrarlanacaktı: N uygulama × M asistan.</a:t>
+            </a:r>
+          </a:p>
+          <a:p>
+            <a:pPr algn="l">
+              <a:lnSpc>
+                <a:spcPct val="106000"/>
+              </a:lnSpc>
+              <a:spcBef>
+                <a:spcPts val="0"/>
+              </a:spcBef>
+              <a:spcAft>
+                <a:spcPts val="300"/>
+              </a:spcAft>
+            </a:pPr>
+            <a:r>
+              <a:rPr sz="1100" b="1" i="0">
+                <a:solidFill>
+                  <a:srgbClr val="1F3864"/>
+                </a:solidFill>
+                <a:latin typeface="Calibri"/>
+              </a:rPr>
+              <a:t>Sektörün 2024'te vardığı sonuç da buydu: sorun modelde değil — model ile sistemler arasında ortak bir dilin olmamasında.</a:t>
+            </a:r>
+          </a:p>
+        </p:txBody>
+      </p:sp>
+      <p:sp>
+        <p:nvSpPr>
+          <p:cNvPr id="15" name="Rounded Rectangle 14"/>
+          <p:cNvSpPr/>
+          <p:nvPr/>
+        </p:nvSpPr>
+        <p:spPr>
+          <a:xfrm>
+            <a:off x="457200" y="4983480"/>
+            <a:ext cx="8229600" cy="822960"/>
+          </a:xfrm>
+          <a:prstGeom prst="roundRect">
+            <a:avLst>
+              <a:gd name="adj" fmla="val 4000"/>
+            </a:avLst>
+          </a:prstGeom>
+          <a:solidFill>
+            <a:srgbClr val="EEF2F8"/>
+          </a:solidFill>
+          <a:ln>
+            <a:noFill/>
+          </a:ln>
+          <a:effectLst/>
+        </p:spPr>
+        <p:style>
+          <a:lnRef idx="1">
+            <a:schemeClr val="accent1"/>
+          </a:lnRef>
+          <a:fillRef idx="3">
+            <a:schemeClr val="accent1"/>
+          </a:fillRef>
+          <a:effectRef idx="2">
+            <a:schemeClr val="accent1"/>
+          </a:effectRef>
+          <a:fontRef idx="minor">
+            <a:schemeClr val="lt1"/>
+          </a:fontRef>
+        </p:style>
+        <p:txBody>
+          <a:bodyPr rtlCol="0" anchor="ctr" wrap="square" lIns="155448" rIns="155448" tIns="118872" bIns="118872"/>
+          <a:lstStyle/>
+          <a:p>
+            <a:pPr algn="ctr">
+              <a:lnSpc>
+                <a:spcPct val="105000"/>
+              </a:lnSpc>
+              <a:spcBef>
+                <a:spcPts val="0"/>
+              </a:spcBef>
+              <a:spcAft>
+                <a:spcPts val="200"/>
+              </a:spcAft>
+            </a:pPr>
+            <a:r>
+              <a:rPr sz="1150" b="1" i="0">
+                <a:solidFill>
+                  <a:srgbClr val="1F3864"/>
+                </a:solidFill>
+                <a:latin typeface="Calibri"/>
+              </a:rPr>
+              <a:t>İhtiyaç buradan doğdu: her uygulamaya özel bağlantı yerine, herkesin konuştuğu tek bir dil.</a:t>
+            </a:r>
+          </a:p>
+          <a:p>
+            <a:pPr algn="ctr">
+              <a:lnSpc>
+                <a:spcPct val="105000"/>
+              </a:lnSpc>
+              <a:spcBef>
+                <a:spcPts val="0"/>
+              </a:spcBef>
+              <a:spcAft>
+                <a:spcPts val="0"/>
+              </a:spcAft>
+            </a:pPr>
+            <a:r>
+              <a:rPr sz="1050" b="0" i="1">
+                <a:solidFill>
+                  <a:srgbClr val="2E75B6"/>
+                </a:solidFill>
+                <a:latin typeface="Calibri"/>
+              </a:rPr>
+              <a:t>İşte MCP, masa başında icat edilmiş bir moda değil — tam olarak bu tıkanmanın cevabı.</a:t>
+            </a:r>
+          </a:p>
+        </p:txBody>
+      </p:sp>
+    </p:spTree>
+  </p:cSld>
+  <p:clrMapOvr>
+    <a:masterClrMapping/>
+  </p:clrMapOvr>
+</p:sld>
+</file>
+
+<file path=ppt/slides/slide3.xml><?xml version="1.0" encoding="utf-8"?>
+<p:sld xmlns:a="http://schemas.openxmlformats.org/drawingml/2006/main" xmlns:p="http://schemas.openxmlformats.org/presentationml/2006/main" xmlns:r="http://schemas.openxmlformats.org/officeDocument/2006/relationships">
+  <p:cSld>
+    <p:spTree>
+      <p:nvGrpSpPr>
+        <p:cNvPr id="1" name=""/>
+        <p:cNvGrpSpPr/>
+        <p:nvPr/>
+      </p:nvGrpSpPr>
+      <p:grpSpPr/>
+      <p:sp>
+        <p:nvSpPr>
+          <p:cNvPr id="2" name="Rectangle 1"/>
+          <p:cNvSpPr/>
+          <p:nvPr/>
+        </p:nvSpPr>
+        <p:spPr>
+          <a:xfrm>
+            <a:off x="0" y="0"/>
+            <a:ext cx="9144000" cy="100584"/>
+          </a:xfrm>
+          <a:prstGeom prst="rect">
+            <a:avLst/>
+          </a:prstGeom>
+          <a:solidFill>
+            <a:srgbClr val="1F3864"/>
+          </a:solidFill>
+          <a:ln>
+            <a:noFill/>
+          </a:ln>
+          <a:effectLst/>
+        </p:spPr>
+        <p:style>
+          <a:lnRef idx="1">
+            <a:schemeClr val="accent1"/>
+          </a:lnRef>
+          <a:fillRef idx="3">
+            <a:schemeClr val="accent1"/>
+          </a:fillRef>
+          <a:effectRef idx="2">
+            <a:schemeClr val="accent1"/>
+          </a:effectRef>
+          <a:fontRef idx="minor">
+            <a:schemeClr val="lt1"/>
+          </a:fontRef>
+        </p:style>
+        <p:txBody>
+          <a:bodyPr rtlCol="0" anchor="ctr"/>
+          <a:lstStyle/>
+          <a:p>
+            <a:pPr algn="ctr"/>
+          </a:p>
+        </p:txBody>
+      </p:sp>
+      <p:sp>
+        <p:nvSpPr>
+          <p:cNvPr id="3" name="TextBox 2"/>
           <p:cNvSpPr txBox="1"/>
           <p:nvPr/>
         </p:nvSpPr>
         <p:spPr>
           <a:xfrm>
-            <a:off x="457200" y="1207008"/>
-            <a:ext cx="8229600" cy="457200"/>
+            <a:off x="457200" y="274320"/>
+            <a:ext cx="7132320" cy="822960"/>
           </a:xfrm>
           <a:prstGeom prst="rect">
             <a:avLst/>
@@ -4778,37 +6141,325 @@
           <a:p>
             <a:pPr algn="l">
               <a:lnSpc>
-                <a:spcPct val="108000"/>
-              </a:lnSpc>
-              <a:spcBef>
-                <a:spcPts val="0"/>
-              </a:spcBef>
-              <a:spcAft>
-                <a:spcPts val="300"/>
-              </a:spcAft>
-            </a:pPr>
-            <a:r>
-              <a:rPr sz="1100" b="0" i="0">
-                <a:solidFill>
-                  <a:srgbClr val="595959"/>
-                </a:solidFill>
-                <a:latin typeface="Calibri"/>
-              </a:rPr>
-              <a:t>MCP (Model Context Protocol) — asistanın dış sistemleri kullanabilmesi için ortak protokol. USB gibi: bir kez standartlaşır, her cihaz her porta takılır.</a:t>
-            </a:r>
-          </a:p>
-        </p:txBody>
-      </p:sp>
-      <p:sp>
-        <p:nvSpPr>
-          <p:cNvPr id="6" name="Rounded Rectangle 5"/>
+                <a:spcPct val="100000"/>
+              </a:lnSpc>
+              <a:spcBef>
+                <a:spcPts val="0"/>
+              </a:spcBef>
+              <a:spcAft>
+                <a:spcPts val="200"/>
+              </a:spcAft>
+            </a:pPr>
+            <a:r>
+              <a:rPr sz="1000" b="1" i="0">
+                <a:solidFill>
+                  <a:srgbClr val="2E75B6"/>
+                </a:solidFill>
+                <a:latin typeface="Calibri"/>
+              </a:rPr>
+              <a:t>②  ORTAK DİL — peki bu dil nasıl çalışıyor</a:t>
+            </a:r>
+          </a:p>
+          <a:p>
+            <a:pPr algn="l">
+              <a:lnSpc>
+                <a:spcPct val="100000"/>
+              </a:lnSpc>
+              <a:spcBef>
+                <a:spcPts val="0"/>
+              </a:spcBef>
+              <a:spcAft>
+                <a:spcPts val="0"/>
+              </a:spcAft>
+            </a:pPr>
+            <a:r>
+              <a:rPr sz="2200" b="1" i="0">
+                <a:solidFill>
+                  <a:srgbClr val="1F3864"/>
+                </a:solidFill>
+                <a:latin typeface="Calibri"/>
+              </a:rPr>
+              <a:t>MCP: Prizin İki Ucu</a:t>
+            </a:r>
+          </a:p>
+        </p:txBody>
+      </p:sp>
+      <p:sp>
+        <p:nvSpPr>
+          <p:cNvPr id="4" name="Oval 3"/>
           <p:cNvSpPr/>
           <p:nvPr/>
         </p:nvSpPr>
         <p:spPr>
           <a:xfrm>
-            <a:off x="457200" y="1810512"/>
-            <a:ext cx="2331720" cy="2121408"/>
+            <a:off x="8028431" y="384048"/>
+            <a:ext cx="109728" cy="109728"/>
+          </a:xfrm>
+          <a:prstGeom prst="ellipse">
+            <a:avLst/>
+          </a:prstGeom>
+          <a:solidFill>
+            <a:srgbClr val="D6DEE9"/>
+          </a:solidFill>
+          <a:ln>
+            <a:noFill/>
+          </a:ln>
+          <a:effectLst/>
+        </p:spPr>
+        <p:style>
+          <a:lnRef idx="1">
+            <a:schemeClr val="accent1"/>
+          </a:lnRef>
+          <a:fillRef idx="3">
+            <a:schemeClr val="accent1"/>
+          </a:fillRef>
+          <a:effectRef idx="2">
+            <a:schemeClr val="accent1"/>
+          </a:effectRef>
+          <a:fontRef idx="minor">
+            <a:schemeClr val="lt1"/>
+          </a:fontRef>
+        </p:style>
+        <p:txBody>
+          <a:bodyPr rtlCol="0" anchor="ctr"/>
+          <a:lstStyle/>
+          <a:p>
+            <a:pPr algn="ctr"/>
+          </a:p>
+        </p:txBody>
+      </p:sp>
+      <p:sp>
+        <p:nvSpPr>
+          <p:cNvPr id="5" name="Oval 4"/>
+          <p:cNvSpPr/>
+          <p:nvPr/>
+        </p:nvSpPr>
+        <p:spPr>
+          <a:xfrm>
+            <a:off x="8211311" y="384048"/>
+            <a:ext cx="109728" cy="109728"/>
+          </a:xfrm>
+          <a:prstGeom prst="ellipse">
+            <a:avLst/>
+          </a:prstGeom>
+          <a:solidFill>
+            <a:srgbClr val="1F3864"/>
+          </a:solidFill>
+          <a:ln>
+            <a:noFill/>
+          </a:ln>
+          <a:effectLst/>
+        </p:spPr>
+        <p:style>
+          <a:lnRef idx="1">
+            <a:schemeClr val="accent1"/>
+          </a:lnRef>
+          <a:fillRef idx="3">
+            <a:schemeClr val="accent1"/>
+          </a:fillRef>
+          <a:effectRef idx="2">
+            <a:schemeClr val="accent1"/>
+          </a:effectRef>
+          <a:fontRef idx="minor">
+            <a:schemeClr val="lt1"/>
+          </a:fontRef>
+        </p:style>
+        <p:txBody>
+          <a:bodyPr rtlCol="0" anchor="ctr"/>
+          <a:lstStyle/>
+          <a:p>
+            <a:pPr algn="ctr"/>
+          </a:p>
+        </p:txBody>
+      </p:sp>
+      <p:sp>
+        <p:nvSpPr>
+          <p:cNvPr id="6" name="Oval 5"/>
+          <p:cNvSpPr/>
+          <p:nvPr/>
+        </p:nvSpPr>
+        <p:spPr>
+          <a:xfrm>
+            <a:off x="8394192" y="384048"/>
+            <a:ext cx="109728" cy="109728"/>
+          </a:xfrm>
+          <a:prstGeom prst="ellipse">
+            <a:avLst/>
+          </a:prstGeom>
+          <a:solidFill>
+            <a:srgbClr val="D6DEE9"/>
+          </a:solidFill>
+          <a:ln>
+            <a:noFill/>
+          </a:ln>
+          <a:effectLst/>
+        </p:spPr>
+        <p:style>
+          <a:lnRef idx="1">
+            <a:schemeClr val="accent1"/>
+          </a:lnRef>
+          <a:fillRef idx="3">
+            <a:schemeClr val="accent1"/>
+          </a:fillRef>
+          <a:effectRef idx="2">
+            <a:schemeClr val="accent1"/>
+          </a:effectRef>
+          <a:fontRef idx="minor">
+            <a:schemeClr val="lt1"/>
+          </a:fontRef>
+        </p:style>
+        <p:txBody>
+          <a:bodyPr rtlCol="0" anchor="ctr"/>
+          <a:lstStyle/>
+          <a:p>
+            <a:pPr algn="ctr"/>
+          </a:p>
+        </p:txBody>
+      </p:sp>
+      <p:sp>
+        <p:nvSpPr>
+          <p:cNvPr id="7" name="Oval 6"/>
+          <p:cNvSpPr/>
+          <p:nvPr/>
+        </p:nvSpPr>
+        <p:spPr>
+          <a:xfrm>
+            <a:off x="8577072" y="384048"/>
+            <a:ext cx="109728" cy="109728"/>
+          </a:xfrm>
+          <a:prstGeom prst="ellipse">
+            <a:avLst/>
+          </a:prstGeom>
+          <a:solidFill>
+            <a:srgbClr val="D6DEE9"/>
+          </a:solidFill>
+          <a:ln>
+            <a:noFill/>
+          </a:ln>
+          <a:effectLst/>
+        </p:spPr>
+        <p:style>
+          <a:lnRef idx="1">
+            <a:schemeClr val="accent1"/>
+          </a:lnRef>
+          <a:fillRef idx="3">
+            <a:schemeClr val="accent1"/>
+          </a:fillRef>
+          <a:effectRef idx="2">
+            <a:schemeClr val="accent1"/>
+          </a:effectRef>
+          <a:fontRef idx="minor">
+            <a:schemeClr val="lt1"/>
+          </a:fontRef>
+        </p:style>
+        <p:txBody>
+          <a:bodyPr rtlCol="0" anchor="ctr"/>
+          <a:lstStyle/>
+          <a:p>
+            <a:pPr algn="ctr"/>
+          </a:p>
+        </p:txBody>
+      </p:sp>
+      <p:sp>
+        <p:nvSpPr>
+          <p:cNvPr id="8" name="TextBox 7"/>
+          <p:cNvSpPr txBox="1"/>
+          <p:nvPr/>
+        </p:nvSpPr>
+        <p:spPr>
+          <a:xfrm>
+            <a:off x="8138160" y="6446520"/>
+            <a:ext cx="548640" cy="274320"/>
+          </a:xfrm>
+          <a:prstGeom prst="rect">
+            <a:avLst/>
+          </a:prstGeom>
+          <a:noFill/>
+        </p:spPr>
+        <p:txBody>
+          <a:bodyPr wrap="square" lIns="0" rIns="0" tIns="0" bIns="0">
+            <a:spAutoFit/>
+          </a:bodyPr>
+          <a:lstStyle/>
+          <a:p>
+            <a:pPr algn="r">
+              <a:lnSpc>
+                <a:spcPct val="100000"/>
+              </a:lnSpc>
+              <a:spcBef>
+                <a:spcPts val="0"/>
+              </a:spcBef>
+              <a:spcAft>
+                <a:spcPts val="300"/>
+              </a:spcAft>
+            </a:pPr>
+            <a:r>
+              <a:rPr sz="950" b="0" i="0">
+                <a:solidFill>
+                  <a:srgbClr val="808080"/>
+                </a:solidFill>
+                <a:latin typeface="Calibri"/>
+              </a:rPr>
+              <a:t>3</a:t>
+            </a:r>
+          </a:p>
+        </p:txBody>
+      </p:sp>
+      <p:sp>
+        <p:nvSpPr>
+          <p:cNvPr id="9" name="TextBox 8"/>
+          <p:cNvSpPr txBox="1"/>
+          <p:nvPr/>
+        </p:nvSpPr>
+        <p:spPr>
+          <a:xfrm>
+            <a:off x="457200" y="1188720"/>
+            <a:ext cx="8229600" cy="411480"/>
+          </a:xfrm>
+          <a:prstGeom prst="rect">
+            <a:avLst/>
+          </a:prstGeom>
+          <a:noFill/>
+        </p:spPr>
+        <p:txBody>
+          <a:bodyPr wrap="square" lIns="0" rIns="0" tIns="0" bIns="0">
+            <a:spAutoFit/>
+          </a:bodyPr>
+          <a:lstStyle/>
+          <a:p>
+            <a:pPr algn="l">
+              <a:lnSpc>
+                <a:spcPct val="108000"/>
+              </a:lnSpc>
+              <a:spcBef>
+                <a:spcPts val="0"/>
+              </a:spcBef>
+              <a:spcAft>
+                <a:spcPts val="300"/>
+              </a:spcAft>
+            </a:pPr>
+            <a:r>
+              <a:rPr sz="1100" b="0" i="0">
+                <a:solidFill>
+                  <a:srgbClr val="595959"/>
+                </a:solidFill>
+                <a:latin typeface="Calibri"/>
+              </a:rPr>
+              <a:t>MCP (Model Context Protocol) — asistan ile sistemler arasındaki ortak dil. Elektrik prizi gibi: bir kez standartlaşır, sonra her cihaz her prize takılır.</a:t>
+            </a:r>
+          </a:p>
+        </p:txBody>
+      </p:sp>
+      <p:sp>
+        <p:nvSpPr>
+          <p:cNvPr id="10" name="Rounded Rectangle 9"/>
+          <p:cNvSpPr/>
+          <p:nvPr/>
+        </p:nvSpPr>
+        <p:spPr>
+          <a:xfrm>
+            <a:off x="457200" y="1737360"/>
+            <a:ext cx="2331720" cy="1783080"/>
           </a:xfrm>
           <a:prstGeom prst="roundRect">
             <a:avLst>
@@ -4840,7 +6491,7 @@
           </a:fontRef>
         </p:style>
         <p:txBody>
-          <a:bodyPr rtlCol="0" anchor="ctr" wrap="square" lIns="155448" rIns="155448" tIns="118872" bIns="118872"/>
+          <a:bodyPr rtlCol="0" anchor="t" wrap="square" lIns="155448" rIns="155448" tIns="118872" bIns="118872"/>
           <a:lstStyle/>
           <a:p>
             <a:pPr algn="l">
@@ -4861,7 +6512,7 @@
                 </a:solidFill>
                 <a:latin typeface="Calibri"/>
               </a:rPr>
-              <a:t>✓  MEVCUT — çalışıyor</a:t>
+              <a:t>✓  BU UÇ TAKILI</a:t>
             </a:r>
           </a:p>
           <a:p>
@@ -4877,7 +6528,7 @@
               </a:spcAft>
             </a:pPr>
             <a:r>
-              <a:rPr sz="1500" b="1" i="0">
+              <a:rPr sz="1450" b="1" i="0">
                 <a:solidFill>
                   <a:srgbClr val="1F3864"/>
                 </a:solidFill>
@@ -4927,20 +6578,20 @@
                 </a:solidFill>
                 <a:latin typeface="Calibri"/>
               </a:rPr>
-              <a:t>Soruyu alır, hangi yeteneklerin var olduğunu keşfeder, gerekeni çağırır.</a:t>
-            </a:r>
-          </a:p>
-        </p:txBody>
-      </p:sp>
-      <p:sp>
-        <p:nvSpPr>
-          <p:cNvPr id="7" name="Left-Right Arrow 6"/>
+              <a:t>Soruyu alır, hangi yetenekler var diye sorar, gerekeni çağırır. Bugün çalışıyor.</a:t>
+            </a:r>
+          </a:p>
+        </p:txBody>
+      </p:sp>
+      <p:sp>
+        <p:nvSpPr>
+          <p:cNvPr id="11" name="Left-Right Arrow 10"/>
           <p:cNvSpPr/>
           <p:nvPr/>
         </p:nvSpPr>
         <p:spPr>
           <a:xfrm>
-            <a:off x="2871216" y="2706623"/>
+            <a:off x="2871216" y="2464308"/>
             <a:ext cx="457200" cy="329184"/>
           </a:xfrm>
           <a:prstGeom prst="leftRightArrow">
@@ -4978,14 +6629,14 @@
       </p:sp>
       <p:sp>
         <p:nvSpPr>
-          <p:cNvPr id="8" name="TextBox 7"/>
+          <p:cNvPr id="12" name="TextBox 11"/>
           <p:cNvSpPr txBox="1"/>
           <p:nvPr/>
         </p:nvSpPr>
         <p:spPr>
           <a:xfrm>
-            <a:off x="2688336" y="2395727"/>
-            <a:ext cx="822960" cy="256032"/>
+            <a:off x="2688336" y="2171700"/>
+            <a:ext cx="822960" cy="237744"/>
           </a:xfrm>
           <a:prstGeom prst="rect">
             <a:avLst/>
@@ -5023,14 +6674,14 @@
       </p:sp>
       <p:sp>
         <p:nvSpPr>
-          <p:cNvPr id="9" name="Rounded Rectangle 8"/>
+          <p:cNvPr id="13" name="Rounded Rectangle 12"/>
           <p:cNvSpPr/>
           <p:nvPr/>
         </p:nvSpPr>
         <p:spPr>
           <a:xfrm>
-            <a:off x="3410712" y="1810512"/>
-            <a:ext cx="2331720" cy="2121408"/>
+            <a:off x="3410712" y="1737360"/>
+            <a:ext cx="2331720" cy="1783080"/>
           </a:xfrm>
           <a:prstGeom prst="roundRect">
             <a:avLst>
@@ -5062,7 +6713,7 @@
           </a:fontRef>
         </p:style>
         <p:txBody>
-          <a:bodyPr rtlCol="0" anchor="ctr" wrap="square" lIns="155448" rIns="155448" tIns="118872" bIns="118872"/>
+          <a:bodyPr rtlCol="0" anchor="t" wrap="square" lIns="155448" rIns="155448" tIns="118872" bIns="118872"/>
           <a:lstStyle/>
           <a:p>
             <a:pPr algn="l">
@@ -5083,7 +6734,7 @@
                 </a:solidFill>
                 <a:latin typeface="Calibri"/>
               </a:rPr>
-              <a:t>○  EKSİK PARÇA — kuracağımız</a:t>
+              <a:t>○  BU UÇ BOŞTA</a:t>
             </a:r>
           </a:p>
           <a:p>
@@ -5099,7 +6750,7 @@
               </a:spcAft>
             </a:pPr>
             <a:r>
-              <a:rPr sz="1500" b="1" i="0">
+              <a:rPr sz="1450" b="1" i="0">
                 <a:solidFill>
                   <a:srgbClr val="1F3864"/>
                 </a:solidFill>
@@ -5149,20 +6800,20 @@
                 </a:solidFill>
                 <a:latin typeface="Calibri"/>
               </a:rPr>
-              <a:t>«Ben şunu yapabilirim» diye yeteneğini bildirir ve çağrıldığında çalıştırır.</a:t>
-            </a:r>
-          </a:p>
-        </p:txBody>
-      </p:sp>
-      <p:sp>
-        <p:nvSpPr>
-          <p:cNvPr id="10" name="Right Arrow 9"/>
+              <a:t>«Şunu yapabilirim» diye yeteneğini bildirir, çağrıldığında çalıştırır. Kuracağımız bu.</a:t>
+            </a:r>
+          </a:p>
+        </p:txBody>
+      </p:sp>
+      <p:sp>
+        <p:nvSpPr>
+          <p:cNvPr id="14" name="Right Arrow 13"/>
           <p:cNvSpPr/>
           <p:nvPr/>
         </p:nvSpPr>
         <p:spPr>
           <a:xfrm>
-            <a:off x="5815584" y="2706623"/>
+            <a:off x="5815584" y="2464308"/>
             <a:ext cx="457200" cy="329184"/>
           </a:xfrm>
           <a:prstGeom prst="rightArrow">
@@ -5200,14 +6851,14 @@
       </p:sp>
       <p:sp>
         <p:nvSpPr>
-          <p:cNvPr id="11" name="Rounded Rectangle 10"/>
+          <p:cNvPr id="15" name="Rounded Rectangle 14"/>
           <p:cNvSpPr/>
           <p:nvPr/>
         </p:nvSpPr>
         <p:spPr>
           <a:xfrm>
-            <a:off x="6355080" y="1810512"/>
-            <a:ext cx="2331720" cy="2121408"/>
+            <a:off x="6355080" y="1737360"/>
+            <a:ext cx="2331720" cy="1783080"/>
           </a:xfrm>
           <a:prstGeom prst="roundRect">
             <a:avLst>
@@ -5239,7 +6890,7 @@
           </a:fontRef>
         </p:style>
         <p:txBody>
-          <a:bodyPr rtlCol="0" anchor="ctr" wrap="square" lIns="155448" rIns="155448" tIns="118872" bIns="118872"/>
+          <a:bodyPr rtlCol="0" anchor="t" wrap="square" lIns="155448" rIns="155448" tIns="118872" bIns="118872"/>
           <a:lstStyle/>
           <a:p>
             <a:pPr algn="l">
@@ -5276,7 +6927,7 @@
               </a:spcAft>
             </a:pPr>
             <a:r>
-              <a:rPr sz="1500" b="1" i="0">
+              <a:rPr sz="1450" b="1" i="0">
                 <a:solidFill>
                   <a:srgbClr val="1F3864"/>
                 </a:solidFill>
@@ -5326,21 +6977,21 @@
                 </a:solidFill>
                 <a:latin typeface="Calibri"/>
               </a:rPr>
-              <a:t>Kredi, mevduat, operasyon servisleri; Oracle; WildFly.</a:t>
-            </a:r>
-          </a:p>
-        </p:txBody>
-      </p:sp>
-      <p:sp>
-        <p:nvSpPr>
-          <p:cNvPr id="12" name="TextBox 11"/>
+              <a:t>Kredi, mevduat, operasyon servisleri; Oracle; WildFly. Tek satırı değişmiyor.</a:t>
+            </a:r>
+          </a:p>
+        </p:txBody>
+      </p:sp>
+      <p:sp>
+        <p:nvSpPr>
+          <p:cNvPr id="16" name="TextBox 15"/>
           <p:cNvSpPr txBox="1"/>
           <p:nvPr/>
         </p:nvSpPr>
         <p:spPr>
           <a:xfrm>
-            <a:off x="457200" y="4114800"/>
-            <a:ext cx="8229600" cy="274320"/>
+            <a:off x="457200" y="3703320"/>
+            <a:ext cx="8229600" cy="256032"/>
           </a:xfrm>
           <a:prstGeom prst="rect">
             <a:avLst/>
@@ -5371,21 +7022,21 @@
                 </a:solidFill>
                 <a:latin typeface="Calibri"/>
               </a:rPr>
-              <a:t>MCP server üç şey sunabilir:</a:t>
-            </a:r>
-          </a:p>
-        </p:txBody>
-      </p:sp>
-      <p:sp>
-        <p:nvSpPr>
-          <p:cNvPr id="13" name="Rounded Rectangle 12"/>
+              <a:t>Boştaki uç takıldığında uygulama üç şey sunabilir:</a:t>
+            </a:r>
+          </a:p>
+        </p:txBody>
+      </p:sp>
+      <p:sp>
+        <p:nvSpPr>
+          <p:cNvPr id="17" name="Rounded Rectangle 16"/>
           <p:cNvSpPr/>
           <p:nvPr/>
         </p:nvSpPr>
         <p:spPr>
           <a:xfrm>
-            <a:off x="457200" y="4407408"/>
-            <a:ext cx="2651760" cy="731520"/>
+            <a:off x="457200" y="3977639"/>
+            <a:ext cx="2651760" cy="658368"/>
           </a:xfrm>
           <a:prstGeom prst="roundRect">
             <a:avLst>
@@ -5415,7 +7066,7 @@
           </a:fontRef>
         </p:style>
         <p:txBody>
-          <a:bodyPr rtlCol="0" anchor="ctr" wrap="square" lIns="155448" rIns="155448" tIns="118872" bIns="118872"/>
+          <a:bodyPr rtlCol="0" anchor="t" wrap="square" lIns="155448" rIns="155448" tIns="118872" bIns="118872"/>
           <a:lstStyle/>
           <a:p>
             <a:pPr algn="l">
@@ -5458,21 +7109,21 @@
                 </a:solidFill>
                 <a:latin typeface="Calibri"/>
               </a:rPr>
-              <a:t>çağrılabilir işlem — «kredi başvuru durumunu sorgula»</a:t>
-            </a:r>
-          </a:p>
-        </p:txBody>
-      </p:sp>
-      <p:sp>
-        <p:nvSpPr>
-          <p:cNvPr id="14" name="Rounded Rectangle 13"/>
+              <a:t>çağrılabilir işlem — «başvuru durumunu sorgula»</a:t>
+            </a:r>
+          </a:p>
+        </p:txBody>
+      </p:sp>
+      <p:sp>
+        <p:nvSpPr>
+          <p:cNvPr id="18" name="Rounded Rectangle 17"/>
           <p:cNvSpPr/>
           <p:nvPr/>
         </p:nvSpPr>
         <p:spPr>
           <a:xfrm>
-            <a:off x="3246120" y="4407408"/>
-            <a:ext cx="2651760" cy="731520"/>
+            <a:off x="3246120" y="3977639"/>
+            <a:ext cx="2651760" cy="658368"/>
           </a:xfrm>
           <a:prstGeom prst="roundRect">
             <a:avLst>
@@ -5502,7 +7153,7 @@
           </a:fontRef>
         </p:style>
         <p:txBody>
-          <a:bodyPr rtlCol="0" anchor="ctr" wrap="square" lIns="155448" rIns="155448" tIns="118872" bIns="118872"/>
+          <a:bodyPr rtlCol="0" anchor="t" wrap="square" lIns="155448" rIns="155448" tIns="118872" bIns="118872"/>
           <a:lstStyle/>
           <a:p>
             <a:pPr algn="l">
@@ -5545,21 +7196,21 @@
                 </a:solidFill>
                 <a:latin typeface="Calibri"/>
               </a:rPr>
-              <a:t>okunabilir veri — «ürün şartnamesi», «mevzuat metni»</a:t>
-            </a:r>
-          </a:p>
-        </p:txBody>
-      </p:sp>
-      <p:sp>
-        <p:nvSpPr>
-          <p:cNvPr id="15" name="Rounded Rectangle 14"/>
+              <a:t>okunabilir içerik — «ürün şartnamesi», «mevzuat»</a:t>
+            </a:r>
+          </a:p>
+        </p:txBody>
+      </p:sp>
+      <p:sp>
+        <p:nvSpPr>
+          <p:cNvPr id="19" name="Rounded Rectangle 18"/>
           <p:cNvSpPr/>
           <p:nvPr/>
         </p:nvSpPr>
         <p:spPr>
           <a:xfrm>
-            <a:off x="6035040" y="4407408"/>
-            <a:ext cx="2651760" cy="731520"/>
+            <a:off x="6035040" y="3977639"/>
+            <a:ext cx="2651760" cy="658368"/>
           </a:xfrm>
           <a:prstGeom prst="roundRect">
             <a:avLst>
@@ -5589,7 +7240,7 @@
           </a:fontRef>
         </p:style>
         <p:txBody>
-          <a:bodyPr rtlCol="0" anchor="ctr" wrap="square" lIns="155448" rIns="155448" tIns="118872" bIns="118872"/>
+          <a:bodyPr rtlCol="0" anchor="t" wrap="square" lIns="155448" rIns="155448" tIns="118872" bIns="118872"/>
           <a:lstStyle/>
           <a:p>
             <a:pPr algn="l">
@@ -5632,21 +7283,21 @@
                 </a:solidFill>
                 <a:latin typeface="Calibri"/>
               </a:rPr>
-              <a:t>hazır şablon — «müşteri özeti çıkar» gibi görevler</a:t>
-            </a:r>
-          </a:p>
-        </p:txBody>
-      </p:sp>
-      <p:sp>
-        <p:nvSpPr>
-          <p:cNvPr id="16" name="Rounded Rectangle 15"/>
+              <a:t>hazır şablon — «müşteri özeti çıkar»</a:t>
+            </a:r>
+          </a:p>
+        </p:txBody>
+      </p:sp>
+      <p:sp>
+        <p:nvSpPr>
+          <p:cNvPr id="20" name="Rounded Rectangle 19"/>
           <p:cNvSpPr/>
           <p:nvPr/>
         </p:nvSpPr>
         <p:spPr>
           <a:xfrm>
-            <a:off x="457200" y="5394960"/>
-            <a:ext cx="8229600" cy="731520"/>
+            <a:off x="457200" y="4937760"/>
+            <a:ext cx="8229600" cy="777240"/>
           </a:xfrm>
           <a:prstGeom prst="roundRect">
             <a:avLst>
@@ -5697,7 +7348,7 @@
                 </a:solidFill>
                 <a:latin typeface="Calibri"/>
               </a:rPr>
-              <a:t>Prizin asistan ucu takılı; iş uygulamaları ucu boşta duruyor.</a:t>
+              <a:t>Yeni bir asistan almıyoruz. Var olan asistanı kendi sistemlerimize takıyoruz.</a:t>
             </a:r>
           </a:p>
           <a:p>
@@ -5709,17 +7360,17 @@
                 <a:spcPts val="0"/>
               </a:spcBef>
               <a:spcAft>
-                <a:spcPts val="200"/>
-              </a:spcAft>
-            </a:pPr>
-            <a:r>
-              <a:rPr sz="1050" b="0" i="0">
-                <a:solidFill>
-                  <a:srgbClr val="595959"/>
-                </a:solidFill>
-                <a:latin typeface="Calibri"/>
-              </a:rPr>
-              <a:t>Bu sunumun konusu o boş ucu takmak — yeni bir asistan almak değil.</a:t>
+                <a:spcPts val="0"/>
+              </a:spcAft>
+            </a:pPr>
+            <a:r>
+              <a:rPr sz="1050" b="0" i="1">
+                <a:solidFill>
+                  <a:srgbClr val="2E75B6"/>
+                </a:solidFill>
+                <a:latin typeface="Calibri"/>
+              </a:rPr>
+              <a:t>Sıradaki soru kaçınılmaz: bu boştaki ucu kim, nerede ve hangi dille yazacak?</a:t>
             </a:r>
           </a:p>
         </p:txBody>
@@ -5732,7 +7383,7 @@
 </p:sld>
 </file>
 
-<file path=ppt/slides/slide3.xml><?xml version="1.0" encoding="utf-8"?>
+<file path=ppt/slides/slide4.xml><?xml version="1.0" encoding="utf-8"?>
 <p:sld xmlns:a="http://schemas.openxmlformats.org/drawingml/2006/main" xmlns:p="http://schemas.openxmlformats.org/presentationml/2006/main" xmlns:r="http://schemas.openxmlformats.org/officeDocument/2006/relationships">
   <p:cSld>
     <p:spTree>
@@ -5795,7 +7446,7 @@
         <p:spPr>
           <a:xfrm>
             <a:off x="457200" y="274320"/>
-            <a:ext cx="8229600" cy="822960"/>
+            <a:ext cx="7132320" cy="822960"/>
           </a:xfrm>
           <a:prstGeom prst="rect">
             <a:avLst/>
@@ -5826,7 +7477,7 @@
                 </a:solidFill>
                 <a:latin typeface="Calibri"/>
               </a:rPr>
-              <a:t>KARAR</a:t>
+              <a:t>③  KİM YAZACAK — finans kurumunda asıl soru</a:t>
             </a:r>
           </a:p>
           <a:p>
@@ -5842,20 +7493,196 @@
               </a:spcAft>
             </a:pPr>
             <a:r>
-              <a:rPr sz="2300" b="1" i="0">
+              <a:rPr sz="2200" b="1" i="0">
                 <a:solidFill>
                   <a:srgbClr val="1F3864"/>
                 </a:solidFill>
                 <a:latin typeface="Calibri"/>
               </a:rPr>
-              <a:t>MCP Server Kurmazsak Ne Olur, Kurarsak Ne Değişir</a:t>
-            </a:r>
-          </a:p>
-        </p:txBody>
-      </p:sp>
-      <p:sp>
-        <p:nvSpPr>
-          <p:cNvPr id="4" name="TextBox 3"/>
+              <a:t>Yetki Nerede Duruyorsa, Kod Orada Yazılır</a:t>
+            </a:r>
+          </a:p>
+        </p:txBody>
+      </p:sp>
+      <p:sp>
+        <p:nvSpPr>
+          <p:cNvPr id="4" name="Oval 3"/>
+          <p:cNvSpPr/>
+          <p:nvPr/>
+        </p:nvSpPr>
+        <p:spPr>
+          <a:xfrm>
+            <a:off x="8028431" y="384048"/>
+            <a:ext cx="109728" cy="109728"/>
+          </a:xfrm>
+          <a:prstGeom prst="ellipse">
+            <a:avLst/>
+          </a:prstGeom>
+          <a:solidFill>
+            <a:srgbClr val="D6DEE9"/>
+          </a:solidFill>
+          <a:ln>
+            <a:noFill/>
+          </a:ln>
+          <a:effectLst/>
+        </p:spPr>
+        <p:style>
+          <a:lnRef idx="1">
+            <a:schemeClr val="accent1"/>
+          </a:lnRef>
+          <a:fillRef idx="3">
+            <a:schemeClr val="accent1"/>
+          </a:fillRef>
+          <a:effectRef idx="2">
+            <a:schemeClr val="accent1"/>
+          </a:effectRef>
+          <a:fontRef idx="minor">
+            <a:schemeClr val="lt1"/>
+          </a:fontRef>
+        </p:style>
+        <p:txBody>
+          <a:bodyPr rtlCol="0" anchor="ctr"/>
+          <a:lstStyle/>
+          <a:p>
+            <a:pPr algn="ctr"/>
+          </a:p>
+        </p:txBody>
+      </p:sp>
+      <p:sp>
+        <p:nvSpPr>
+          <p:cNvPr id="5" name="Oval 4"/>
+          <p:cNvSpPr/>
+          <p:nvPr/>
+        </p:nvSpPr>
+        <p:spPr>
+          <a:xfrm>
+            <a:off x="8211311" y="384048"/>
+            <a:ext cx="109728" cy="109728"/>
+          </a:xfrm>
+          <a:prstGeom prst="ellipse">
+            <a:avLst/>
+          </a:prstGeom>
+          <a:solidFill>
+            <a:srgbClr val="D6DEE9"/>
+          </a:solidFill>
+          <a:ln>
+            <a:noFill/>
+          </a:ln>
+          <a:effectLst/>
+        </p:spPr>
+        <p:style>
+          <a:lnRef idx="1">
+            <a:schemeClr val="accent1"/>
+          </a:lnRef>
+          <a:fillRef idx="3">
+            <a:schemeClr val="accent1"/>
+          </a:fillRef>
+          <a:effectRef idx="2">
+            <a:schemeClr val="accent1"/>
+          </a:effectRef>
+          <a:fontRef idx="minor">
+            <a:schemeClr val="lt1"/>
+          </a:fontRef>
+        </p:style>
+        <p:txBody>
+          <a:bodyPr rtlCol="0" anchor="ctr"/>
+          <a:lstStyle/>
+          <a:p>
+            <a:pPr algn="ctr"/>
+          </a:p>
+        </p:txBody>
+      </p:sp>
+      <p:sp>
+        <p:nvSpPr>
+          <p:cNvPr id="6" name="Oval 5"/>
+          <p:cNvSpPr/>
+          <p:nvPr/>
+        </p:nvSpPr>
+        <p:spPr>
+          <a:xfrm>
+            <a:off x="8394192" y="384048"/>
+            <a:ext cx="109728" cy="109728"/>
+          </a:xfrm>
+          <a:prstGeom prst="ellipse">
+            <a:avLst/>
+          </a:prstGeom>
+          <a:solidFill>
+            <a:srgbClr val="1F3864"/>
+          </a:solidFill>
+          <a:ln>
+            <a:noFill/>
+          </a:ln>
+          <a:effectLst/>
+        </p:spPr>
+        <p:style>
+          <a:lnRef idx="1">
+            <a:schemeClr val="accent1"/>
+          </a:lnRef>
+          <a:fillRef idx="3">
+            <a:schemeClr val="accent1"/>
+          </a:fillRef>
+          <a:effectRef idx="2">
+            <a:schemeClr val="accent1"/>
+          </a:effectRef>
+          <a:fontRef idx="minor">
+            <a:schemeClr val="lt1"/>
+          </a:fontRef>
+        </p:style>
+        <p:txBody>
+          <a:bodyPr rtlCol="0" anchor="ctr"/>
+          <a:lstStyle/>
+          <a:p>
+            <a:pPr algn="ctr"/>
+          </a:p>
+        </p:txBody>
+      </p:sp>
+      <p:sp>
+        <p:nvSpPr>
+          <p:cNvPr id="7" name="Oval 6"/>
+          <p:cNvSpPr/>
+          <p:nvPr/>
+        </p:nvSpPr>
+        <p:spPr>
+          <a:xfrm>
+            <a:off x="8577072" y="384048"/>
+            <a:ext cx="109728" cy="109728"/>
+          </a:xfrm>
+          <a:prstGeom prst="ellipse">
+            <a:avLst/>
+          </a:prstGeom>
+          <a:solidFill>
+            <a:srgbClr val="D6DEE9"/>
+          </a:solidFill>
+          <a:ln>
+            <a:noFill/>
+          </a:ln>
+          <a:effectLst/>
+        </p:spPr>
+        <p:style>
+          <a:lnRef idx="1">
+            <a:schemeClr val="accent1"/>
+          </a:lnRef>
+          <a:fillRef idx="3">
+            <a:schemeClr val="accent1"/>
+          </a:fillRef>
+          <a:effectRef idx="2">
+            <a:schemeClr val="accent1"/>
+          </a:effectRef>
+          <a:fontRef idx="minor">
+            <a:schemeClr val="lt1"/>
+          </a:fontRef>
+        </p:style>
+        <p:txBody>
+          <a:bodyPr rtlCol="0" anchor="ctr"/>
+          <a:lstStyle/>
+          <a:p>
+            <a:pPr algn="ctr"/>
+          </a:p>
+        </p:txBody>
+      </p:sp>
+      <p:sp>
+        <p:nvSpPr>
+          <p:cNvPr id="8" name="TextBox 7"/>
           <p:cNvSpPr txBox="1"/>
           <p:nvPr/>
         </p:nvSpPr>
@@ -5893,21 +7720,1051 @@
                 </a:solidFill>
                 <a:latin typeface="Calibri"/>
               </a:rPr>
-              <a:t>3</a:t>
-            </a:r>
-          </a:p>
-        </p:txBody>
-      </p:sp>
-      <p:sp>
-        <p:nvSpPr>
-          <p:cNvPr id="5" name="Rounded Rectangle 4"/>
+              <a:t>4</a:t>
+            </a:r>
+          </a:p>
+        </p:txBody>
+      </p:sp>
+      <p:sp>
+        <p:nvSpPr>
+          <p:cNvPr id="9" name="Rounded Rectangle 8"/>
           <p:cNvSpPr/>
           <p:nvPr/>
         </p:nvSpPr>
         <p:spPr>
           <a:xfrm>
-            <a:off x="457200" y="1234440"/>
-            <a:ext cx="3977639" cy="3200400"/>
+            <a:off x="457200" y="1188720"/>
+            <a:ext cx="3977639" cy="3520440"/>
+          </a:xfrm>
+          <a:prstGeom prst="roundRect">
+            <a:avLst>
+              <a:gd name="adj" fmla="val 4000"/>
+            </a:avLst>
+          </a:prstGeom>
+          <a:solidFill>
+            <a:srgbClr val="FFFFFF"/>
+          </a:solidFill>
+          <a:ln w="9525">
+            <a:solidFill>
+              <a:srgbClr val="D9D9D9"/>
+            </a:solidFill>
+          </a:ln>
+          <a:effectLst/>
+        </p:spPr>
+        <p:style>
+          <a:lnRef idx="1">
+            <a:schemeClr val="accent1"/>
+          </a:lnRef>
+          <a:fillRef idx="3">
+            <a:schemeClr val="accent1"/>
+          </a:fillRef>
+          <a:effectRef idx="2">
+            <a:schemeClr val="accent1"/>
+          </a:effectRef>
+          <a:fontRef idx="minor">
+            <a:schemeClr val="lt1"/>
+          </a:fontRef>
+        </p:style>
+        <p:txBody>
+          <a:bodyPr rtlCol="0" anchor="t" wrap="square" lIns="155448" rIns="155448" tIns="118872" bIns="118872"/>
+          <a:lstStyle/>
+          <a:p>
+            <a:pPr algn="l">
+              <a:lnSpc>
+                <a:spcPct val="100000"/>
+              </a:lnSpc>
+              <a:spcBef>
+                <a:spcPts val="0"/>
+              </a:spcBef>
+              <a:spcAft>
+                <a:spcPts val="200"/>
+              </a:spcAft>
+            </a:pPr>
+            <a:r>
+              <a:rPr sz="1000" b="1" i="0">
+                <a:solidFill>
+                  <a:srgbClr val="2E75B6"/>
+                </a:solidFill>
+                <a:latin typeface="Calibri"/>
+              </a:rPr>
+              <a:t>NEDEN JAVA</a:t>
+            </a:r>
+          </a:p>
+          <a:p>
+            <a:pPr algn="l">
+              <a:lnSpc>
+                <a:spcPct val="100000"/>
+              </a:lnSpc>
+              <a:spcBef>
+                <a:spcPts val="0"/>
+              </a:spcBef>
+              <a:spcAft>
+                <a:spcPts val="900"/>
+              </a:spcAft>
+            </a:pPr>
+            <a:r>
+              <a:rPr sz="950" b="0" i="0">
+                <a:solidFill>
+                  <a:srgbClr val="595959"/>
+                </a:solidFill>
+                <a:latin typeface="Calibri"/>
+              </a:rPr>
+              <a:t>protokol dil bağımsız olduğu hâlde</a:t>
+            </a:r>
+          </a:p>
+          <a:p>
+            <a:pPr algn="l">
+              <a:lnSpc>
+                <a:spcPct val="100000"/>
+              </a:lnSpc>
+              <a:spcBef>
+                <a:spcPts val="0"/>
+              </a:spcBef>
+              <a:spcAft>
+                <a:spcPts val="100"/>
+              </a:spcAft>
+            </a:pPr>
+            <a:r>
+              <a:rPr sz="1150" b="1" i="0">
+                <a:solidFill>
+                  <a:srgbClr val="1F3864"/>
+                </a:solidFill>
+                <a:latin typeface="Calibri"/>
+              </a:rPr>
+              <a:t>▪  Yetki ikinci kez yazılmaz</a:t>
+            </a:r>
+          </a:p>
+          <a:p>
+            <a:pPr algn="l" marL="201168" indent="0">
+              <a:lnSpc>
+                <a:spcPct val="103000"/>
+              </a:lnSpc>
+              <a:spcBef>
+                <a:spcPts val="0"/>
+              </a:spcBef>
+              <a:spcAft>
+                <a:spcPts val="700"/>
+              </a:spcAft>
+            </a:pPr>
+            <a:r>
+              <a:rPr sz="1000" b="0" i="0">
+                <a:solidFill>
+                  <a:srgbClr val="595959"/>
+                </a:solidFill>
+                <a:latin typeface="Calibri"/>
+              </a:rPr>
+              <a:t>MCP server uygulamanın İÇİNDE çalışır. İstek mevcut JWT token'ıyla, mevcut filtre zincirinden geçer: kullanıcının bugün göremediğini asistan da göremez.</a:t>
+            </a:r>
+          </a:p>
+          <a:p>
+            <a:pPr algn="l">
+              <a:lnSpc>
+                <a:spcPct val="100000"/>
+              </a:lnSpc>
+              <a:spcBef>
+                <a:spcPts val="0"/>
+              </a:spcBef>
+              <a:spcAft>
+                <a:spcPts val="100"/>
+              </a:spcAft>
+            </a:pPr>
+            <a:r>
+              <a:rPr sz="1150" b="1" i="0">
+                <a:solidFill>
+                  <a:srgbClr val="1F3864"/>
+                </a:solidFill>
+                <a:latin typeface="Calibri"/>
+              </a:rPr>
+              <a:t>▪  İş kuralı tek yerde kalır</a:t>
+            </a:r>
+          </a:p>
+          <a:p>
+            <a:pPr algn="l" marL="201168" indent="0">
+              <a:lnSpc>
+                <a:spcPct val="103000"/>
+              </a:lnSpc>
+              <a:spcBef>
+                <a:spcPts val="0"/>
+              </a:spcBef>
+              <a:spcAft>
+                <a:spcPts val="700"/>
+              </a:spcAft>
+            </a:pPr>
+            <a:r>
+              <a:rPr sz="1000" b="0" i="0">
+                <a:solidFill>
+                  <a:srgbClr val="595959"/>
+                </a:solidFill>
+                <a:latin typeface="Calibri"/>
+              </a:rPr>
+              <a:t>Servis zaten Java'da; MCP server aynı sınıfı çağırır. Kural kopyalanmaz.</a:t>
+            </a:r>
+          </a:p>
+          <a:p>
+            <a:pPr algn="l">
+              <a:lnSpc>
+                <a:spcPct val="100000"/>
+              </a:lnSpc>
+              <a:spcBef>
+                <a:spcPts val="0"/>
+              </a:spcBef>
+              <a:spcAft>
+                <a:spcPts val="100"/>
+              </a:spcAft>
+            </a:pPr>
+            <a:r>
+              <a:rPr sz="1150" b="1" i="0">
+                <a:solidFill>
+                  <a:srgbClr val="1F3864"/>
+                </a:solidFill>
+                <a:latin typeface="Calibri"/>
+              </a:rPr>
+              <a:t>▪  Mevcut altyapı aynen kullanılır</a:t>
+            </a:r>
+          </a:p>
+          <a:p>
+            <a:pPr algn="l" marL="201168" indent="0">
+              <a:lnSpc>
+                <a:spcPct val="103000"/>
+              </a:lnSpc>
+              <a:spcBef>
+                <a:spcPts val="0"/>
+              </a:spcBef>
+              <a:spcAft>
+                <a:spcPts val="700"/>
+              </a:spcAft>
+            </a:pPr>
+            <a:r>
+              <a:rPr sz="1000" b="0" i="0">
+                <a:solidFill>
+                  <a:srgbClr val="595959"/>
+                </a:solidFill>
+                <a:latin typeface="Calibri"/>
+              </a:rPr>
+              <a:t>WildFly, JNDI datasource, stored procedure'ler, loglama. Yeni çalışma ortamı kurulmaz.</a:t>
+            </a:r>
+          </a:p>
+          <a:p>
+            <a:pPr algn="l">
+              <a:lnSpc>
+                <a:spcPct val="105000"/>
+              </a:lnSpc>
+              <a:spcBef>
+                <a:spcPts val="0"/>
+              </a:spcBef>
+              <a:spcAft>
+                <a:spcPts val="300"/>
+              </a:spcAft>
+            </a:pPr>
+            <a:r>
+              <a:rPr sz="1000" b="0" i="1">
+                <a:solidFill>
+                  <a:srgbClr val="2E75B6"/>
+                </a:solidFill>
+                <a:latin typeface="Calibri"/>
+              </a:rPr>
+              <a:t>Python ya da Node ile de yazılabilirdi — ama o zaman yetki doğrulamasını ve iş kuralını ikinci kez yazardık.</a:t>
+            </a:r>
+          </a:p>
+        </p:txBody>
+      </p:sp>
+      <p:sp>
+        <p:nvSpPr>
+          <p:cNvPr id="10" name="Rounded Rectangle 9"/>
+          <p:cNvSpPr/>
+          <p:nvPr/>
+        </p:nvSpPr>
+        <p:spPr>
+          <a:xfrm>
+            <a:off x="4709159" y="1188720"/>
+            <a:ext cx="3977639" cy="3520440"/>
+          </a:xfrm>
+          <a:prstGeom prst="roundRect">
+            <a:avLst>
+              <a:gd name="adj" fmla="val 4000"/>
+            </a:avLst>
+          </a:prstGeom>
+          <a:solidFill>
+            <a:srgbClr val="EEF2F8"/>
+          </a:solidFill>
+          <a:ln>
+            <a:noFill/>
+          </a:ln>
+          <a:effectLst/>
+        </p:spPr>
+        <p:style>
+          <a:lnRef idx="1">
+            <a:schemeClr val="accent1"/>
+          </a:lnRef>
+          <a:fillRef idx="3">
+            <a:schemeClr val="accent1"/>
+          </a:fillRef>
+          <a:effectRef idx="2">
+            <a:schemeClr val="accent1"/>
+          </a:effectRef>
+          <a:fontRef idx="minor">
+            <a:schemeClr val="lt1"/>
+          </a:fontRef>
+        </p:style>
+        <p:txBody>
+          <a:bodyPr rtlCol="0" anchor="t" wrap="square" lIns="155448" rIns="155448" tIns="118872" bIns="118872"/>
+          <a:lstStyle/>
+          <a:p>
+            <a:pPr algn="l">
+              <a:lnSpc>
+                <a:spcPct val="100000"/>
+              </a:lnSpc>
+              <a:spcBef>
+                <a:spcPts val="0"/>
+              </a:spcBef>
+              <a:spcAft>
+                <a:spcPts val="200"/>
+              </a:spcAft>
+            </a:pPr>
+            <a:r>
+              <a:rPr sz="1000" b="1" i="0">
+                <a:solidFill>
+                  <a:srgbClr val="2E75B6"/>
+                </a:solidFill>
+                <a:latin typeface="Calibri"/>
+              </a:rPr>
+              <a:t>NEDEN TEK PLATFORM (zeus-ai)</a:t>
+            </a:r>
+          </a:p>
+          <a:p>
+            <a:pPr algn="l">
+              <a:lnSpc>
+                <a:spcPct val="100000"/>
+              </a:lnSpc>
+              <a:spcBef>
+                <a:spcPts val="0"/>
+              </a:spcBef>
+              <a:spcAft>
+                <a:spcPts val="900"/>
+              </a:spcAft>
+            </a:pPr>
+            <a:r>
+              <a:rPr sz="950" b="0" i="0">
+                <a:solidFill>
+                  <a:srgbClr val="595959"/>
+                </a:solidFill>
+                <a:latin typeface="Calibri"/>
+              </a:rPr>
+              <a:t>her ekip kendi çözümünü yazmasın diye</a:t>
+            </a:r>
+          </a:p>
+          <a:p>
+            <a:pPr algn="l">
+              <a:lnSpc>
+                <a:spcPct val="105000"/>
+              </a:lnSpc>
+              <a:spcBef>
+                <a:spcPts val="0"/>
+              </a:spcBef>
+              <a:spcAft>
+                <a:spcPts val="900"/>
+              </a:spcAft>
+            </a:pPr>
+            <a:r>
+              <a:rPr sz="1050" b="0" i="0">
+                <a:solidFill>
+                  <a:srgbClr val="595959"/>
+                </a:solidFill>
+                <a:latin typeface="Calibri"/>
+              </a:rPr>
+              <a:t>8 uygulama kendi başına yazarsa: 8 farklı yetki yorumu, 8 ayrı güvenlik yüzeyi, 8 ayrı sürüm ve CVE takibi. Bir tanesi yanlış yaparsa haber kurumun adına çıkar.</a:t>
+            </a:r>
+          </a:p>
+          <a:p>
+            <a:pPr algn="l">
+              <a:lnSpc>
+                <a:spcPct val="105000"/>
+              </a:lnSpc>
+              <a:spcBef>
+                <a:spcPts val="0"/>
+              </a:spcBef>
+              <a:spcAft>
+                <a:spcPts val="700"/>
+              </a:spcAft>
+            </a:pPr>
+            <a:r>
+              <a:rPr sz="1050" b="1" i="0">
+                <a:solidFill>
+                  <a:srgbClr val="1F3864"/>
+                </a:solidFill>
+                <a:latin typeface="Calibri"/>
+              </a:rPr>
+              <a:t>Platform katmanı bunu bir kez, doğru şekilde yapar. Uygulama ekibinin işi üç adıma iner:</a:t>
+            </a:r>
+          </a:p>
+          <a:p>
+            <a:pPr algn="l">
+              <a:lnSpc>
+                <a:spcPct val="100000"/>
+              </a:lnSpc>
+              <a:spcBef>
+                <a:spcPts val="0"/>
+              </a:spcBef>
+              <a:spcAft>
+                <a:spcPts val="100"/>
+              </a:spcAft>
+            </a:pPr>
+            <a:r>
+              <a:rPr sz="1150" b="1" i="0">
+                <a:solidFill>
+                  <a:srgbClr val="1F3864"/>
+                </a:solidFill>
+                <a:latin typeface="Calibri"/>
+              </a:rPr>
+              <a:t>1.  Bağımlılığı ekler</a:t>
+            </a:r>
+          </a:p>
+          <a:p>
+            <a:pPr algn="l" marL="201168" indent="0">
+              <a:lnSpc>
+                <a:spcPct val="103000"/>
+              </a:lnSpc>
+              <a:spcBef>
+                <a:spcPts val="0"/>
+              </a:spcBef>
+              <a:spcAft>
+                <a:spcPts val="600"/>
+              </a:spcAft>
+            </a:pPr>
+            <a:r>
+              <a:rPr sz="1000" b="0" i="0">
+                <a:solidFill>
+                  <a:srgbClr val="595959"/>
+                </a:solidFill>
+                <a:latin typeface="Calibri"/>
+              </a:rPr>
+              <a:t>zeus-ai — sürümü platform yönetir</a:t>
+            </a:r>
+          </a:p>
+          <a:p>
+            <a:pPr algn="l">
+              <a:lnSpc>
+                <a:spcPct val="100000"/>
+              </a:lnSpc>
+              <a:spcBef>
+                <a:spcPts val="0"/>
+              </a:spcBef>
+              <a:spcAft>
+                <a:spcPts val="100"/>
+              </a:spcAft>
+            </a:pPr>
+            <a:r>
+              <a:rPr sz="1150" b="1" i="0">
+                <a:solidFill>
+                  <a:srgbClr val="1F3864"/>
+                </a:solidFill>
+                <a:latin typeface="Calibri"/>
+              </a:rPr>
+              <a:t>2.  Servis metodunu işaretler</a:t>
+            </a:r>
+          </a:p>
+          <a:p>
+            <a:pPr algn="l" marL="201168" indent="0">
+              <a:lnSpc>
+                <a:spcPct val="103000"/>
+              </a:lnSpc>
+              <a:spcBef>
+                <a:spcPts val="0"/>
+              </a:spcBef>
+              <a:spcAft>
+                <a:spcPts val="600"/>
+              </a:spcAft>
+            </a:pPr>
+            <a:r>
+              <a:rPr sz="900" b="0" i="0">
+                <a:solidFill>
+                  <a:srgbClr val="2E75B6"/>
+                </a:solidFill>
+                <a:latin typeface="Consolas"/>
+              </a:rPr>
+              <a:t>@McpTool("Başvuru durumunu sorgular")</a:t>
+            </a:r>
+          </a:p>
+          <a:p>
+            <a:pPr algn="l">
+              <a:lnSpc>
+                <a:spcPct val="100000"/>
+              </a:lnSpc>
+              <a:spcBef>
+                <a:spcPts val="0"/>
+              </a:spcBef>
+              <a:spcAft>
+                <a:spcPts val="100"/>
+              </a:spcAft>
+            </a:pPr>
+            <a:r>
+              <a:rPr sz="1150" b="1" i="0">
+                <a:solidFill>
+                  <a:srgbClr val="1F3864"/>
+                </a:solidFill>
+                <a:latin typeface="Calibri"/>
+              </a:rPr>
+              <a:t>3.  Deploy eder</a:t>
+            </a:r>
+          </a:p>
+          <a:p>
+            <a:pPr algn="l" marL="201168" indent="0">
+              <a:lnSpc>
+                <a:spcPct val="103000"/>
+              </a:lnSpc>
+              <a:spcBef>
+                <a:spcPts val="0"/>
+              </a:spcBef>
+              <a:spcAft>
+                <a:spcPts val="600"/>
+              </a:spcAft>
+            </a:pPr>
+            <a:r>
+              <a:rPr sz="1000" b="0" i="0">
+                <a:solidFill>
+                  <a:srgbClr val="595959"/>
+                </a:solidFill>
+                <a:latin typeface="Calibri"/>
+              </a:rPr>
+              <a:t>yeni sunucu, yeni ekran, yeni hat yok</a:t>
+            </a:r>
+          </a:p>
+        </p:txBody>
+      </p:sp>
+      <p:sp>
+        <p:nvSpPr>
+          <p:cNvPr id="11" name="Rounded Rectangle 10"/>
+          <p:cNvSpPr/>
+          <p:nvPr/>
+        </p:nvSpPr>
+        <p:spPr>
+          <a:xfrm>
+            <a:off x="457200" y="4956048"/>
+            <a:ext cx="8229600" cy="777240"/>
+          </a:xfrm>
+          <a:prstGeom prst="roundRect">
+            <a:avLst>
+              <a:gd name="adj" fmla="val 4000"/>
+            </a:avLst>
+          </a:prstGeom>
+          <a:solidFill>
+            <a:srgbClr val="EEF2F8"/>
+          </a:solidFill>
+          <a:ln>
+            <a:noFill/>
+          </a:ln>
+          <a:effectLst/>
+        </p:spPr>
+        <p:style>
+          <a:lnRef idx="1">
+            <a:schemeClr val="accent1"/>
+          </a:lnRef>
+          <a:fillRef idx="3">
+            <a:schemeClr val="accent1"/>
+          </a:fillRef>
+          <a:effectRef idx="2">
+            <a:schemeClr val="accent1"/>
+          </a:effectRef>
+          <a:fontRef idx="minor">
+            <a:schemeClr val="lt1"/>
+          </a:fontRef>
+        </p:style>
+        <p:txBody>
+          <a:bodyPr rtlCol="0" anchor="ctr" wrap="square" lIns="155448" rIns="155448" tIns="118872" bIns="118872"/>
+          <a:lstStyle/>
+          <a:p>
+            <a:pPr algn="ctr">
+              <a:lnSpc>
+                <a:spcPct val="105000"/>
+              </a:lnSpc>
+              <a:spcBef>
+                <a:spcPts val="0"/>
+              </a:spcBef>
+              <a:spcAft>
+                <a:spcPts val="200"/>
+              </a:spcAft>
+            </a:pPr>
+            <a:r>
+              <a:rPr sz="1150" b="1" i="0">
+                <a:solidFill>
+                  <a:srgbClr val="1F3864"/>
+                </a:solidFill>
+                <a:latin typeface="Calibri"/>
+              </a:rPr>
+              <a:t>İki söz verdik: yetki bizim elimizde kalacak, protokol standart olacak.</a:t>
+            </a:r>
+          </a:p>
+          <a:p>
+            <a:pPr algn="ctr">
+              <a:lnSpc>
+                <a:spcPct val="105000"/>
+              </a:lnSpc>
+              <a:spcBef>
+                <a:spcPts val="0"/>
+              </a:spcBef>
+              <a:spcAft>
+                <a:spcPts val="0"/>
+              </a:spcAft>
+            </a:pPr>
+            <a:r>
+              <a:rPr sz="1050" b="0" i="1">
+                <a:solidFill>
+                  <a:srgbClr val="2E75B6"/>
+                </a:solidFill>
+                <a:latin typeface="Calibri"/>
+              </a:rPr>
+              <a:t>Peki bu sözleri tutabileceğimiz altyapıyı neyin üstüne kuracağız?</a:t>
+            </a:r>
+          </a:p>
+        </p:txBody>
+      </p:sp>
+    </p:spTree>
+  </p:cSld>
+  <p:clrMapOvr>
+    <a:masterClrMapping/>
+  </p:clrMapOvr>
+</p:sld>
+</file>
+
+<file path=ppt/slides/slide5.xml><?xml version="1.0" encoding="utf-8"?>
+<p:sld xmlns:a="http://schemas.openxmlformats.org/drawingml/2006/main" xmlns:p="http://schemas.openxmlformats.org/presentationml/2006/main" xmlns:r="http://schemas.openxmlformats.org/officeDocument/2006/relationships">
+  <p:cSld>
+    <p:spTree>
+      <p:nvGrpSpPr>
+        <p:cNvPr id="1" name=""/>
+        <p:cNvGrpSpPr/>
+        <p:nvPr/>
+      </p:nvGrpSpPr>
+      <p:grpSpPr/>
+      <p:sp>
+        <p:nvSpPr>
+          <p:cNvPr id="2" name="Rectangle 1"/>
+          <p:cNvSpPr/>
+          <p:nvPr/>
+        </p:nvSpPr>
+        <p:spPr>
+          <a:xfrm>
+            <a:off x="0" y="0"/>
+            <a:ext cx="9144000" cy="100584"/>
+          </a:xfrm>
+          <a:prstGeom prst="rect">
+            <a:avLst/>
+          </a:prstGeom>
+          <a:solidFill>
+            <a:srgbClr val="1F3864"/>
+          </a:solidFill>
+          <a:ln>
+            <a:noFill/>
+          </a:ln>
+          <a:effectLst/>
+        </p:spPr>
+        <p:style>
+          <a:lnRef idx="1">
+            <a:schemeClr val="accent1"/>
+          </a:lnRef>
+          <a:fillRef idx="3">
+            <a:schemeClr val="accent1"/>
+          </a:fillRef>
+          <a:effectRef idx="2">
+            <a:schemeClr val="accent1"/>
+          </a:effectRef>
+          <a:fontRef idx="minor">
+            <a:schemeClr val="lt1"/>
+          </a:fontRef>
+        </p:style>
+        <p:txBody>
+          <a:bodyPr rtlCol="0" anchor="ctr"/>
+          <a:lstStyle/>
+          <a:p>
+            <a:pPr algn="ctr"/>
+          </a:p>
+        </p:txBody>
+      </p:sp>
+      <p:sp>
+        <p:nvSpPr>
+          <p:cNvPr id="3" name="TextBox 2"/>
+          <p:cNvSpPr txBox="1"/>
+          <p:nvPr/>
+        </p:nvSpPr>
+        <p:spPr>
+          <a:xfrm>
+            <a:off x="457200" y="274320"/>
+            <a:ext cx="7132320" cy="822960"/>
+          </a:xfrm>
+          <a:prstGeom prst="rect">
+            <a:avLst/>
+          </a:prstGeom>
+          <a:noFill/>
+        </p:spPr>
+        <p:txBody>
+          <a:bodyPr wrap="square" lIns="0" rIns="0" tIns="0" bIns="0">
+            <a:spAutoFit/>
+          </a:bodyPr>
+          <a:lstStyle/>
+          <a:p>
+            <a:pPr algn="l">
+              <a:lnSpc>
+                <a:spcPct val="100000"/>
+              </a:lnSpc>
+              <a:spcBef>
+                <a:spcPts val="0"/>
+              </a:spcBef>
+              <a:spcAft>
+                <a:spcPts val="200"/>
+              </a:spcAft>
+            </a:pPr>
+            <a:r>
+              <a:rPr sz="1000" b="1" i="0">
+                <a:solidFill>
+                  <a:srgbClr val="2E75B6"/>
+                </a:solidFill>
+                <a:latin typeface="Calibri"/>
+              </a:rPr>
+              <a:t>④  NEYİN ÜSTÜNE — ve asıl karar</a:t>
+            </a:r>
+          </a:p>
+          <a:p>
+            <a:pPr algn="l">
+              <a:lnSpc>
+                <a:spcPct val="100000"/>
+              </a:lnSpc>
+              <a:spcBef>
+                <a:spcPts val="0"/>
+              </a:spcBef>
+              <a:spcAft>
+                <a:spcPts val="0"/>
+              </a:spcAft>
+            </a:pPr>
+            <a:r>
+              <a:rPr sz="2200" b="1" i="0">
+                <a:solidFill>
+                  <a:srgbClr val="1F3864"/>
+                </a:solidFill>
+                <a:latin typeface="Calibri"/>
+              </a:rPr>
+              <a:t>Verdiğimiz İki Sözü Hangi Sürüm Tutabiliyor?</a:t>
+            </a:r>
+          </a:p>
+        </p:txBody>
+      </p:sp>
+      <p:sp>
+        <p:nvSpPr>
+          <p:cNvPr id="4" name="Oval 3"/>
+          <p:cNvSpPr/>
+          <p:nvPr/>
+        </p:nvSpPr>
+        <p:spPr>
+          <a:xfrm>
+            <a:off x="8028431" y="384048"/>
+            <a:ext cx="109728" cy="109728"/>
+          </a:xfrm>
+          <a:prstGeom prst="ellipse">
+            <a:avLst/>
+          </a:prstGeom>
+          <a:solidFill>
+            <a:srgbClr val="D6DEE9"/>
+          </a:solidFill>
+          <a:ln>
+            <a:noFill/>
+          </a:ln>
+          <a:effectLst/>
+        </p:spPr>
+        <p:style>
+          <a:lnRef idx="1">
+            <a:schemeClr val="accent1"/>
+          </a:lnRef>
+          <a:fillRef idx="3">
+            <a:schemeClr val="accent1"/>
+          </a:fillRef>
+          <a:effectRef idx="2">
+            <a:schemeClr val="accent1"/>
+          </a:effectRef>
+          <a:fontRef idx="minor">
+            <a:schemeClr val="lt1"/>
+          </a:fontRef>
+        </p:style>
+        <p:txBody>
+          <a:bodyPr rtlCol="0" anchor="ctr"/>
+          <a:lstStyle/>
+          <a:p>
+            <a:pPr algn="ctr"/>
+          </a:p>
+        </p:txBody>
+      </p:sp>
+      <p:sp>
+        <p:nvSpPr>
+          <p:cNvPr id="5" name="Oval 4"/>
+          <p:cNvSpPr/>
+          <p:nvPr/>
+        </p:nvSpPr>
+        <p:spPr>
+          <a:xfrm>
+            <a:off x="8211311" y="384048"/>
+            <a:ext cx="109728" cy="109728"/>
+          </a:xfrm>
+          <a:prstGeom prst="ellipse">
+            <a:avLst/>
+          </a:prstGeom>
+          <a:solidFill>
+            <a:srgbClr val="D6DEE9"/>
+          </a:solidFill>
+          <a:ln>
+            <a:noFill/>
+          </a:ln>
+          <a:effectLst/>
+        </p:spPr>
+        <p:style>
+          <a:lnRef idx="1">
+            <a:schemeClr val="accent1"/>
+          </a:lnRef>
+          <a:fillRef idx="3">
+            <a:schemeClr val="accent1"/>
+          </a:fillRef>
+          <a:effectRef idx="2">
+            <a:schemeClr val="accent1"/>
+          </a:effectRef>
+          <a:fontRef idx="minor">
+            <a:schemeClr val="lt1"/>
+          </a:fontRef>
+        </p:style>
+        <p:txBody>
+          <a:bodyPr rtlCol="0" anchor="ctr"/>
+          <a:lstStyle/>
+          <a:p>
+            <a:pPr algn="ctr"/>
+          </a:p>
+        </p:txBody>
+      </p:sp>
+      <p:sp>
+        <p:nvSpPr>
+          <p:cNvPr id="6" name="Oval 5"/>
+          <p:cNvSpPr/>
+          <p:nvPr/>
+        </p:nvSpPr>
+        <p:spPr>
+          <a:xfrm>
+            <a:off x="8394192" y="384048"/>
+            <a:ext cx="109728" cy="109728"/>
+          </a:xfrm>
+          <a:prstGeom prst="ellipse">
+            <a:avLst/>
+          </a:prstGeom>
+          <a:solidFill>
+            <a:srgbClr val="D6DEE9"/>
+          </a:solidFill>
+          <a:ln>
+            <a:noFill/>
+          </a:ln>
+          <a:effectLst/>
+        </p:spPr>
+        <p:style>
+          <a:lnRef idx="1">
+            <a:schemeClr val="accent1"/>
+          </a:lnRef>
+          <a:fillRef idx="3">
+            <a:schemeClr val="accent1"/>
+          </a:fillRef>
+          <a:effectRef idx="2">
+            <a:schemeClr val="accent1"/>
+          </a:effectRef>
+          <a:fontRef idx="minor">
+            <a:schemeClr val="lt1"/>
+          </a:fontRef>
+        </p:style>
+        <p:txBody>
+          <a:bodyPr rtlCol="0" anchor="ctr"/>
+          <a:lstStyle/>
+          <a:p>
+            <a:pPr algn="ctr"/>
+          </a:p>
+        </p:txBody>
+      </p:sp>
+      <p:sp>
+        <p:nvSpPr>
+          <p:cNvPr id="7" name="Oval 6"/>
+          <p:cNvSpPr/>
+          <p:nvPr/>
+        </p:nvSpPr>
+        <p:spPr>
+          <a:xfrm>
+            <a:off x="8577072" y="384048"/>
+            <a:ext cx="109728" cy="109728"/>
+          </a:xfrm>
+          <a:prstGeom prst="ellipse">
+            <a:avLst/>
+          </a:prstGeom>
+          <a:solidFill>
+            <a:srgbClr val="1F3864"/>
+          </a:solidFill>
+          <a:ln>
+            <a:noFill/>
+          </a:ln>
+          <a:effectLst/>
+        </p:spPr>
+        <p:style>
+          <a:lnRef idx="1">
+            <a:schemeClr val="accent1"/>
+          </a:lnRef>
+          <a:fillRef idx="3">
+            <a:schemeClr val="accent1"/>
+          </a:fillRef>
+          <a:effectRef idx="2">
+            <a:schemeClr val="accent1"/>
+          </a:effectRef>
+          <a:fontRef idx="minor">
+            <a:schemeClr val="lt1"/>
+          </a:fontRef>
+        </p:style>
+        <p:txBody>
+          <a:bodyPr rtlCol="0" anchor="ctr"/>
+          <a:lstStyle/>
+          <a:p>
+            <a:pPr algn="ctr"/>
+          </a:p>
+        </p:txBody>
+      </p:sp>
+      <p:sp>
+        <p:nvSpPr>
+          <p:cNvPr id="8" name="TextBox 7"/>
+          <p:cNvSpPr txBox="1"/>
+          <p:nvPr/>
+        </p:nvSpPr>
+        <p:spPr>
+          <a:xfrm>
+            <a:off x="8138160" y="6446520"/>
+            <a:ext cx="548640" cy="274320"/>
+          </a:xfrm>
+          <a:prstGeom prst="rect">
+            <a:avLst/>
+          </a:prstGeom>
+          <a:noFill/>
+        </p:spPr>
+        <p:txBody>
+          <a:bodyPr wrap="square" lIns="0" rIns="0" tIns="0" bIns="0">
+            <a:spAutoFit/>
+          </a:bodyPr>
+          <a:lstStyle/>
+          <a:p>
+            <a:pPr algn="r">
+              <a:lnSpc>
+                <a:spcPct val="100000"/>
+              </a:lnSpc>
+              <a:spcBef>
+                <a:spcPts val="0"/>
+              </a:spcBef>
+              <a:spcAft>
+                <a:spcPts val="300"/>
+              </a:spcAft>
+            </a:pPr>
+            <a:r>
+              <a:rPr sz="950" b="0" i="0">
+                <a:solidFill>
+                  <a:srgbClr val="808080"/>
+                </a:solidFill>
+                <a:latin typeface="Calibri"/>
+              </a:rPr>
+              <a:t>5</a:t>
+            </a:r>
+          </a:p>
+        </p:txBody>
+      </p:sp>
+      <p:sp>
+        <p:nvSpPr>
+          <p:cNvPr id="9" name="Rounded Rectangle 8"/>
+          <p:cNvSpPr/>
+          <p:nvPr/>
+        </p:nvSpPr>
+        <p:spPr>
+          <a:xfrm>
+            <a:off x="457200" y="1188720"/>
+            <a:ext cx="8229600" cy="566928"/>
+          </a:xfrm>
+          <a:prstGeom prst="roundRect">
+            <a:avLst>
+              <a:gd name="adj" fmla="val 4000"/>
+            </a:avLst>
+          </a:prstGeom>
+          <a:solidFill>
+            <a:srgbClr val="1F3864"/>
+          </a:solidFill>
+          <a:ln>
+            <a:noFill/>
+          </a:ln>
+          <a:effectLst/>
+        </p:spPr>
+        <p:style>
+          <a:lnRef idx="1">
+            <a:schemeClr val="accent1"/>
+          </a:lnRef>
+          <a:fillRef idx="3">
+            <a:schemeClr val="accent1"/>
+          </a:fillRef>
+          <a:effectRef idx="2">
+            <a:schemeClr val="accent1"/>
+          </a:effectRef>
+          <a:fontRef idx="minor">
+            <a:schemeClr val="lt1"/>
+          </a:fontRef>
+        </p:style>
+        <p:txBody>
+          <a:bodyPr rtlCol="0" anchor="ctr" wrap="square" lIns="155448" rIns="155448" tIns="118872" bIns="118872"/>
+          <a:lstStyle/>
+          <a:p>
+            <a:pPr algn="ctr">
+              <a:lnSpc>
+                <a:spcPct val="100000"/>
+              </a:lnSpc>
+              <a:spcBef>
+                <a:spcPts val="0"/>
+              </a:spcBef>
+              <a:spcAft>
+                <a:spcPts val="100"/>
+              </a:spcAft>
+            </a:pPr>
+            <a:r>
+              <a:rPr sz="1050" b="1" i="0">
+                <a:solidFill>
+                  <a:srgbClr val="FFFFFF"/>
+                </a:solidFill>
+                <a:latin typeface="Calibri"/>
+              </a:rPr>
+              <a:t>SINAV:   ① Yetki ve kayıt bizim elimizde kalacak      ②  MCP'yi güncel spesifikasyonla konuşacağız</a:t>
+            </a:r>
+          </a:p>
+          <a:p>
+            <a:pPr algn="ctr">
+              <a:lnSpc>
+                <a:spcPct val="100000"/>
+              </a:lnSpc>
+              <a:spcBef>
+                <a:spcPts val="0"/>
+              </a:spcBef>
+              <a:spcAft>
+                <a:spcPts val="300"/>
+              </a:spcAft>
+            </a:pPr>
+            <a:r>
+              <a:rPr sz="950" b="0" i="1">
+                <a:solidFill>
+                  <a:srgbClr val="9DC3E6"/>
+                </a:solidFill>
+                <a:latin typeface="Calibri"/>
+              </a:rPr>
+              <a:t>Spring AI'ın iki hattını bu iki sözle sınadık — «yeni olan iyidir» diye değil.</a:t>
+            </a:r>
+          </a:p>
+        </p:txBody>
+      </p:sp>
+      <p:sp>
+        <p:nvSpPr>
+          <p:cNvPr id="10" name="Rounded Rectangle 9"/>
+          <p:cNvSpPr/>
+          <p:nvPr/>
+        </p:nvSpPr>
+        <p:spPr>
+          <a:xfrm>
+            <a:off x="457200" y="1920240"/>
+            <a:ext cx="3977639" cy="2423160"/>
           </a:xfrm>
           <a:prstGeom prst="roundRect">
             <a:avLst>
@@ -5939,7 +8796,7 @@
           </a:fontRef>
         </p:style>
         <p:txBody>
-          <a:bodyPr rtlCol="0" anchor="ctr" wrap="square" lIns="155448" rIns="155448" tIns="118872" bIns="118872"/>
+          <a:bodyPr rtlCol="0" anchor="t" wrap="square" lIns="155448" rIns="155448" tIns="118872" bIns="118872"/>
           <a:lstStyle/>
           <a:p>
             <a:pPr algn="l">
@@ -5950,39 +8807,39 @@
                 <a:spcPts val="0"/>
               </a:spcBef>
               <a:spcAft>
-                <a:spcPts val="100"/>
-              </a:spcAft>
-            </a:pPr>
-            <a:r>
-              <a:rPr sz="1200" b="1" i="0">
+                <a:spcPts val="700"/>
+              </a:spcAft>
+            </a:pPr>
+            <a:r>
+              <a:rPr sz="1300" b="1" i="0">
                 <a:solidFill>
                   <a:srgbClr val="A03A34"/>
                 </a:solidFill>
                 <a:latin typeface="Calibri"/>
               </a:rPr>
-              <a:t>KURMAZSAK</a:t>
+              <a:t>Spring AI 1.x  —  eledik</a:t>
             </a:r>
           </a:p>
           <a:p>
             <a:pPr algn="l">
               <a:lnSpc>
-                <a:spcPct val="100000"/>
-              </a:lnSpc>
-              <a:spcBef>
-                <a:spcPts val="0"/>
-              </a:spcBef>
-              <a:spcAft>
-                <a:spcPts val="800"/>
-              </a:spcAft>
-            </a:pPr>
-            <a:r>
-              <a:rPr sz="950" b="0" i="0">
-                <a:solidFill>
-                  <a:srgbClr val="A03A34"/>
-                </a:solidFill>
-                <a:latin typeface="Calibri"/>
-              </a:rPr>
-              <a:t>bugünkü tablo devam eder</a:t>
+                <a:spcPct val="103000"/>
+              </a:lnSpc>
+              <a:spcBef>
+                <a:spcPts val="0"/>
+              </a:spcBef>
+              <a:spcAft>
+                <a:spcPts val="600"/>
+              </a:spcAft>
+            </a:pPr>
+            <a:r>
+              <a:rPr sz="1050" b="0" i="0">
+                <a:solidFill>
+                  <a:srgbClr val="6B2E2A"/>
+                </a:solidFill>
+                <a:latin typeface="Calibri"/>
+              </a:rPr>
+              <a:t>✗   ① Servis çağırma döngüsü kütüphanenin içinde KAPALI. Araya kendi yetki ve kayıt kontrolümüzü koyamıyoruz. Birinci sözü tutamıyoruz.</a:t>
             </a:r>
           </a:p>
           <a:p>
@@ -6004,7 +8861,7 @@
                 </a:solidFill>
                 <a:latin typeface="Calibri"/>
               </a:rPr>
-              <a:t>✗   Asistan kurumun verisine erişemez — genel bilgi verir, «bu müşterinin durumu ne» sorusuna cevap veremez.</a:t>
+              <a:t>✗   ② MCP topluluk tarafında kalmış, eski spesifikasyon. İkinci sözü tutamıyoruz.</a:t>
             </a:r>
           </a:p>
           <a:p>
@@ -6026,7 +8883,7 @@
                 </a:solidFill>
                 <a:latin typeface="Calibri"/>
               </a:rPr>
-              <a:t>✗   Her yeni yetenek chat uygulamasının backlog'una girer; tek ekip darboğaz olur.</a:t>
+              <a:t>✗   Üstelik temeli Spring Boot 3.5 — Boot 4 platformumuzda hiç yüklenmiyor.</a:t>
             </a:r>
           </a:p>
           <a:p>
@@ -6048,65 +8905,21 @@
                 </a:solidFill>
                 <a:latin typeface="Calibri"/>
               </a:rPr>
-              <a:t>✗   Her uygulama kendi entegrasyonunu baştan yazar: N uygulama × M asistan = N×M ayrı iş.</a:t>
-            </a:r>
-          </a:p>
-          <a:p>
-            <a:pPr algn="l">
-              <a:lnSpc>
-                <a:spcPct val="103000"/>
-              </a:lnSpc>
-              <a:spcBef>
-                <a:spcPts val="0"/>
-              </a:spcBef>
-              <a:spcAft>
-                <a:spcPts val="600"/>
-              </a:spcAft>
-            </a:pPr>
-            <a:r>
-              <a:rPr sz="1050" b="0" i="0">
-                <a:solidFill>
-                  <a:srgbClr val="6B2E2A"/>
-                </a:solidFill>
-                <a:latin typeface="Calibri"/>
-              </a:rPr>
-              <a:t>✗   İş kuralı ve yetki mantığı ikinci kez, entegrasyon katmanında yazılır — iki yerde bakım.</a:t>
-            </a:r>
-          </a:p>
-          <a:p>
-            <a:pPr algn="l">
-              <a:lnSpc>
-                <a:spcPct val="103000"/>
-              </a:lnSpc>
-              <a:spcBef>
-                <a:spcPts val="0"/>
-              </a:spcBef>
-              <a:spcAft>
-                <a:spcPts val="600"/>
-              </a:spcAft>
-            </a:pPr>
-            <a:r>
-              <a:rPr sz="1050" b="0" i="0">
-                <a:solidFill>
-                  <a:srgbClr val="6B2E2A"/>
-                </a:solidFill>
-                <a:latin typeface="Calibri"/>
-              </a:rPr>
-              <a:t>✗   İhtiyaç yok olmaz: kullanıcı kurum dışı araçlara yönelir. Veri sınırını biz belirlemeyiz.</a:t>
-            </a:r>
-          </a:p>
-        </p:txBody>
-      </p:sp>
-      <p:sp>
-        <p:nvSpPr>
-          <p:cNvPr id="6" name="Rounded Rectangle 5"/>
+              <a:t>✗   Ve Haziran 2026'da destek dışı kaldı: yeni güvenlik yaması gelmiyor.</a:t>
+            </a:r>
+          </a:p>
+        </p:txBody>
+      </p:sp>
+      <p:sp>
+        <p:nvSpPr>
+          <p:cNvPr id="11" name="Rounded Rectangle 10"/>
           <p:cNvSpPr/>
           <p:nvPr/>
         </p:nvSpPr>
         <p:spPr>
           <a:xfrm>
-            <a:off x="4709159" y="1234440"/>
-            <a:ext cx="3977639" cy="3200400"/>
+            <a:off x="4709159" y="1920240"/>
+            <a:ext cx="3977639" cy="2423160"/>
           </a:xfrm>
           <a:prstGeom prst="roundRect">
             <a:avLst>
@@ -6138,7 +8951,7 @@
           </a:fontRef>
         </p:style>
         <p:txBody>
-          <a:bodyPr rtlCol="0" anchor="ctr" wrap="square" lIns="155448" rIns="155448" tIns="118872" bIns="118872"/>
+          <a:bodyPr rtlCol="0" anchor="t" wrap="square" lIns="155448" rIns="155448" tIns="118872" bIns="118872"/>
           <a:lstStyle/>
           <a:p>
             <a:pPr algn="l">
@@ -6149,39 +8962,39 @@
                 <a:spcPts val="0"/>
               </a:spcBef>
               <a:spcAft>
-                <a:spcPts val="100"/>
-              </a:spcAft>
-            </a:pPr>
-            <a:r>
-              <a:rPr sz="1200" b="1" i="0">
+                <a:spcPts val="700"/>
+              </a:spcAft>
+            </a:pPr>
+            <a:r>
+              <a:rPr sz="1300" b="1" i="0">
                 <a:solidFill>
                   <a:srgbClr val="2E6B2E"/>
                 </a:solidFill>
                 <a:latin typeface="Calibri"/>
               </a:rPr>
-              <a:t>KURARSAK</a:t>
+              <a:t>Spring AI 2.x  —  seçtik</a:t>
             </a:r>
           </a:p>
           <a:p>
             <a:pPr algn="l">
               <a:lnSpc>
-                <a:spcPct val="100000"/>
-              </a:lnSpc>
-              <a:spcBef>
-                <a:spcPts val="0"/>
-              </a:spcBef>
-              <a:spcAft>
-                <a:spcPts val="800"/>
-              </a:spcAft>
-            </a:pPr>
-            <a:r>
-              <a:rPr sz="950" b="0" i="0">
-                <a:solidFill>
-                  <a:srgbClr val="2E6B2E"/>
-                </a:solidFill>
-                <a:latin typeface="Calibri"/>
-              </a:rPr>
-              <a:t>yetenek, proje olmaktan çıkar</a:t>
+                <a:spcPct val="103000"/>
+              </a:lnSpc>
+              <a:spcBef>
+                <a:spcPts val="0"/>
+              </a:spcBef>
+              <a:spcAft>
+                <a:spcPts val="600"/>
+              </a:spcAft>
+            </a:pPr>
+            <a:r>
+              <a:rPr sz="1050" b="0" i="0">
+                <a:solidFill>
+                  <a:srgbClr val="284F28"/>
+                </a:solidFill>
+                <a:latin typeface="Calibri"/>
+              </a:rPr>
+              <a:t>✓   ① Çağırma döngüsü dışarı çıkarıldı. Yetki, kayıt ve sınır kontrolü araya girebiliyor. Birinci söz tutuluyor.</a:t>
             </a:r>
           </a:p>
           <a:p>
@@ -6203,7 +9016,7 @@
                 </a:solidFill>
                 <a:latin typeface="Calibri"/>
               </a:rPr>
-              <a:t>✓   Uygulama sahip olduğu yeteneği bildirir; asistan kendiliğinden keşfeder — yeni ekran yazılmaz.</a:t>
+              <a:t>✓   ② MCP kütüphanenin çekirdeğinde: güncel spesifikasyon, resmî Java SDK. İkinci söz tutuluyor.</a:t>
             </a:r>
           </a:p>
           <a:p>
@@ -6225,7 +9038,7 @@
                 </a:solidFill>
                 <a:latin typeface="Calibri"/>
               </a:rPr>
-              <a:t>✓   Yetenek ekleme, sprint'lik bir proje değil, mevcut servise birkaç satırlık bildirim olur.</a:t>
+              <a:t>✓   Temeli Spring Boot 4 · Java 25 — Zeus 2.0.0 platformumuzla birebir aynı.</a:t>
             </a:r>
           </a:p>
           <a:p>
@@ -6247,65 +9060,21 @@
                 </a:solidFill>
                 <a:latin typeface="Calibri"/>
               </a:rPr>
-              <a:t>✓   Tek protokol: N uygulama + M asistan. Yeni asistan geldiğinde uygulamalar değişmez.</a:t>
-            </a:r>
-          </a:p>
-          <a:p>
-            <a:pPr algn="l">
-              <a:lnSpc>
-                <a:spcPct val="103000"/>
-              </a:lnSpc>
-              <a:spcBef>
-                <a:spcPts val="0"/>
-              </a:spcBef>
-              <a:spcAft>
-                <a:spcPts val="600"/>
-              </a:spcAft>
-            </a:pPr>
-            <a:r>
-              <a:rPr sz="1050" b="0" i="0">
-                <a:solidFill>
-                  <a:srgbClr val="284F28"/>
-                </a:solidFill>
-                <a:latin typeface="Calibri"/>
-              </a:rPr>
-              <a:t>✓   İş kuralı ve yetki uygulamanın içinde kalır — asistan yalnızca izin verileni çağırabilir.</a:t>
-            </a:r>
-          </a:p>
-          <a:p>
-            <a:pPr algn="l">
-              <a:lnSpc>
-                <a:spcPct val="103000"/>
-              </a:lnSpc>
-              <a:spcBef>
-                <a:spcPts val="0"/>
-              </a:spcBef>
-              <a:spcAft>
-                <a:spcPts val="600"/>
-              </a:spcAft>
-            </a:pPr>
-            <a:r>
-              <a:rPr sz="1050" b="0" i="0">
-                <a:solidFill>
-                  <a:srgbClr val="284F28"/>
-                </a:solidFill>
-                <a:latin typeface="Calibri"/>
-              </a:rPr>
-              <a:t>✓   Erişim tek noktada toplanır: kim, neyi, ne zaman sordu — denetime hazır kayıt.</a:t>
-            </a:r>
-          </a:p>
-        </p:txBody>
-      </p:sp>
-      <p:sp>
-        <p:nvSpPr>
-          <p:cNvPr id="7" name="Rounded Rectangle 6"/>
+              <a:t>✓   Aktif destek hattı; kurumsal kullanımda tek makul seçenek.</a:t>
+            </a:r>
+          </a:p>
+        </p:txBody>
+      </p:sp>
+      <p:sp>
+        <p:nvSpPr>
+          <p:cNvPr id="12" name="Rounded Rectangle 11"/>
           <p:cNvSpPr/>
           <p:nvPr/>
         </p:nvSpPr>
         <p:spPr>
           <a:xfrm>
-            <a:off x="457200" y="4800600"/>
-            <a:ext cx="8229600" cy="777240"/>
+            <a:off x="457200" y="4663440"/>
+            <a:ext cx="8229600" cy="822960"/>
           </a:xfrm>
           <a:prstGeom prst="roundRect">
             <a:avLst>
@@ -6356,7 +9125,7 @@
                 </a:solidFill>
                 <a:latin typeface="Calibri"/>
               </a:rPr>
-              <a:t>Altyapıyı Spring AI 2.0 hazır veriyor: MCP artık kütüphanenin çekirdeğinde — protokolü biz yazmıyoruz.</a:t>
+              <a:t>1.x'i «eski olduğu için» elemedik: bu sunumda verdiğimiz iki sözü teknik olarak tutamadığı için eledik.</a:t>
             </a:r>
           </a:p>
           <a:p>
@@ -6368,17 +9137,17 @@
                 <a:spcPts val="0"/>
               </a:spcBef>
               <a:spcAft>
-                <a:spcPts val="200"/>
-              </a:spcAft>
-            </a:pPr>
-            <a:r>
-              <a:rPr sz="1050" b="0" i="0">
-                <a:solidFill>
-                  <a:srgbClr val="595959"/>
-                </a:solidFill>
-                <a:latin typeface="Calibri"/>
-              </a:rPr>
-              <a:t>Bizim işimiz, hâlihazırda çalışan servislerimizi «bu bir yetenektir» diye işaretlemek.</a:t>
+                <a:spcPts val="0"/>
+              </a:spcAft>
+            </a:pPr>
+            <a:r>
+              <a:rPr sz="1050" b="0" i="1">
+                <a:solidFill>
+                  <a:srgbClr val="2E75B6"/>
+                </a:solidFill>
+                <a:latin typeface="Calibri"/>
+              </a:rPr>
+              <a:t>Karar aslında geçen çeyrekte verilmişti — Boot 4'e geçmeseydik bu kapı bugün kapalıydı.</a:t>
             </a:r>
           </a:p>
         </p:txBody>
@@ -6391,7 +9160,7 @@
 </p:sld>
 </file>
 
-<file path=ppt/slides/slide4.xml><?xml version="1.0" encoding="utf-8"?>
+<file path=ppt/slides/slide6.xml><?xml version="1.0" encoding="utf-8"?>
 <p:sld xmlns:a="http://schemas.openxmlformats.org/drawingml/2006/main" xmlns:p="http://schemas.openxmlformats.org/presentationml/2006/main" xmlns:r="http://schemas.openxmlformats.org/officeDocument/2006/relationships">
   <p:cSld>
     <p:spTree>
@@ -6454,7 +9223,7 @@
         <p:spPr>
           <a:xfrm>
             <a:off x="457200" y="274320"/>
-            <a:ext cx="8229600" cy="822960"/>
+            <a:ext cx="7132320" cy="822960"/>
           </a:xfrm>
           <a:prstGeom prst="rect">
             <a:avLst/>
@@ -6485,7 +9254,7 @@
                 </a:solidFill>
                 <a:latin typeface="Calibri"/>
               </a:rPr>
-              <a:t>TEKNİK YÖN</a:t>
+              <a:t>KAPANIŞ</a:t>
             </a:r>
           </a:p>
           <a:p>
@@ -6501,13 +9270,13 @@
               </a:spcAft>
             </a:pPr>
             <a:r>
-              <a:rPr sz="2300" b="1" i="0">
+              <a:rPr sz="2200" b="1" i="0">
                 <a:solidFill>
                   <a:srgbClr val="1F3864"/>
                 </a:solidFill>
                 <a:latin typeface="Calibri"/>
               </a:rPr>
-              <a:t>Uygulamalar Nasıl Geliştirecek — ve Neden Java</a:t>
+              <a:t>Hikâyeyi Baştan Alalım</a:t>
             </a:r>
           </a:p>
         </p:txBody>
@@ -6552,7 +9321,7 @@
                 </a:solidFill>
                 <a:latin typeface="Calibri"/>
               </a:rPr>
-              <a:t>4</a:t>
+              <a:t>6</a:t>
             </a:r>
           </a:p>
         </p:txBody>
@@ -6565,8 +9334,8 @@
         </p:nvSpPr>
         <p:spPr>
           <a:xfrm>
-            <a:off x="457200" y="1234440"/>
-            <a:ext cx="3474720" cy="3611880"/>
+            <a:off x="457200" y="1207008"/>
+            <a:ext cx="8229600" cy="658368"/>
           </a:xfrm>
           <a:prstGeom prst="roundRect">
             <a:avLst>
@@ -6601,199 +9370,23 @@
           <a:p>
             <a:pPr algn="l">
               <a:lnSpc>
-                <a:spcPct val="100000"/>
-              </a:lnSpc>
-              <a:spcBef>
-                <a:spcPts val="0"/>
-              </a:spcBef>
-              <a:spcAft>
-                <a:spcPts val="200"/>
-              </a:spcAft>
-            </a:pPr>
-            <a:r>
-              <a:rPr sz="1000" b="1" i="0">
-                <a:solidFill>
-                  <a:srgbClr val="2E75B6"/>
-                </a:solidFill>
-                <a:latin typeface="Calibri"/>
-              </a:rPr>
-              <a:t>UYGULAMA EKİBİNİN YAPACAĞI</a:t>
-            </a:r>
-          </a:p>
-          <a:p>
-            <a:pPr algn="l">
-              <a:lnSpc>
-                <a:spcPct val="100000"/>
-              </a:lnSpc>
-              <a:spcBef>
-                <a:spcPts val="0"/>
-              </a:spcBef>
-              <a:spcAft>
-                <a:spcPts val="900"/>
-              </a:spcAft>
-            </a:pPr>
-            <a:r>
-              <a:rPr sz="950" b="0" i="0">
-                <a:solidFill>
-                  <a:srgbClr val="595959"/>
-                </a:solidFill>
-                <a:latin typeface="Calibri"/>
-              </a:rPr>
-              <a:t>zeus-ai platform katmanı üzerinden</a:t>
-            </a:r>
-          </a:p>
-          <a:p>
-            <a:pPr algn="l">
-              <a:lnSpc>
-                <a:spcPct val="100000"/>
-              </a:lnSpc>
-              <a:spcBef>
-                <a:spcPts val="0"/>
-              </a:spcBef>
-              <a:spcAft>
-                <a:spcPts val="100"/>
-              </a:spcAft>
-            </a:pPr>
-            <a:r>
-              <a:rPr sz="1200" b="1" i="0">
+                <a:spcPct val="105000"/>
+              </a:lnSpc>
+              <a:spcBef>
+                <a:spcPts val="0"/>
+              </a:spcBef>
+              <a:spcAft>
+                <a:spcPts val="300"/>
+              </a:spcAft>
+            </a:pPr>
+            <a:r>
+              <a:rPr sz="1100" b="0" i="0">
                 <a:solidFill>
                   <a:srgbClr val="1F3864"/>
                 </a:solidFill>
                 <a:latin typeface="Calibri"/>
               </a:rPr>
-              <a:t>1.  Bağımlılığı ekler</a:t>
-            </a:r>
-          </a:p>
-          <a:p>
-            <a:pPr algn="l" marL="201168" indent="0">
-              <a:lnSpc>
-                <a:spcPct val="103000"/>
-              </a:lnSpc>
-              <a:spcBef>
-                <a:spcPts val="0"/>
-              </a:spcBef>
-              <a:spcAft>
-                <a:spcPts val="800"/>
-              </a:spcAft>
-            </a:pPr>
-            <a:r>
-              <a:rPr sz="1000" b="0" i="0">
-                <a:solidFill>
-                  <a:srgbClr val="595959"/>
-                </a:solidFill>
-                <a:latin typeface="Calibri"/>
-              </a:rPr>
-              <a:t>zeus-ai — sürüm yazılmaz, platform yönetir</a:t>
-            </a:r>
-          </a:p>
-          <a:p>
-            <a:pPr algn="l">
-              <a:lnSpc>
-                <a:spcPct val="100000"/>
-              </a:lnSpc>
-              <a:spcBef>
-                <a:spcPts val="0"/>
-              </a:spcBef>
-              <a:spcAft>
-                <a:spcPts val="100"/>
-              </a:spcAft>
-            </a:pPr>
-            <a:r>
-              <a:rPr sz="1200" b="1" i="0">
-                <a:solidFill>
-                  <a:srgbClr val="1F3864"/>
-                </a:solidFill>
-                <a:latin typeface="Calibri"/>
-              </a:rPr>
-              <a:t>2.  Servis metodunu işaretler</a:t>
-            </a:r>
-          </a:p>
-          <a:p>
-            <a:pPr algn="l" marL="201168" indent="0">
-              <a:lnSpc>
-                <a:spcPct val="103000"/>
-              </a:lnSpc>
-              <a:spcBef>
-                <a:spcPts val="0"/>
-              </a:spcBef>
-              <a:spcAft>
-                <a:spcPts val="800"/>
-              </a:spcAft>
-            </a:pPr>
-            <a:r>
-              <a:rPr sz="900" b="0" i="0">
-                <a:solidFill>
-                  <a:srgbClr val="2E75B6"/>
-                </a:solidFill>
-                <a:latin typeface="Consolas"/>
-              </a:rPr>
-              <a:t>@McpTool("Başvuru durumunu sorgular")</a:t>
-            </a:r>
-          </a:p>
-          <a:p>
-            <a:pPr algn="l">
-              <a:lnSpc>
-                <a:spcPct val="100000"/>
-              </a:lnSpc>
-              <a:spcBef>
-                <a:spcPts val="0"/>
-              </a:spcBef>
-              <a:spcAft>
-                <a:spcPts val="100"/>
-              </a:spcAft>
-            </a:pPr>
-            <a:r>
-              <a:rPr sz="1200" b="1" i="0">
-                <a:solidFill>
-                  <a:srgbClr val="1F3864"/>
-                </a:solidFill>
-                <a:latin typeface="Calibri"/>
-              </a:rPr>
-              <a:t>3.  Deploy eder</a:t>
-            </a:r>
-          </a:p>
-          <a:p>
-            <a:pPr algn="l" marL="201168" indent="0">
-              <a:lnSpc>
-                <a:spcPct val="103000"/>
-              </a:lnSpc>
-              <a:spcBef>
-                <a:spcPts val="0"/>
-              </a:spcBef>
-              <a:spcAft>
-                <a:spcPts val="800"/>
-              </a:spcAft>
-            </a:pPr>
-            <a:r>
-              <a:rPr sz="1000" b="0" i="0">
-                <a:solidFill>
-                  <a:srgbClr val="595959"/>
-                </a:solidFill>
-                <a:latin typeface="Calibri"/>
-              </a:rPr>
-              <a:t>yeni sunucu, yeni dağıtım hattı, yeni ekran yok</a:t>
-            </a:r>
-          </a:p>
-          <a:p>
-            <a:pPr algn="l">
-              <a:lnSpc>
-                <a:spcPct val="105000"/>
-              </a:lnSpc>
-              <a:spcBef>
-                <a:spcPts val="0"/>
-              </a:spcBef>
-              <a:spcAft>
-                <a:spcPts val="0"/>
-              </a:spcAft>
-            </a:pPr>
-            <a:r>
-              <a:rPr sz="1000" b="0" i="1">
-                <a:solidFill>
-                  <a:srgbClr val="2E75B6"/>
-                </a:solidFill>
-                <a:latin typeface="Calibri"/>
-              </a:rPr>
-              <a:t>Protokol, taşıma, yetenek keşfi, oturum ve izleme zeus-ai içinde kalır. Uygulama ekibi MCP spesifikasyonunu okumak zorunda kalmaz.</a:t>
+              <a:t>①   Asistan bizim verimizi bilmiyordu; her soru ayrı bir projeye dönüşüyordu.</a:t>
             </a:r>
           </a:p>
         </p:txBody>
@@ -6806,251 +9399,8 @@
         </p:nvSpPr>
         <p:spPr>
           <a:xfrm>
-            <a:off x="4206240" y="1234440"/>
-            <a:ext cx="4480560" cy="3611880"/>
-          </a:xfrm>
-          <a:prstGeom prst="roundRect">
-            <a:avLst>
-              <a:gd name="adj" fmla="val 4000"/>
-            </a:avLst>
-          </a:prstGeom>
-          <a:solidFill>
-            <a:srgbClr val="FFFFFF"/>
-          </a:solidFill>
-          <a:ln w="9525">
-            <a:solidFill>
-              <a:srgbClr val="D9D9D9"/>
-            </a:solidFill>
-          </a:ln>
-          <a:effectLst/>
-        </p:spPr>
-        <p:style>
-          <a:lnRef idx="1">
-            <a:schemeClr val="accent1"/>
-          </a:lnRef>
-          <a:fillRef idx="3">
-            <a:schemeClr val="accent1"/>
-          </a:fillRef>
-          <a:effectRef idx="2">
-            <a:schemeClr val="accent1"/>
-          </a:effectRef>
-          <a:fontRef idx="minor">
-            <a:schemeClr val="lt1"/>
-          </a:fontRef>
-        </p:style>
-        <p:txBody>
-          <a:bodyPr rtlCol="0" anchor="ctr" wrap="square" lIns="155448" rIns="155448" tIns="118872" bIns="118872"/>
-          <a:lstStyle/>
-          <a:p>
-            <a:pPr algn="l">
-              <a:lnSpc>
-                <a:spcPct val="100000"/>
-              </a:lnSpc>
-              <a:spcBef>
-                <a:spcPts val="0"/>
-              </a:spcBef>
-              <a:spcAft>
-                <a:spcPts val="900"/>
-              </a:spcAft>
-            </a:pPr>
-            <a:r>
-              <a:rPr sz="1000" b="1" i="0">
-                <a:solidFill>
-                  <a:srgbClr val="2E75B6"/>
-                </a:solidFill>
-                <a:latin typeface="Calibri"/>
-              </a:rPr>
-              <a:t>NEDEN JAVA — protokol dil bağımsız olduğu hâlde</a:t>
-            </a:r>
-          </a:p>
-          <a:p>
-            <a:pPr algn="l">
-              <a:lnSpc>
-                <a:spcPct val="100000"/>
-              </a:lnSpc>
-              <a:spcBef>
-                <a:spcPts val="0"/>
-              </a:spcBef>
-              <a:spcAft>
-                <a:spcPts val="100"/>
-              </a:spcAft>
-            </a:pPr>
-            <a:r>
-              <a:rPr sz="1150" b="1" i="0">
-                <a:solidFill>
-                  <a:srgbClr val="1F3864"/>
-                </a:solidFill>
-                <a:latin typeface="Calibri"/>
-              </a:rPr>
-              <a:t>▪  Yetki, yeniden yazılmaz</a:t>
-            </a:r>
-          </a:p>
-          <a:p>
-            <a:pPr algn="l" marL="201168" indent="0">
-              <a:lnSpc>
-                <a:spcPct val="103000"/>
-              </a:lnSpc>
-              <a:spcBef>
-                <a:spcPts val="0"/>
-              </a:spcBef>
-              <a:spcAft>
-                <a:spcPts val="700"/>
-              </a:spcAft>
-            </a:pPr>
-            <a:r>
-              <a:rPr sz="1000" b="0" i="0">
-                <a:solidFill>
-                  <a:srgbClr val="595959"/>
-                </a:solidFill>
-                <a:latin typeface="Calibri"/>
-              </a:rPr>
-              <a:t>MCP server uygulamanın İÇİNDE çalışır; istek mevcut JWT token'ıyla, mevcut filtre zincirinden geçer. Kullanıcının bugün göremediğini asistan da göremez.</a:t>
-            </a:r>
-          </a:p>
-          <a:p>
-            <a:pPr algn="l">
-              <a:lnSpc>
-                <a:spcPct val="100000"/>
-              </a:lnSpc>
-              <a:spcBef>
-                <a:spcPts val="0"/>
-              </a:spcBef>
-              <a:spcAft>
-                <a:spcPts val="100"/>
-              </a:spcAft>
-            </a:pPr>
-            <a:r>
-              <a:rPr sz="1150" b="1" i="0">
-                <a:solidFill>
-                  <a:srgbClr val="1F3864"/>
-                </a:solidFill>
-                <a:latin typeface="Calibri"/>
-              </a:rPr>
-              <a:t>▪  İş kuralı tek yerde kalır</a:t>
-            </a:r>
-          </a:p>
-          <a:p>
-            <a:pPr algn="l" marL="201168" indent="0">
-              <a:lnSpc>
-                <a:spcPct val="103000"/>
-              </a:lnSpc>
-              <a:spcBef>
-                <a:spcPts val="0"/>
-              </a:spcBef>
-              <a:spcAft>
-                <a:spcPts val="700"/>
-              </a:spcAft>
-            </a:pPr>
-            <a:r>
-              <a:rPr sz="1000" b="0" i="0">
-                <a:solidFill>
-                  <a:srgbClr val="595959"/>
-                </a:solidFill>
-                <a:latin typeface="Calibri"/>
-              </a:rPr>
-              <a:t>Servis zaten Java'da. MCP server aynı sınıfı çağırır; mantık kopyalanmaz.</a:t>
-            </a:r>
-          </a:p>
-          <a:p>
-            <a:pPr algn="l">
-              <a:lnSpc>
-                <a:spcPct val="100000"/>
-              </a:lnSpc>
-              <a:spcBef>
-                <a:spcPts val="0"/>
-              </a:spcBef>
-              <a:spcAft>
-                <a:spcPts val="100"/>
-              </a:spcAft>
-            </a:pPr>
-            <a:r>
-              <a:rPr sz="1150" b="1" i="0">
-                <a:solidFill>
-                  <a:srgbClr val="1F3864"/>
-                </a:solidFill>
-                <a:latin typeface="Calibri"/>
-              </a:rPr>
-              <a:t>▪  Mevcut altyapı hazır</a:t>
-            </a:r>
-          </a:p>
-          <a:p>
-            <a:pPr algn="l" marL="201168" indent="0">
-              <a:lnSpc>
-                <a:spcPct val="103000"/>
-              </a:lnSpc>
-              <a:spcBef>
-                <a:spcPts val="0"/>
-              </a:spcBef>
-              <a:spcAft>
-                <a:spcPts val="700"/>
-              </a:spcAft>
-            </a:pPr>
-            <a:r>
-              <a:rPr sz="1000" b="0" i="0">
-                <a:solidFill>
-                  <a:srgbClr val="595959"/>
-                </a:solidFill>
-                <a:latin typeface="Calibri"/>
-              </a:rPr>
-              <a:t>WildFly, JNDI datasource, stored procedure'ler, loglama ve izleme aynen kullanılır — yeni çalışma ortamı kurulmaz.</a:t>
-            </a:r>
-          </a:p>
-          <a:p>
-            <a:pPr algn="l">
-              <a:lnSpc>
-                <a:spcPct val="100000"/>
-              </a:lnSpc>
-              <a:spcBef>
-                <a:spcPts val="0"/>
-              </a:spcBef>
-              <a:spcAft>
-                <a:spcPts val="100"/>
-              </a:spcAft>
-            </a:pPr>
-            <a:r>
-              <a:rPr sz="1150" b="1" i="0">
-                <a:solidFill>
-                  <a:srgbClr val="1F3864"/>
-                </a:solidFill>
-                <a:latin typeface="Calibri"/>
-              </a:rPr>
-              <a:t>▪  Platform tek noktadan yönetir</a:t>
-            </a:r>
-          </a:p>
-          <a:p>
-            <a:pPr algn="l" marL="201168" indent="0">
-              <a:lnSpc>
-                <a:spcPct val="103000"/>
-              </a:lnSpc>
-              <a:spcBef>
-                <a:spcPts val="0"/>
-              </a:spcBef>
-              <a:spcAft>
-                <a:spcPts val="700"/>
-              </a:spcAft>
-            </a:pPr>
-            <a:r>
-              <a:rPr sz="1000" b="0" i="0">
-                <a:solidFill>
-                  <a:srgbClr val="595959"/>
-                </a:solidFill>
-                <a:latin typeface="Calibri"/>
-              </a:rPr>
-              <a:t>Sürüm, CVE ve protokol değişimi zeus-ai'de ele alınır; N uygulama tek tek güncellenmez.</a:t>
-            </a:r>
-          </a:p>
-        </p:txBody>
-      </p:sp>
-      <p:sp>
-        <p:nvSpPr>
-          <p:cNvPr id="7" name="Rounded Rectangle 6"/>
-          <p:cNvSpPr/>
-          <p:nvPr/>
-        </p:nvSpPr>
-        <p:spPr>
-          <a:xfrm>
-            <a:off x="457200" y="5074920"/>
-            <a:ext cx="8229600" cy="777240"/>
+            <a:off x="457200" y="1938528"/>
+            <a:ext cx="8229600" cy="658368"/>
           </a:xfrm>
           <a:prstGeom prst="roundRect">
             <a:avLst>
@@ -7083,7 +9433,7 @@
           <a:bodyPr rtlCol="0" anchor="ctr" wrap="square" lIns="155448" rIns="155448" tIns="118872" bIns="118872"/>
           <a:lstStyle/>
           <a:p>
-            <a:pPr algn="ctr">
+            <a:pPr algn="l">
               <a:lnSpc>
                 <a:spcPct val="105000"/>
               </a:lnSpc>
@@ -7091,77 +9441,39 @@
                 <a:spcPts val="0"/>
               </a:spcBef>
               <a:spcAft>
-                <a:spcPts val="200"/>
-              </a:spcAft>
-            </a:pPr>
-            <a:r>
-              <a:rPr sz="1150" b="1" i="0">
+                <a:spcPts val="300"/>
+              </a:spcAft>
+            </a:pPr>
+            <a:r>
+              <a:rPr sz="1100" b="0" i="0">
                 <a:solidFill>
                   <a:srgbClr val="1F3864"/>
                 </a:solidFill>
                 <a:latin typeface="Calibri"/>
               </a:rPr>
-              <a:t>Ayrı dilde bir MCP servisi de yazılabilirdi — ama o zaman JWT doğrulamasını, yetki eşlemesini ve iş kuralını ikinci kez yazardık.</a:t>
-            </a:r>
-          </a:p>
-          <a:p>
-            <a:pPr algn="ctr">
-              <a:lnSpc>
-                <a:spcPct val="105000"/>
-              </a:lnSpc>
-              <a:spcBef>
-                <a:spcPts val="0"/>
-              </a:spcBef>
-              <a:spcAft>
-                <a:spcPts val="200"/>
-              </a:spcAft>
-            </a:pPr>
-            <a:r>
-              <a:rPr sz="1050" b="0" i="0">
-                <a:solidFill>
-                  <a:srgbClr val="595959"/>
-                </a:solidFill>
-                <a:latin typeface="Calibri"/>
-              </a:rPr>
-              <a:t>Seçimi belirleyen dil tercihi değil: yetkinin ve iş kuralının nerede durduğu.</a:t>
-            </a:r>
-          </a:p>
-        </p:txBody>
-      </p:sp>
-    </p:spTree>
-  </p:cSld>
-  <p:clrMapOvr>
-    <a:masterClrMapping/>
-  </p:clrMapOvr>
-</p:sld>
-</file>
-
-<file path=ppt/slides/slide5.xml><?xml version="1.0" encoding="utf-8"?>
-<p:sld xmlns:a="http://schemas.openxmlformats.org/drawingml/2006/main" xmlns:p="http://schemas.openxmlformats.org/presentationml/2006/main" xmlns:r="http://schemas.openxmlformats.org/officeDocument/2006/relationships">
-  <p:cSld>
-    <p:spTree>
-      <p:nvGrpSpPr>
-        <p:cNvPr id="1" name=""/>
-        <p:cNvGrpSpPr/>
-        <p:nvPr/>
-      </p:nvGrpSpPr>
-      <p:grpSpPr/>
-      <p:sp>
-        <p:nvSpPr>
-          <p:cNvPr id="2" name="Rectangle 1"/>
+              <a:t>②   Çözüm ortak bir dil: MCP. Asistan ucu takılı, uygulama ucu boşta.</a:t>
+            </a:r>
+          </a:p>
+        </p:txBody>
+      </p:sp>
+      <p:sp>
+        <p:nvSpPr>
+          <p:cNvPr id="7" name="Rounded Rectangle 6"/>
           <p:cNvSpPr/>
           <p:nvPr/>
         </p:nvSpPr>
         <p:spPr>
           <a:xfrm>
-            <a:off x="0" y="0"/>
-            <a:ext cx="9144000" cy="100584"/>
+            <a:off x="457200" y="2670048"/>
+            <a:ext cx="8229600" cy="658368"/>
           </a:xfrm>
-          <a:prstGeom prst="rect">
-            <a:avLst/>
+          <a:prstGeom prst="roundRect">
+            <a:avLst>
+              <a:gd name="adj" fmla="val 4000"/>
+            </a:avLst>
           </a:prstGeom>
           <a:solidFill>
-            <a:srgbClr val="1F3864"/>
+            <a:srgbClr val="EEF2F8"/>
           </a:solidFill>
           <a:ln>
             <a:noFill/>
@@ -7183,135 +9495,107 @@
           </a:fontRef>
         </p:style>
         <p:txBody>
-          <a:bodyPr rtlCol="0" anchor="ctr"/>
-          <a:lstStyle/>
-          <a:p>
-            <a:pPr algn="ctr"/>
-          </a:p>
-        </p:txBody>
-      </p:sp>
-      <p:sp>
-        <p:nvSpPr>
-          <p:cNvPr id="3" name="TextBox 2"/>
-          <p:cNvSpPr txBox="1"/>
+          <a:bodyPr rtlCol="0" anchor="ctr" wrap="square" lIns="155448" rIns="155448" tIns="118872" bIns="118872"/>
+          <a:lstStyle/>
+          <a:p>
+            <a:pPr algn="l">
+              <a:lnSpc>
+                <a:spcPct val="105000"/>
+              </a:lnSpc>
+              <a:spcBef>
+                <a:spcPts val="0"/>
+              </a:spcBef>
+              <a:spcAft>
+                <a:spcPts val="300"/>
+              </a:spcAft>
+            </a:pPr>
+            <a:r>
+              <a:rPr sz="1100" b="0" i="0">
+                <a:solidFill>
+                  <a:srgbClr val="1F3864"/>
+                </a:solidFill>
+                <a:latin typeface="Calibri"/>
+              </a:rPr>
+              <a:t>③   O ucu Java'da, uygulamanın içinde yazıyoruz — yetki orada duruyor. Ve her ekip ayrı ayrı değil, tek platform katmanında.</a:t>
+            </a:r>
+          </a:p>
+        </p:txBody>
+      </p:sp>
+      <p:sp>
+        <p:nvSpPr>
+          <p:cNvPr id="8" name="Rounded Rectangle 7"/>
+          <p:cNvSpPr/>
           <p:nvPr/>
         </p:nvSpPr>
         <p:spPr>
           <a:xfrm>
-            <a:off x="457200" y="274320"/>
-            <a:ext cx="8229600" cy="822960"/>
+            <a:off x="457200" y="3401568"/>
+            <a:ext cx="8229600" cy="658368"/>
           </a:xfrm>
-          <a:prstGeom prst="rect">
-            <a:avLst/>
+          <a:prstGeom prst="roundRect">
+            <a:avLst>
+              <a:gd name="adj" fmla="val 4000"/>
+            </a:avLst>
           </a:prstGeom>
-          <a:noFill/>
+          <a:solidFill>
+            <a:srgbClr val="EEF2F8"/>
+          </a:solidFill>
+          <a:ln>
+            <a:noFill/>
+          </a:ln>
+          <a:effectLst/>
         </p:spPr>
-        <p:txBody>
-          <a:bodyPr wrap="square" lIns="0" rIns="0" tIns="0" bIns="0">
-            <a:spAutoFit/>
-          </a:bodyPr>
+        <p:style>
+          <a:lnRef idx="1">
+            <a:schemeClr val="accent1"/>
+          </a:lnRef>
+          <a:fillRef idx="3">
+            <a:schemeClr val="accent1"/>
+          </a:fillRef>
+          <a:effectRef idx="2">
+            <a:schemeClr val="accent1"/>
+          </a:effectRef>
+          <a:fontRef idx="minor">
+            <a:schemeClr val="lt1"/>
+          </a:fontRef>
+        </p:style>
+        <p:txBody>
+          <a:bodyPr rtlCol="0" anchor="ctr" wrap="square" lIns="155448" rIns="155448" tIns="118872" bIns="118872"/>
           <a:lstStyle/>
           <a:p>
             <a:pPr algn="l">
               <a:lnSpc>
-                <a:spcPct val="100000"/>
-              </a:lnSpc>
-              <a:spcBef>
-                <a:spcPts val="0"/>
-              </a:spcBef>
-              <a:spcAft>
-                <a:spcPts val="200"/>
-              </a:spcAft>
-            </a:pPr>
-            <a:r>
-              <a:rPr sz="1000" b="1" i="0">
-                <a:solidFill>
-                  <a:srgbClr val="2E75B6"/>
-                </a:solidFill>
-                <a:latin typeface="Calibri"/>
-              </a:rPr>
-              <a:t>SÜRÜM KARARI</a:t>
-            </a:r>
-          </a:p>
-          <a:p>
-            <a:pPr algn="l">
-              <a:lnSpc>
-                <a:spcPct val="100000"/>
-              </a:lnSpc>
-              <a:spcBef>
-                <a:spcPts val="0"/>
-              </a:spcBef>
-              <a:spcAft>
-                <a:spcPts val="0"/>
-              </a:spcAft>
-            </a:pPr>
-            <a:r>
-              <a:rPr sz="2300" b="1" i="0">
+                <a:spcPct val="105000"/>
+              </a:lnSpc>
+              <a:spcBef>
+                <a:spcPts val="0"/>
+              </a:spcBef>
+              <a:spcAft>
+                <a:spcPts val="300"/>
+              </a:spcAft>
+            </a:pPr>
+            <a:r>
+              <a:rPr sz="1100" b="0" i="0">
                 <a:solidFill>
                   <a:srgbClr val="1F3864"/>
                 </a:solidFill>
                 <a:latin typeface="Calibri"/>
               </a:rPr>
-              <a:t>Neden Spring AI 1.x Değil, 2.x</a:t>
-            </a:r>
-          </a:p>
-        </p:txBody>
-      </p:sp>
-      <p:sp>
-        <p:nvSpPr>
-          <p:cNvPr id="4" name="TextBox 3"/>
-          <p:cNvSpPr txBox="1"/>
+              <a:t>④   Bu katmanı Spring AI 2.x üzerine kuruyoruz; 1.x verdiğimiz sözleri tutamıyordu.</a:t>
+            </a:r>
+          </a:p>
+        </p:txBody>
+      </p:sp>
+      <p:sp>
+        <p:nvSpPr>
+          <p:cNvPr id="9" name="Rounded Rectangle 8"/>
+          <p:cNvSpPr/>
           <p:nvPr/>
         </p:nvSpPr>
         <p:spPr>
           <a:xfrm>
-            <a:off x="8138160" y="6446520"/>
-            <a:ext cx="548640" cy="274320"/>
-          </a:xfrm>
-          <a:prstGeom prst="rect">
-            <a:avLst/>
-          </a:prstGeom>
-          <a:noFill/>
-        </p:spPr>
-        <p:txBody>
-          <a:bodyPr wrap="square" lIns="0" rIns="0" tIns="0" bIns="0">
-            <a:spAutoFit/>
-          </a:bodyPr>
-          <a:lstStyle/>
-          <a:p>
-            <a:pPr algn="r">
-              <a:lnSpc>
-                <a:spcPct val="100000"/>
-              </a:lnSpc>
-              <a:spcBef>
-                <a:spcPts val="0"/>
-              </a:spcBef>
-              <a:spcAft>
-                <a:spcPts val="300"/>
-              </a:spcAft>
-            </a:pPr>
-            <a:r>
-              <a:rPr sz="950" b="0" i="0">
-                <a:solidFill>
-                  <a:srgbClr val="808080"/>
-                </a:solidFill>
-                <a:latin typeface="Calibri"/>
-              </a:rPr>
-              <a:t>5</a:t>
-            </a:r>
-          </a:p>
-        </p:txBody>
-      </p:sp>
-      <p:sp>
-        <p:nvSpPr>
-          <p:cNvPr id="5" name="Rounded Rectangle 4"/>
-          <p:cNvSpPr/>
-          <p:nvPr/>
-        </p:nvSpPr>
-        <p:spPr>
-          <a:xfrm>
-            <a:off x="457200" y="1234440"/>
-            <a:ext cx="8229600" cy="411480"/>
+            <a:off x="457200" y="4206240"/>
+            <a:ext cx="8229600" cy="960120"/>
           </a:xfrm>
           <a:prstGeom prst="roundRect">
             <a:avLst>
@@ -7352,66 +9636,88 @@
                 <a:spcPts val="0"/>
               </a:spcBef>
               <a:spcAft>
+                <a:spcPts val="400"/>
+              </a:spcAft>
+            </a:pPr>
+            <a:r>
+              <a:rPr sz="950" b="1" i="0">
+                <a:solidFill>
+                  <a:srgbClr val="9DC3E6"/>
+                </a:solidFill>
+                <a:latin typeface="Calibri"/>
+              </a:rPr>
+              <a:t>İŞİN TANIMI</a:t>
+            </a:r>
+          </a:p>
+          <a:p>
+            <a:pPr algn="ctr">
+              <a:lnSpc>
+                <a:spcPct val="108000"/>
+              </a:lnSpc>
+              <a:spcBef>
+                <a:spcPts val="0"/>
+              </a:spcBef>
+              <a:spcAft>
                 <a:spcPts val="300"/>
               </a:spcAft>
             </a:pPr>
             <a:r>
-              <a:rPr sz="1050" b="1" i="0">
+              <a:rPr sz="1300" b="1" i="0">
                 <a:solidFill>
                   <a:srgbClr val="FFFFFF"/>
                 </a:solidFill>
                 <a:latin typeface="Calibri"/>
               </a:rPr>
-              <a:t>Spring AI 2.0.0 GA — 12 Haziran 2026   ·   temel: Spring Boot 4 · Framework 7 · Java 25 · Jackson 3</a:t>
-            </a:r>
-          </a:p>
-        </p:txBody>
-      </p:sp>
-      <p:sp>
-        <p:nvSpPr>
-          <p:cNvPr id="6" name="Rounded Rectangle 5"/>
-          <p:cNvSpPr/>
+              <a:t>zeus-ai: kurumsal uygulamalarımızın yeteneklerini — yetkiyi kendi elimizde tutarak — asistana açan platform katmanı.</a:t>
+            </a:r>
+          </a:p>
+        </p:txBody>
+      </p:sp>
+      <p:sp>
+        <p:nvSpPr>
+          <p:cNvPr id="10" name="TextBox 9"/>
+          <p:cNvSpPr txBox="1"/>
           <p:nvPr/>
         </p:nvSpPr>
         <p:spPr>
           <a:xfrm>
-            <a:off x="457200" y="1810512"/>
-            <a:ext cx="3977639" cy="2697480"/>
+            <a:off x="457200" y="5440680"/>
+            <a:ext cx="8229600" cy="822960"/>
           </a:xfrm>
-          <a:prstGeom prst="roundRect">
-            <a:avLst>
-              <a:gd name="adj" fmla="val 4000"/>
-            </a:avLst>
+          <a:prstGeom prst="rect">
+            <a:avLst/>
           </a:prstGeom>
-          <a:solidFill>
-            <a:srgbClr val="F9ECEA"/>
-          </a:solidFill>
-          <a:ln w="9525">
-            <a:solidFill>
-              <a:srgbClr val="E8C4BF"/>
-            </a:solidFill>
-          </a:ln>
-          <a:effectLst/>
+          <a:noFill/>
         </p:spPr>
-        <p:style>
-          <a:lnRef idx="1">
-            <a:schemeClr val="accent1"/>
-          </a:lnRef>
-          <a:fillRef idx="3">
-            <a:schemeClr val="accent1"/>
-          </a:fillRef>
-          <a:effectRef idx="2">
-            <a:schemeClr val="accent1"/>
-          </a:effectRef>
-          <a:fontRef idx="minor">
-            <a:schemeClr val="lt1"/>
-          </a:fontRef>
-        </p:style>
-        <p:txBody>
-          <a:bodyPr rtlCol="0" anchor="ctr" wrap="square" lIns="155448" rIns="155448" tIns="118872" bIns="118872"/>
-          <a:lstStyle/>
-          <a:p>
-            <a:pPr algn="l">
+        <p:txBody>
+          <a:bodyPr wrap="square" lIns="0" rIns="0" tIns="0" bIns="0">
+            <a:spAutoFit/>
+          </a:bodyPr>
+          <a:lstStyle/>
+          <a:p>
+            <a:pPr algn="ctr">
+              <a:lnSpc>
+                <a:spcPct val="106000"/>
+              </a:lnSpc>
+              <a:spcBef>
+                <a:spcPts val="0"/>
+              </a:spcBef>
+              <a:spcAft>
+                <a:spcPts val="400"/>
+              </a:spcAft>
+            </a:pPr>
+            <a:r>
+              <a:rPr sz="1200" b="1" i="0">
+                <a:solidFill>
+                  <a:srgbClr val="1F3864"/>
+                </a:solidFill>
+                <a:latin typeface="Calibri"/>
+              </a:rPr>
+              <a:t>Bu katman kurulduğunda yapay zekâ, bir uygulamanın özelliği olmaktan çıkıp platformun yeteneği olur.</a:t>
+            </a:r>
+          </a:p>
+          <a:p>
+            <a:pPr algn="ctr">
               <a:lnSpc>
                 <a:spcPct val="100000"/>
               </a:lnSpc>
@@ -7419,435 +9725,17 @@
                 <a:spcPts val="0"/>
               </a:spcBef>
               <a:spcAft>
-                <a:spcPts val="100"/>
-              </a:spcAft>
-            </a:pPr>
-            <a:r>
-              <a:rPr sz="1400" b="1" i="0">
-                <a:solidFill>
-                  <a:srgbClr val="A03A34"/>
-                </a:solidFill>
-                <a:latin typeface="Calibri"/>
-              </a:rPr>
-              <a:t>Spring AI 1.x</a:t>
-            </a:r>
-          </a:p>
-          <a:p>
-            <a:pPr algn="l">
-              <a:lnSpc>
-                <a:spcPct val="100000"/>
-              </a:lnSpc>
-              <a:spcBef>
-                <a:spcPts val="0"/>
-              </a:spcBef>
-              <a:spcAft>
-                <a:spcPts val="700"/>
-              </a:spcAft>
-            </a:pPr>
-            <a:r>
-              <a:rPr sz="950" b="0" i="0">
-                <a:solidFill>
-                  <a:srgbClr val="A03A34"/>
-                </a:solidFill>
-                <a:latin typeface="Calibri"/>
-              </a:rPr>
-              <a:t>değerlendirdik, eledik</a:t>
-            </a:r>
-          </a:p>
-          <a:p>
-            <a:pPr algn="l">
-              <a:lnSpc>
-                <a:spcPct val="103000"/>
-              </a:lnSpc>
-              <a:spcBef>
-                <a:spcPts val="0"/>
-              </a:spcBef>
-              <a:spcAft>
-                <a:spcPts val="600"/>
-              </a:spcAft>
-            </a:pPr>
-            <a:r>
-              <a:rPr sz="1050" b="0" i="0">
-                <a:solidFill>
-                  <a:srgbClr val="6B2E2A"/>
-                </a:solidFill>
-                <a:latin typeface="Calibri"/>
-              </a:rPr>
-              <a:t>✗   Temeli Spring Boot 3.5 — Boot 4 ortamımızda YÜKLENMİYOR</a:t>
-            </a:r>
-          </a:p>
-          <a:p>
-            <a:pPr algn="l">
-              <a:lnSpc>
-                <a:spcPct val="103000"/>
-              </a:lnSpc>
-              <a:spcBef>
-                <a:spcPts val="0"/>
-              </a:spcBef>
-              <a:spcAft>
-                <a:spcPts val="600"/>
-              </a:spcAft>
-            </a:pPr>
-            <a:r>
-              <a:rPr sz="1050" b="0" i="0">
-                <a:solidFill>
-                  <a:srgbClr val="6B2E2A"/>
-                </a:solidFill>
-                <a:latin typeface="Calibri"/>
-              </a:rPr>
-              <a:t>✗   Haziran 2026'da destek bitti: yeni güvenlik yaması gelmiyor</a:t>
-            </a:r>
-          </a:p>
-          <a:p>
-            <a:pPr algn="l">
-              <a:lnSpc>
-                <a:spcPct val="103000"/>
-              </a:lnSpc>
-              <a:spcBef>
-                <a:spcPts val="0"/>
-              </a:spcBef>
-              <a:spcAft>
-                <a:spcPts val="600"/>
-              </a:spcAft>
-            </a:pPr>
-            <a:r>
-              <a:rPr sz="1050" b="0" i="0">
-                <a:solidFill>
-                  <a:srgbClr val="6B2E2A"/>
-                </a:solidFill>
-                <a:latin typeface="Calibri"/>
-              </a:rPr>
-              <a:t>✗   MCP topluluk tarafında, eski spesifikasyonda kaldı</a:t>
-            </a:r>
-          </a:p>
-          <a:p>
-            <a:pPr algn="l">
-              <a:lnSpc>
-                <a:spcPct val="103000"/>
-              </a:lnSpc>
-              <a:spcBef>
-                <a:spcPts val="0"/>
-              </a:spcBef>
-              <a:spcAft>
-                <a:spcPts val="600"/>
-              </a:spcAft>
-            </a:pPr>
-            <a:r>
-              <a:rPr sz="1050" b="0" i="0">
-                <a:solidFill>
-                  <a:srgbClr val="6B2E2A"/>
-                </a:solidFill>
-                <a:latin typeface="Calibri"/>
-              </a:rPr>
-              <a:t>✗   Servis çağırma döngüsü kütüphanenin içinde kapalı — araya yetki/log koyulamıyor</a:t>
-            </a:r>
-          </a:p>
-          <a:p>
-            <a:pPr algn="l">
-              <a:lnSpc>
-                <a:spcPct val="103000"/>
-              </a:lnSpc>
-              <a:spcBef>
-                <a:spcPts val="0"/>
-              </a:spcBef>
-              <a:spcAft>
-                <a:spcPts val="600"/>
-              </a:spcAft>
-            </a:pPr>
-            <a:r>
-              <a:rPr sz="1050" b="0" i="0">
-                <a:solidFill>
-                  <a:srgbClr val="6B2E2A"/>
-                </a:solidFill>
-                <a:latin typeface="Calibri"/>
-              </a:rPr>
-              <a:t>✗   Jackson 2 · sağlayıcı başına birden çok varyant</a:t>
-            </a:r>
-          </a:p>
-        </p:txBody>
-      </p:sp>
-      <p:sp>
-        <p:nvSpPr>
-          <p:cNvPr id="7" name="Rounded Rectangle 6"/>
-          <p:cNvSpPr/>
-          <p:nvPr/>
-        </p:nvSpPr>
-        <p:spPr>
-          <a:xfrm>
-            <a:off x="4709159" y="1810512"/>
-            <a:ext cx="3977639" cy="2697480"/>
-          </a:xfrm>
-          <a:prstGeom prst="roundRect">
-            <a:avLst>
-              <a:gd name="adj" fmla="val 4000"/>
-            </a:avLst>
-          </a:prstGeom>
-          <a:solidFill>
-            <a:srgbClr val="EAF3EA"/>
-          </a:solidFill>
-          <a:ln w="9525">
-            <a:solidFill>
-              <a:srgbClr val="C3DDC3"/>
-            </a:solidFill>
-          </a:ln>
-          <a:effectLst/>
-        </p:spPr>
-        <p:style>
-          <a:lnRef idx="1">
-            <a:schemeClr val="accent1"/>
-          </a:lnRef>
-          <a:fillRef idx="3">
-            <a:schemeClr val="accent1"/>
-          </a:fillRef>
-          <a:effectRef idx="2">
-            <a:schemeClr val="accent1"/>
-          </a:effectRef>
-          <a:fontRef idx="minor">
-            <a:schemeClr val="lt1"/>
-          </a:fontRef>
-        </p:style>
-        <p:txBody>
-          <a:bodyPr rtlCol="0" anchor="ctr" wrap="square" lIns="155448" rIns="155448" tIns="118872" bIns="118872"/>
-          <a:lstStyle/>
-          <a:p>
-            <a:pPr algn="l">
-              <a:lnSpc>
-                <a:spcPct val="100000"/>
-              </a:lnSpc>
-              <a:spcBef>
-                <a:spcPts val="0"/>
-              </a:spcBef>
-              <a:spcAft>
-                <a:spcPts val="100"/>
-              </a:spcAft>
-            </a:pPr>
-            <a:r>
-              <a:rPr sz="1400" b="1" i="0">
-                <a:solidFill>
-                  <a:srgbClr val="2E6B2E"/>
-                </a:solidFill>
-                <a:latin typeface="Calibri"/>
-              </a:rPr>
-              <a:t>Spring AI 2.x</a:t>
-            </a:r>
-          </a:p>
-          <a:p>
-            <a:pPr algn="l">
-              <a:lnSpc>
-                <a:spcPct val="100000"/>
-              </a:lnSpc>
-              <a:spcBef>
-                <a:spcPts val="0"/>
-              </a:spcBef>
-              <a:spcAft>
-                <a:spcPts val="700"/>
-              </a:spcAft>
-            </a:pPr>
-            <a:r>
-              <a:rPr sz="950" b="0" i="0">
-                <a:solidFill>
-                  <a:srgbClr val="2E6B2E"/>
-                </a:solidFill>
-                <a:latin typeface="Calibri"/>
-              </a:rPr>
-              <a:t>seçtiğimiz hat</a:t>
-            </a:r>
-          </a:p>
-          <a:p>
-            <a:pPr algn="l">
-              <a:lnSpc>
-                <a:spcPct val="103000"/>
-              </a:lnSpc>
-              <a:spcBef>
-                <a:spcPts val="0"/>
-              </a:spcBef>
-              <a:spcAft>
-                <a:spcPts val="600"/>
-              </a:spcAft>
-            </a:pPr>
-            <a:r>
-              <a:rPr sz="1050" b="0" i="0">
-                <a:solidFill>
-                  <a:srgbClr val="284F28"/>
-                </a:solidFill>
-                <a:latin typeface="Calibri"/>
-              </a:rPr>
-              <a:t>✓   Temeli Boot 4 · Java 25 — Zeus 2.0.0 platformuyla birebir aynı</a:t>
-            </a:r>
-          </a:p>
-          <a:p>
-            <a:pPr algn="l">
-              <a:lnSpc>
-                <a:spcPct val="103000"/>
-              </a:lnSpc>
-              <a:spcBef>
-                <a:spcPts val="0"/>
-              </a:spcBef>
-              <a:spcAft>
-                <a:spcPts val="600"/>
-              </a:spcAft>
-            </a:pPr>
-            <a:r>
-              <a:rPr sz="1050" b="0" i="0">
-                <a:solidFill>
-                  <a:srgbClr val="284F28"/>
-                </a:solidFill>
-                <a:latin typeface="Calibri"/>
-              </a:rPr>
-              <a:t>✓   Aktif destek hattı; kurumsal kullanım için tek makul seçenek</a:t>
-            </a:r>
-          </a:p>
-          <a:p>
-            <a:pPr algn="l">
-              <a:lnSpc>
-                <a:spcPct val="103000"/>
-              </a:lnSpc>
-              <a:spcBef>
-                <a:spcPts val="0"/>
-              </a:spcBef>
-              <a:spcAft>
-                <a:spcPts val="600"/>
-              </a:spcAft>
-            </a:pPr>
-            <a:r>
-              <a:rPr sz="1050" b="0" i="0">
-                <a:solidFill>
-                  <a:srgbClr val="284F28"/>
-                </a:solidFill>
-                <a:latin typeface="Calibri"/>
-              </a:rPr>
-              <a:t>✓   MCP çekirdekte: @McpTool anotasyonu, resmî Java SDK 2.0, güncel spesifikasyon</a:t>
-            </a:r>
-          </a:p>
-          <a:p>
-            <a:pPr algn="l">
-              <a:lnSpc>
-                <a:spcPct val="103000"/>
-              </a:lnSpc>
-              <a:spcBef>
-                <a:spcPts val="0"/>
-              </a:spcBef>
-              <a:spcAft>
-                <a:spcPts val="600"/>
-              </a:spcAft>
-            </a:pPr>
-            <a:r>
-              <a:rPr sz="1050" b="0" i="0">
-                <a:solidFill>
-                  <a:srgbClr val="284F28"/>
-                </a:solidFill>
-                <a:latin typeface="Calibri"/>
-              </a:rPr>
-              <a:t>✓   Servis çağırma döngüsü açıldı — kendi yetki, log ve sınır kontrollerimizi araya koyabiliyoruz</a:t>
-            </a:r>
-          </a:p>
-          <a:p>
-            <a:pPr algn="l">
-              <a:lnSpc>
-                <a:spcPct val="103000"/>
-              </a:lnSpc>
-              <a:spcBef>
-                <a:spcPts val="0"/>
-              </a:spcBef>
-              <a:spcAft>
-                <a:spcPts val="600"/>
-              </a:spcAft>
-            </a:pPr>
-            <a:r>
-              <a:rPr sz="1050" b="0" i="0">
-                <a:solidFill>
-                  <a:srgbClr val="284F28"/>
-                </a:solidFill>
-                <a:latin typeface="Calibri"/>
-              </a:rPr>
-              <a:t>✓   Jackson 3 · null-güvenliği · sağlayıcı başına tek, sade uygulama</a:t>
-            </a:r>
-          </a:p>
-        </p:txBody>
-      </p:sp>
-      <p:sp>
-        <p:nvSpPr>
-          <p:cNvPr id="8" name="Rounded Rectangle 7"/>
-          <p:cNvSpPr/>
-          <p:nvPr/>
-        </p:nvSpPr>
-        <p:spPr>
-          <a:xfrm>
-            <a:off x="457200" y="4846320"/>
-            <a:ext cx="8229600" cy="777240"/>
-          </a:xfrm>
-          <a:prstGeom prst="roundRect">
-            <a:avLst>
-              <a:gd name="adj" fmla="val 4000"/>
-            </a:avLst>
-          </a:prstGeom>
-          <a:solidFill>
-            <a:srgbClr val="EEF2F8"/>
-          </a:solidFill>
-          <a:ln>
-            <a:noFill/>
-          </a:ln>
-          <a:effectLst/>
-        </p:spPr>
-        <p:style>
-          <a:lnRef idx="1">
-            <a:schemeClr val="accent1"/>
-          </a:lnRef>
-          <a:fillRef idx="3">
-            <a:schemeClr val="accent1"/>
-          </a:fillRef>
-          <a:effectRef idx="2">
-            <a:schemeClr val="accent1"/>
-          </a:effectRef>
-          <a:fontRef idx="minor">
-            <a:schemeClr val="lt1"/>
-          </a:fontRef>
-        </p:style>
-        <p:txBody>
-          <a:bodyPr rtlCol="0" anchor="ctr" wrap="square" lIns="155448" rIns="155448" tIns="118872" bIns="118872"/>
-          <a:lstStyle/>
-          <a:p>
-            <a:pPr algn="ctr">
-              <a:lnSpc>
-                <a:spcPct val="105000"/>
-              </a:lnSpc>
-              <a:spcBef>
-                <a:spcPts val="0"/>
-              </a:spcBef>
-              <a:spcAft>
-                <a:spcPts val="200"/>
-              </a:spcAft>
-            </a:pPr>
-            <a:r>
-              <a:rPr sz="1150" b="1" i="0">
-                <a:solidFill>
-                  <a:srgbClr val="1F3864"/>
-                </a:solidFill>
-                <a:latin typeface="Calibri"/>
-              </a:rPr>
-              <a:t>Bu kararı aslında geçen çeyrekte verdik: Boot 4'e geçmemiş olsaydık Spring AI 2.x'i çalıştıramazdık.</a:t>
-            </a:r>
-          </a:p>
-          <a:p>
-            <a:pPr algn="ctr">
-              <a:lnSpc>
-                <a:spcPct val="105000"/>
-              </a:lnSpc>
-              <a:spcBef>
-                <a:spcPts val="0"/>
-              </a:spcBef>
-              <a:spcAft>
-                <a:spcPts val="200"/>
-              </a:spcAft>
-            </a:pPr>
-            <a:r>
-              <a:rPr sz="1050" b="0" i="0">
+                <a:spcPts val="300"/>
+              </a:spcAft>
+            </a:pPr>
+            <a:r>
+              <a:rPr sz="1100" b="0" i="1">
                 <a:solidFill>
                   <a:srgbClr val="595959"/>
                 </a:solidFill>
                 <a:latin typeface="Calibri"/>
               </a:rPr>
-              <a:t>1.x ise bugün destek dışı. MCP'yi kurumsal ölçekte taşıyabilecek tek hat 2.x.</a:t>
+              <a:t>Bugün bir talebimiz yok. Yönü paylaşmaya ve görüşünüzü almaya geldik.</a:t>
             </a:r>
           </a:p>
         </p:txBody>

--- a/sunum/mcp-server-stratejisi.pptx
+++ b/sunum/mcp-server-stratejisi.pptx
@@ -871,12 +871,22 @@
           </a:p>
           <a:p>
             <a:r>
-              <a:t>• MCP, JSON-RPC 2.0 üzerine kurulu; taşıma olarak yerel süreçte stdio, ağ üzerinde HTTP.</a:t>
-            </a:r>
-          </a:p>
-          <a:p>
-            <a:r>
-              <a:t>  Spring AI 2.0'da streamable HTTP varsayılan, eski SSE taşıması önerilmiyor.</a:t>
+              <a:t>• MCP, JSON-RPC 2.0 üzerine kurulu; transport (bağlantı biçimi) olarak yerel süreçte stdio,</a:t>
+            </a:r>
+          </a:p>
+          <a:p>
+            <a:r>
+              <a:t>  ağ üzerinde HTTP. Spring AI 2.0'da streamable HTTP varsayılan; eski SSE transport'u</a:t>
+            </a:r>
+          </a:p>
+          <a:p>
+            <a:r>
+              <a:t>  önerilmiyor — uzun ömürlü bağlantı tuttuğu için kurumsal proxy ve yük dengeleyicilerle</a:t>
+            </a:r>
+          </a:p>
+          <a:p>
+            <a:r>
+              <a:t>  iyi geçinmiyor.</a:t>
             </a:r>
           </a:p>
           <a:p>
@@ -907,6 +917,69 @@
           <a:p>
             <a:r>
               <a:t>• "Standart mı?" → Açık spesifikasyon; Spring AI 2.0 resmî Java SDK ile 2025-11-25 sürümünü uyguluyor.</a:t>
+            </a:r>
+          </a:p>
+          <a:p/>
+          <a:p>
+            <a:r>
+              <a:t>• "Uygulama yeteneğini tam olarak nasıl bildiriyor?" → İki katmanda:</a:t>
+            </a:r>
+          </a:p>
+          <a:p>
+            <a:r>
+              <a:t>  1) KODDA: mevcut servis metodunun üstüne @McpTool, parametrelere @McpToolParam.</a:t>
+            </a:r>
+          </a:p>
+          <a:p>
+            <a:r>
+              <a:t>  2) PROTOKOLDE: client bağlanınca tools/list çağırır; sunucu metot imzasından JSON Schema</a:t>
+            </a:r>
+          </a:p>
+          <a:p>
+            <a:r>
+              <a:t>     türetip isim + açıklama + parametre şeması döner. Model Java kodunu görmez, bu üçünü görür.</a:t>
+            </a:r>
+          </a:p>
+          <a:p>
+            <a:r>
+              <a:t>  KRİTİK: description bir yorum değil, ARAYÜZ SÖZLEŞMESİDİR. Model seçimini ona bakarak yapar;</a:t>
+            </a:r>
+          </a:p>
+          <a:p>
+            <a:r>
+              <a:t>  muğlak açıklama = tool ya hiç çağrılmaz ya yanlış çağrılır. Ekiplere verilecek tek kural budur.</a:t>
+            </a:r>
+          </a:p>
+          <a:p/>
+          <a:p>
+            <a:r>
+              <a:t>• "Yani her yetenek iki satıra mı iniyor?" → HAYIR, bu abartıya girmeyin. Yalnızca SERVİSİ</a:t>
+            </a:r>
+          </a:p>
+          <a:p>
+            <a:r>
+              <a:t>  ZATEN OLAN yetenekler için doğru. Servis yoksa servisi yine yazacaksınız — MCP servis yazmayı</a:t>
+            </a:r>
+          </a:p>
+          <a:p>
+            <a:r>
+              <a:t>  ortadan kaldırmıyor, var olan servisi asistana açmanın maliyetini ortadan kaldırıyor.</a:t>
+            </a:r>
+          </a:p>
+          <a:p/>
+          <a:p>
+            <a:r>
+              <a:t>TERİM DİSİPLİNİ: "yetenek" kelimesini yalnızca yönetsel anlamda kullanın (asistanın yapabildiği</a:t>
+            </a:r>
+          </a:p>
+          <a:p>
+            <a:r>
+              <a:t>iş). Protokol anlamında tool / resource / prompt deyin — MCP'de "capability" zaten ayrı ve</a:t>
+            </a:r>
+          </a:p>
+          <a:p>
+            <a:r>
+              <a:t>resmî bir terim, ikisini aynı kelimeyle anmak dinleyiciyi karıştırır.</a:t>
             </a:r>
           </a:p>
           <a:p/>
@@ -1129,6 +1202,72 @@
           <a:p/>
           <a:p>
             <a:r>
+              <a:t>BEKLENEN SORU — "Mevcut bearer token'ımız MCP için de yeterli mi?" (en olası teknik soru)</a:t>
+            </a:r>
+          </a:p>
+          <a:p>
+            <a:r>
+              <a:t>CEVAP: "Evet, çünkü MCP sunucusu uygulamanın içinde, aynı servlet yığınında çalışıyor; istek</a:t>
+            </a:r>
+          </a:p>
+          <a:p>
+            <a:r>
+              <a:t>mevcut JWT filtremizden geçiyor. Ama dört şartla — dördü de bizim kontrol listemizde:</a:t>
+            </a:r>
+          </a:p>
+          <a:p>
+            <a:r>
+              <a:t>  1) MCP endpoint'i filtrenin URL desenine dahil olacak. Filtre /* ise kendiliğinden dahil;</a:t>
+            </a:r>
+          </a:p>
+          <a:p>
+            <a:r>
+              <a:t>     /api/* gibi daraltılmışsa endpoint'i oraya taşıyoruz — bu bir property:</a:t>
+            </a:r>
+          </a:p>
+          <a:p>
+            <a:r>
+              <a:t>     spring.ai.mcp.server.streamable-http.mcp-endpoint=/api/mcp</a:t>
+            </a:r>
+          </a:p>
+          <a:p>
+            <a:r>
+              <a:t>  2) Tool metodu istek thread'inde çalışacak (senkron STREAMABLE); aksi halde ThreadLocal'daki</a:t>
+            </a:r>
+          </a:p>
+          <a:p>
+            <a:r>
+              <a:t>     kimlik taşınmaz. Bunu varsaymıyoruz, ilk iş deneme tool'uyla ölçeceğiz.</a:t>
+            </a:r>
+          </a:p>
+          <a:p>
+            <a:r>
+              <a:t>  3) Tool içinde metot seviyesinde yetki kontrolü olacak (@PreAuthorize).</a:t>
+            </a:r>
+          </a:p>
+          <a:p>
+            <a:r>
+              <a:t>  4) Chat uygulaması SON KULLANICININ token'ını taşıyacak, kendi servis token'ını değil."</a:t>
+            </a:r>
+          </a:p>
+          <a:p>
+            <a:r>
+              <a:t>DİKKAT: 4. madde bizim değil, chat uygulamasının kararı. Servis token'ı gönderilirse</a:t>
+            </a:r>
+          </a:p>
+          <a:p>
+            <a:r>
+              <a:t>"kullanıcının göremediğini asistan da göremez" cümlesi teknik olarak YANLIŞ olur.</a:t>
+            </a:r>
+          </a:p>
+          <a:p>
+            <a:r>
+              <a:t>Bu bağımlılığı o ekiple netleştirmemiz gerekiyor — sunumda "otomatik" demeyin.</a:t>
+            </a:r>
+          </a:p>
+          <a:p/>
+          <a:p>
+            <a:r>
               <a:t>GEÇİŞ CÜMLESİ (kritik — bir sonraki slaydın kurgusu buna dayanıyor):</a:t>
             </a:r>
           </a:p>
@@ -1236,32 +1375,42 @@
           </a:p>
           <a:p>
             <a:r>
-              <a:t>"Birinci söz: yetki ve kayıt bizim elimizde kalacaktı. 1.x'te modelin araç çağırma döngüsü</a:t>
-            </a:r>
-          </a:p>
-          <a:p>
-            <a:r>
-              <a:t>kütüphanenin kendi sınıfının içinde kapalıydı; araya kendi yetki kontrolümüzü, kaydımızı veya</a:t>
-            </a:r>
-          </a:p>
-          <a:p>
-            <a:r>
-              <a:t>yeniden deneme politikamızı koyamıyorduk — ancak kütüphaneyi çatallayarak müdahale edilebilirdi.</a:t>
-            </a:r>
-          </a:p>
-          <a:p>
-            <a:r>
-              <a:t>Yani birinci sözü tutamıyorduk.</a:t>
-            </a:r>
-          </a:p>
-          <a:p>
-            <a:r>
-              <a:t>İkinci söz: güncel protokol. 1.x'te MCP topluluk tarafındaydı ve eski spesifikasyonda kaldı.</a:t>
-            </a:r>
-          </a:p>
-          <a:p>
-            <a:r>
-              <a:t>İkinci sözü de tutamıyorduk.</a:t>
+              <a:t>"Birinci söz: yetki ve denetim kaydı bizim elimizde kalacaktı. Model bir tool çağırmak</a:t>
+            </a:r>
+          </a:p>
+          <a:p>
+            <a:r>
+              <a:t>istediğinde biri o tool'u çalıştırıp sonucu modele geri vermeli ve modeli tekrar çağırmalı;</a:t>
+            </a:r>
+          </a:p>
+          <a:p>
+            <a:r>
+              <a:t>bu tekrara TOOL CALLING DÖNGÜSÜ diyoruz. 1.x'te bu döngü model sınıfının içinde private bir</a:t>
+            </a:r>
+          </a:p>
+          <a:p>
+            <a:r>
+              <a:t>while'dı — araya yetki kontrolü, denetim kaydı, tur sınırı veya kota koyamıyorduk; müdahalenin</a:t>
+            </a:r>
+          </a:p>
+          <a:p>
+            <a:r>
+              <a:t>tek yolu kütüphaneyi çatallamaktı. Yani birinci sözü tutamıyorduk.</a:t>
+            </a:r>
+          </a:p>
+          <a:p>
+            <a:r>
+              <a:t>İkinci söz: güncel protokol. MCP tarihle sürümlenir: 2024-11-05 → 2025-03-26 → 2025-06-18 →</a:t>
+            </a:r>
+          </a:p>
+          <a:p>
+            <a:r>
+              <a:t>2025-11-25. 1.x eski tarihli bir sürümde kaldı; standart yetkilendirme ve streamable HTTP</a:t>
+            </a:r>
+          </a:p>
+          <a:p>
+            <a:r>
+              <a:t>transport o sürümde henüz yoktu. İkinci sözü de tutamıyorduk.</a:t>
             </a:r>
           </a:p>
           <a:p>
@@ -1282,12 +1431,27 @@
           </a:p>
           <a:p>
             <a:r>
-              <a:t>"2.0 bu döngüyü dışarı çıkardı: yetki, kayıt ve sınır kontrolü araya girebiliyor. MCP çekirdeğe</a:t>
-            </a:r>
-          </a:p>
-          <a:p>
-            <a:r>
-              <a:t>alındı: güncel spesifikasyon, resmî Java SDK. Temeli Boot 4 ve Java 25 — Zeus 2.0.0 ile birebir aynı."</a:t>
+              <a:t>"2.0'da döngü advisor zincirine taşındı. En kolay anlaşılan karşılığı SERVLET FILTER CHAIN:</a:t>
+            </a:r>
+          </a:p>
+          <a:p>
+            <a:r>
+              <a:t>1.x'te konteyner isteği işliyordu ama siz filtre ekleyemiyordunuz; 2.0'da döngü zincirin bir</a:t>
+            </a:r>
+          </a:p>
+          <a:p>
+            <a:r>
+              <a:t>halkası oldu — tıpkı JWT filtremizi zincire eklediğimiz gibi, tool çağrılarının etrafına kendi</a:t>
+            </a:r>
+          </a:p>
+          <a:p>
+            <a:r>
+              <a:t>halkamızı ekleyebiliyoruz. MCP çekirdeğe alındı: 2025-11-25 sürümü, resmî Java SDK 2.0.</a:t>
+            </a:r>
+          </a:p>
+          <a:p>
+            <a:r>
+              <a:t>Temeli Boot 4 ve Java 25 — Zeus 2.0.0 ile birebir aynı."</a:t>
             </a:r>
           </a:p>
           <a:p/>
@@ -1336,6 +1500,37 @@
           <a:p>
             <a:r>
               <a:t>zaten bildiği programlama modeli. İkinci bir yaşam döngüsünü ayrıca takip etmek istemiyoruz."</a:t>
+            </a:r>
+          </a:p>
+          <a:p/>
+          <a:p>
+            <a:r>
+              <a:t>BEKLENEN SORU — "Jackson 2 / Jackson 3 farkı bu kararda rol oynadı mı?"</a:t>
+            </a:r>
+          </a:p>
+          <a:p>
+            <a:r>
+              <a:t>CEVAP: "Hayır. Jackson 2 ile 3 farklı paket adları sayesinde aynı classpath'te yan yana</a:t>
+            </a:r>
+          </a:p>
+          <a:p>
+            <a:r>
+              <a:t>durabiliyor; bir kütüphanenin içeride Jackson 2 kullanması onu Boot 4'te kullanılamaz yapmaz.</a:t>
+            </a:r>
+          </a:p>
+          <a:p>
+            <a:r>
+              <a:t>1.x'i eleyen şey Boot 4'te hiç yüklenmemesi ve destek dışı kalması. Jackson bir belirti,</a:t>
+            </a:r>
+          </a:p>
+          <a:p>
+            <a:r>
+              <a:t>gerekçe değil." NOT: Slaytta Jackson'ı bilerek gerekçe olarak SAYMIYORUZ — çürütülebilir bir</a:t>
+            </a:r>
+          </a:p>
+          <a:p>
+            <a:r>
+              <a:t>madde, çürütüldüğünde diğer maddelere duyulan güveni de zedeler.</a:t>
             </a:r>
           </a:p>
           <a:p/>
@@ -6578,7 +6773,7 @@
                 </a:solidFill>
                 <a:latin typeface="Calibri"/>
               </a:rPr>
-              <a:t>Soruyu alır, hangi yetenekler var diye sorar, gerekeni çağırır. Bugün çalışıyor.</a:t>
+              <a:t>Soruyu alır, karşı tarafta hangi tool'lar var diye sorar, gerekeni çağırır. Bugün çalışıyor.</a:t>
             </a:r>
           </a:p>
         </p:txBody>
@@ -6800,7 +6995,7 @@
                 </a:solidFill>
                 <a:latin typeface="Calibri"/>
               </a:rPr>
-              <a:t>«Şunu yapabilirim» diye yeteneğini bildirir, çağrıldığında çalıştırır. Kuracağımız bu.</a:t>
+              <a:t>Mevcut servis metodunu tool olarak bildirir, çağrıldığında çalıştırır. Kuracağımız bu.</a:t>
             </a:r>
           </a:p>
         </p:txBody>
@@ -8728,7 +8923,7 @@
                 </a:solidFill>
                 <a:latin typeface="Calibri"/>
               </a:rPr>
-              <a:t>SINAV:   ① Yetki ve kayıt bizim elimizde kalacak      ②  MCP'yi güncel spesifikasyonla konuşacağız</a:t>
+              <a:t>SINAV:   ① Yetki ve denetim kaydı bizim elimizde kalacak      ②  MCP'yi güncel spesifikasyon sürümüyle konuşacağız</a:t>
             </a:r>
           </a:p>
           <a:p>
@@ -8839,7 +9034,7 @@
                 </a:solidFill>
                 <a:latin typeface="Calibri"/>
               </a:rPr>
-              <a:t>✗   ① Servis çağırma döngüsü kütüphanenin içinde KAPALI. Araya kendi yetki ve kayıt kontrolümüzü koyamıyoruz. Birinci sözü tutamıyoruz.</a:t>
+              <a:t>✗   ① Tool calling döngüsü kütüphanenin İÇİNE GÖMÜLÜ — servlet filtresi ekler gibi araya kendi halkamızı koyamıyoruz. Birinci sözü tutamıyoruz.</a:t>
             </a:r>
           </a:p>
           <a:p>
@@ -8861,7 +9056,7 @@
                 </a:solidFill>
                 <a:latin typeface="Calibri"/>
               </a:rPr>
-              <a:t>✗   ② MCP topluluk tarafında kalmış, eski spesifikasyon. İkinci sözü tutamıyoruz.</a:t>
+              <a:t>✗   ② MCP desteği toplulukta ve spesifikasyonun ESKİ TARİHLİ sürümünde: standart yetkilendirme ve streamable HTTP yok. İkinci sözü tutamıyoruz.</a:t>
             </a:r>
           </a:p>
           <a:p>
@@ -8994,7 +9189,7 @@
                 </a:solidFill>
                 <a:latin typeface="Calibri"/>
               </a:rPr>
-              <a:t>✓   ① Çağırma döngüsü dışarı çıkarıldı. Yetki, kayıt ve sınır kontrolü araya girebiliyor. Birinci söz tutuluyor.</a:t>
+              <a:t>✓   ① Tool calling döngüsü ADVISOR ZİNCİRİNDE — servlet filtre zinciri gibi araya kendi halkamızı ekliyoruz: yetki, denetim kaydı, kota. Birinci söz tutuluyor.</a:t>
             </a:r>
           </a:p>
           <a:p>
@@ -9016,7 +9211,7 @@
                 </a:solidFill>
                 <a:latin typeface="Calibri"/>
               </a:rPr>
-              <a:t>✓   ② MCP kütüphanenin çekirdeğinde: güncel spesifikasyon, resmî Java SDK. İkinci söz tutuluyor.</a:t>
+              <a:t>✓   ② MCP kütüphanenin çekirdeğinde: spesifikasyonun 2025‑11‑25 sürümü, resmî Java SDK 2.0. İkinci söz tutuluyor.</a:t>
             </a:r>
           </a:p>
           <a:p>
